--- a/presentasi/Kemitraan_Strategis_PAUD_HI.pptx
+++ b/presentasi/Kemitraan_Strategis_PAUD_HI.pptx
@@ -1151,7 +1151,7 @@
           <a:p>
             <a:r>
               <a:rPr lang="en-US" dirty="0"/>
-              <a:t>Gunakan empat prinsip ini sebagai alat cek cepat saat menilai kegiatan di satuan.</a:t>
+              <a:t>Empat elemen PAUD Berkualitas di kanan berasal dari panduan Direktorat PAUD: pembelajaran berkualitas, kemitraan orang tua, dukungan pemenuhan kebutuhan esensial, dan kepemimpinan untuk perbaikan berkelanjutan.</a:t>
             </a:r>
             <a:endParaRPr lang="en-US" dirty="0"/>
           </a:p>
@@ -2471,7 +2471,7 @@
           <a:p>
             <a:r>
               <a:rPr lang="en-US" dirty="0"/>
-              <a:t>Enam strategi ini saling menopang; mulai dari yang paling mungkin dikerjakan lebih dulu.</a:t>
+              <a:t>Enam strategi satuan di kiri; lima jalur strategi Direktorat PAUD di kanan. Tekankan keterhubungannya.</a:t>
             </a:r>
             <a:endParaRPr lang="en-US" dirty="0"/>
           </a:p>
@@ -3263,7 +3263,7 @@
           <a:p>
             <a:r>
               <a:rPr lang="en-US" dirty="0"/>
-              <a:t>Hindari klaim angka yang tidak berdasar. Gunakan rumusan Perpres 60/2013: kualitas SDM ditentukan kualitas perkembangan anak usia dini.</a:t>
+              <a:t>Gunakan rumusan Perpres 60/2013: kualitas SDM ditentukan kualitas perkembangan anak usia dini.</a:t>
             </a:r>
             <a:endParaRPr lang="en-US" dirty="0"/>
           </a:p>
@@ -3812,9 +3812,87 @@
           <a:chExt cx="0" cy="0"/>
         </a:xfrm>
       </p:grpSpPr>
+      <p:sp>
+        <p:nvSpPr>
+          <p:cNvPr id="2" name="Shape 0"/>
+          <p:cNvSpPr/>
+          <p:nvPr/>
+        </p:nvSpPr>
+        <p:spPr>
+          <a:xfrm>
+            <a:off x="7863840" y="-2011680"/>
+            <a:ext cx="6583680" cy="6583680"/>
+          </a:xfrm>
+          <a:prstGeom prst="ellipse">
+            <a:avLst/>
+          </a:prstGeom>
+          <a:solidFill>
+            <a:srgbClr val="1E76C8">
+              <a:alpha val="42000"/>
+            </a:srgbClr>
+          </a:solidFill>
+          <a:ln/>
+        </p:spPr>
+      </p:sp>
+      <p:sp>
+        <p:nvSpPr>
+          <p:cNvPr id="3" name="Shape 1"/>
+          <p:cNvSpPr/>
+          <p:nvPr/>
+        </p:nvSpPr>
+        <p:spPr>
+          <a:xfrm>
+            <a:off x="-1828800" y="3291840"/>
+            <a:ext cx="4023360" cy="4023360"/>
+          </a:xfrm>
+          <a:prstGeom prst="ellipse">
+            <a:avLst/>
+          </a:prstGeom>
+          <a:solidFill>
+            <a:srgbClr val="2FA36B">
+              <a:alpha val="32000"/>
+            </a:srgbClr>
+          </a:solidFill>
+          <a:ln/>
+        </p:spPr>
+      </p:sp>
+      <p:sp>
+        <p:nvSpPr>
+          <p:cNvPr id="4" name="Shape 2"/>
+          <p:cNvSpPr/>
+          <p:nvPr/>
+        </p:nvSpPr>
+        <p:spPr>
+          <a:xfrm>
+            <a:off x="6056071" y="1234440"/>
+            <a:ext cx="5650992" cy="4370832"/>
+          </a:xfrm>
+          <a:prstGeom prst="roundRect">
+            <a:avLst>
+              <a:gd name="adj" fmla="val 2929"/>
+            </a:avLst>
+          </a:prstGeom>
+          <a:solidFill>
+            <a:srgbClr val="FFFFFF"/>
+          </a:solidFill>
+          <a:ln w="12700">
+            <a:solidFill>
+              <a:srgbClr val="333333"/>
+            </a:solidFill>
+            <a:prstDash val="solid"/>
+          </a:ln>
+          <a:effectLst>
+            <a:outerShdw sx="100000" sy="100000" kx="0" ky="0" algn="bl" rotWithShape="0" blurRad="177800" dist="38100" dir="5400000">
+              <a:srgbClr val="0F3352">
+                <a:alpha val="10000"/>
+              </a:srgbClr>
+            </a:outerShdw>
+          </a:effectLst>
+        </p:spPr>
+      </p:sp>
       <p:pic>
         <p:nvPicPr>
-          <p:cNvPr id="2" name="Image 0" descr="preencoded.png">    </p:cNvPr>
+          <p:cNvPr id="5" name="Image 0" descr="preencoded.png">    </p:cNvPr>
           <p:cNvPicPr>
             <a:picLocks noChangeAspect="1"/>
           </p:cNvPicPr>
@@ -3828,8 +3906,8 @@
         </p:blipFill>
         <p:spPr>
           <a:xfrm>
-            <a:off x="0" y="3200491"/>
-            <a:ext cx="12191695" cy="3657509"/>
+            <a:off x="6138367" y="1316736"/>
+            <a:ext cx="5486400" cy="4206240"/>
           </a:xfrm>
           <a:prstGeom prst="rect">
             <a:avLst/>
@@ -3838,57 +3916,13 @@
       </p:pic>
       <p:sp>
         <p:nvSpPr>
-          <p:cNvPr id="3" name="Shape 0"/>
-          <p:cNvSpPr/>
-          <p:nvPr/>
-        </p:nvSpPr>
-        <p:spPr>
-          <a:xfrm>
-            <a:off x="8595360" y="-1371600"/>
-            <a:ext cx="5120640" cy="5120640"/>
-          </a:xfrm>
-          <a:prstGeom prst="ellipse">
-            <a:avLst/>
-          </a:prstGeom>
-          <a:solidFill>
-            <a:srgbClr val="1E76C8">
-              <a:alpha val="45000"/>
-            </a:srgbClr>
-          </a:solidFill>
-          <a:ln/>
-        </p:spPr>
-      </p:sp>
-      <p:sp>
-        <p:nvSpPr>
-          <p:cNvPr id="4" name="Shape 1"/>
-          <p:cNvSpPr/>
-          <p:nvPr/>
-        </p:nvSpPr>
-        <p:spPr>
-          <a:xfrm>
-            <a:off x="-1463040" y="2011680"/>
-            <a:ext cx="3108960" cy="3108960"/>
-          </a:xfrm>
-          <a:prstGeom prst="ellipse">
-            <a:avLst/>
-          </a:prstGeom>
-          <a:solidFill>
-            <a:srgbClr val="2FA36B">
-              <a:alpha val="35000"/>
-            </a:srgbClr>
-          </a:solidFill>
-          <a:ln/>
-        </p:spPr>
-      </p:sp>
-      <p:sp>
-        <p:nvSpPr>
-          <p:cNvPr id="5" name="Shape 2"/>
-          <p:cNvSpPr/>
-          <p:nvPr/>
-        </p:nvSpPr>
-        <p:spPr>
-          <a:xfrm>
-            <a:off x="566928" y="502920"/>
+          <p:cNvPr id="6" name="Shape 3"/>
+          <p:cNvSpPr/>
+          <p:nvPr/>
+        </p:nvSpPr>
+        <p:spPr>
+          <a:xfrm>
+            <a:off x="566928" y="822960"/>
             <a:ext cx="3200400" cy="384048"/>
           </a:xfrm>
           <a:prstGeom prst="roundRect">
@@ -3904,13 +3938,13 @@
       </p:sp>
       <p:sp>
         <p:nvSpPr>
-          <p:cNvPr id="6" name="Text 3"/>
-          <p:cNvSpPr/>
-          <p:nvPr/>
-        </p:nvSpPr>
-        <p:spPr>
-          <a:xfrm>
-            <a:off x="566928" y="502920"/>
+          <p:cNvPr id="7" name="Text 4"/>
+          <p:cNvSpPr/>
+          <p:nvPr/>
+        </p:nvSpPr>
+        <p:spPr>
+          <a:xfrm>
+            <a:off x="566928" y="822960"/>
             <a:ext cx="3200400" cy="384048"/>
           </a:xfrm>
           <a:prstGeom prst="rect">
@@ -3943,14 +3977,14 @@
       </p:sp>
       <p:sp>
         <p:nvSpPr>
-          <p:cNvPr id="7" name="Text 4"/>
-          <p:cNvSpPr/>
-          <p:nvPr/>
-        </p:nvSpPr>
-        <p:spPr>
-          <a:xfrm>
-            <a:off x="566928" y="969264"/>
-            <a:ext cx="8778240" cy="1371600"/>
+          <p:cNvPr id="8" name="Text 5"/>
+          <p:cNvSpPr/>
+          <p:nvPr/>
+        </p:nvSpPr>
+        <p:spPr>
+          <a:xfrm>
+            <a:off x="566928" y="1463040"/>
+            <a:ext cx="5394960" cy="1920240"/>
           </a:xfrm>
           <a:prstGeom prst="rect">
             <a:avLst/>
@@ -3964,12 +3998,12 @@
           <a:p>
             <a:pPr indent="0" marL="0">
               <a:lnSpc>
-                <a:spcPts val="4000"/>
+                <a:spcPts val="3300"/>
               </a:lnSpc>
               <a:buNone/>
             </a:pPr>
             <a:r>
-              <a:rPr lang="en-US" sz="3600" b="1" dirty="0">
+              <a:rPr lang="en-US" sz="2900" b="1" dirty="0">
                 <a:solidFill>
                   <a:srgbClr val="FFFFFF"/>
                 </a:solidFill>
@@ -3979,17 +4013,17 @@
               </a:rPr>
               <a:t>Penguatan Kemitraan Strategis</a:t>
             </a:r>
-            <a:endParaRPr lang="en-US" sz="3600" dirty="0"/>
+            <a:endParaRPr lang="en-US" sz="2900" dirty="0"/>
           </a:p>
           <a:p>
             <a:pPr indent="0" marL="0">
               <a:lnSpc>
-                <a:spcPts val="4000"/>
+                <a:spcPts val="3300"/>
               </a:lnSpc>
               <a:buNone/>
             </a:pPr>
             <a:r>
-              <a:rPr lang="en-US" sz="3600" b="1" dirty="0">
+              <a:rPr lang="en-US" sz="2900" b="1" dirty="0">
                 <a:solidFill>
                   <a:srgbClr val="FFFFFF"/>
                 </a:solidFill>
@@ -3999,20 +4033,20 @@
               </a:rPr>
               <a:t>dan PAUD Holistik Integratif</a:t>
             </a:r>
-            <a:endParaRPr lang="en-US" sz="3600" dirty="0"/>
-          </a:p>
-        </p:txBody>
-      </p:sp>
-      <p:sp>
-        <p:nvSpPr>
-          <p:cNvPr id="8" name="Text 5"/>
-          <p:cNvSpPr/>
-          <p:nvPr/>
-        </p:nvSpPr>
-        <p:spPr>
-          <a:xfrm>
-            <a:off x="566928" y="2304288"/>
-            <a:ext cx="8412480" cy="384048"/>
+            <a:endParaRPr lang="en-US" sz="2900" dirty="0"/>
+          </a:p>
+        </p:txBody>
+      </p:sp>
+      <p:sp>
+        <p:nvSpPr>
+          <p:cNvPr id="9" name="Text 6"/>
+          <p:cNvSpPr/>
+          <p:nvPr/>
+        </p:nvSpPr>
+        <p:spPr>
+          <a:xfrm>
+            <a:off x="566928" y="3529584"/>
+            <a:ext cx="5394960" cy="384048"/>
           </a:xfrm>
           <a:prstGeom prst="rect">
             <a:avLst/>
@@ -4028,7 +4062,7 @@
               <a:buNone/>
             </a:pPr>
             <a:r>
-              <a:rPr lang="en-US" sz="1800" dirty="0">
+              <a:rPr lang="en-US" sz="1600" dirty="0">
                 <a:solidFill>
                   <a:srgbClr val="B9DBF6"/>
                 </a:solidFill>
@@ -4038,19 +4072,19 @@
               </a:rPr>
               <a:t>dalam Meningkatkan Mutu Layanan PAUD</a:t>
             </a:r>
-            <a:endParaRPr lang="en-US" sz="1800" dirty="0"/>
-          </a:p>
-        </p:txBody>
-      </p:sp>
-      <p:sp>
-        <p:nvSpPr>
-          <p:cNvPr id="9" name="Shape 6"/>
-          <p:cNvSpPr/>
-          <p:nvPr/>
-        </p:nvSpPr>
-        <p:spPr>
-          <a:xfrm>
-            <a:off x="566928" y="2761488"/>
+            <a:endParaRPr lang="en-US" sz="1600" dirty="0"/>
+          </a:p>
+        </p:txBody>
+      </p:sp>
+      <p:sp>
+        <p:nvSpPr>
+          <p:cNvPr id="10" name="Shape 7"/>
+          <p:cNvSpPr/>
+          <p:nvPr/>
+        </p:nvSpPr>
+        <p:spPr>
+          <a:xfrm>
+            <a:off x="566928" y="3968496"/>
             <a:ext cx="972922" cy="365760"/>
           </a:xfrm>
           <a:prstGeom prst="roundRect">
@@ -4073,13 +4107,13 @@
       </p:sp>
       <p:sp>
         <p:nvSpPr>
-          <p:cNvPr id="10" name="Text 7"/>
-          <p:cNvSpPr/>
-          <p:nvPr/>
-        </p:nvSpPr>
-        <p:spPr>
-          <a:xfrm>
-            <a:off x="566928" y="2761488"/>
+          <p:cNvPr id="11" name="Text 8"/>
+          <p:cNvSpPr/>
+          <p:nvPr/>
+        </p:nvSpPr>
+        <p:spPr>
+          <a:xfrm>
+            <a:off x="566928" y="3968496"/>
             <a:ext cx="972922" cy="365760"/>
           </a:xfrm>
           <a:prstGeom prst="rect">
@@ -4112,13 +4146,13 @@
       </p:sp>
       <p:sp>
         <p:nvSpPr>
-          <p:cNvPr id="11" name="Shape 8"/>
-          <p:cNvSpPr/>
-          <p:nvPr/>
-        </p:nvSpPr>
-        <p:spPr>
-          <a:xfrm>
-            <a:off x="1686154" y="2761488"/>
+          <p:cNvPr id="12" name="Shape 9"/>
+          <p:cNvSpPr/>
+          <p:nvPr/>
+        </p:nvSpPr>
+        <p:spPr>
+          <a:xfrm>
+            <a:off x="1686154" y="3968496"/>
             <a:ext cx="972922" cy="365760"/>
           </a:xfrm>
           <a:prstGeom prst="roundRect">
@@ -4141,13 +4175,13 @@
       </p:sp>
       <p:sp>
         <p:nvSpPr>
-          <p:cNvPr id="12" name="Text 9"/>
-          <p:cNvSpPr/>
-          <p:nvPr/>
-        </p:nvSpPr>
-        <p:spPr>
-          <a:xfrm>
-            <a:off x="1686154" y="2761488"/>
+          <p:cNvPr id="13" name="Text 10"/>
+          <p:cNvSpPr/>
+          <p:nvPr/>
+        </p:nvSpPr>
+        <p:spPr>
+          <a:xfrm>
+            <a:off x="1686154" y="3968496"/>
             <a:ext cx="972922" cy="365760"/>
           </a:xfrm>
           <a:prstGeom prst="rect">
@@ -4180,13 +4214,13 @@
       </p:sp>
       <p:sp>
         <p:nvSpPr>
-          <p:cNvPr id="13" name="Shape 10"/>
-          <p:cNvSpPr/>
-          <p:nvPr/>
-        </p:nvSpPr>
-        <p:spPr>
-          <a:xfrm>
-            <a:off x="2805379" y="2761488"/>
+          <p:cNvPr id="14" name="Shape 11"/>
+          <p:cNvSpPr/>
+          <p:nvPr/>
+        </p:nvSpPr>
+        <p:spPr>
+          <a:xfrm>
+            <a:off x="2805379" y="3968496"/>
             <a:ext cx="2765146" cy="365760"/>
           </a:xfrm>
           <a:prstGeom prst="roundRect">
@@ -4209,13 +4243,13 @@
       </p:sp>
       <p:sp>
         <p:nvSpPr>
-          <p:cNvPr id="14" name="Text 11"/>
-          <p:cNvSpPr/>
-          <p:nvPr/>
-        </p:nvSpPr>
-        <p:spPr>
-          <a:xfrm>
-            <a:off x="2805379" y="2761488"/>
+          <p:cNvPr id="15" name="Text 12"/>
+          <p:cNvSpPr/>
+          <p:nvPr/>
+        </p:nvSpPr>
+        <p:spPr>
+          <a:xfrm>
+            <a:off x="2805379" y="3968496"/>
             <a:ext cx="2765146" cy="365760"/>
           </a:xfrm>
           <a:prstGeom prst="rect">
@@ -4243,6 +4277,45 @@
               <a:t>Berbasis 8 Indikator PAUD HI</a:t>
             </a:r>
             <a:endParaRPr lang="en-US" sz="1100" dirty="0"/>
+          </a:p>
+        </p:txBody>
+      </p:sp>
+      <p:sp>
+        <p:nvSpPr>
+          <p:cNvPr id="16" name="Text 13"/>
+          <p:cNvSpPr/>
+          <p:nvPr/>
+        </p:nvSpPr>
+        <p:spPr>
+          <a:xfrm>
+            <a:off x="566928" y="5943600"/>
+            <a:ext cx="5486400" cy="292608"/>
+          </a:xfrm>
+          <a:prstGeom prst="rect">
+            <a:avLst/>
+          </a:prstGeom>
+          <a:noFill/>
+          <a:ln/>
+        </p:spPr>
+        <p:txBody>
+          <a:bodyPr wrap="square" lIns="0" tIns="0" rIns="0" bIns="0" rtlCol="0" anchor="ctr"/>
+          <a:lstStyle/>
+          <a:p>
+            <a:pPr indent="0" marL="0">
+              <a:buNone/>
+            </a:pPr>
+            <a:r>
+              <a:rPr lang="en-US" sz="1200" dirty="0">
+                <a:solidFill>
+                  <a:srgbClr val="B9DBF6"/>
+                </a:solidFill>
+                <a:latin typeface="Calibri" pitchFamily="34" charset="0"/>
+                <a:ea typeface="Calibri" pitchFamily="34" charset="-122"/>
+                <a:cs typeface="Calibri" pitchFamily="34" charset="-120"/>
+              </a:rPr>
+              <a:t>Direktorat Pendidikan Anak Usia Dini</a:t>
+            </a:r>
+            <a:endParaRPr lang="en-US" sz="1200" dirty="0"/>
           </a:p>
         </p:txBody>
       </p:sp>
@@ -4409,7 +4482,7 @@
         <p:spPr>
           <a:xfrm>
             <a:off x="566928" y="1517904"/>
-            <a:ext cx="6675120" cy="2139696"/>
+            <a:ext cx="6766560" cy="2139696"/>
           </a:xfrm>
           <a:prstGeom prst="roundRect">
             <a:avLst>
@@ -4467,7 +4540,7 @@
         <p:spPr>
           <a:xfrm>
             <a:off x="1463040" y="1737360"/>
-            <a:ext cx="5486400" cy="1280160"/>
+            <a:ext cx="5577840" cy="1280160"/>
           </a:xfrm>
           <a:prstGeom prst="rect">
             <a:avLst/>
@@ -4545,7 +4618,7 @@
         <p:spPr>
           <a:xfrm>
             <a:off x="566928" y="3840480"/>
-            <a:ext cx="6675120" cy="786384"/>
+            <a:ext cx="6766560" cy="786384"/>
           </a:xfrm>
           <a:prstGeom prst="roundRect">
             <a:avLst>
@@ -4669,7 +4742,7 @@
         <p:spPr>
           <a:xfrm>
             <a:off x="2852928" y="3950208"/>
-            <a:ext cx="4261104" cy="566928"/>
+            <a:ext cx="4352544" cy="566928"/>
           </a:xfrm>
           <a:prstGeom prst="rect">
             <a:avLst/>
@@ -4708,7 +4781,7 @@
         <p:spPr>
           <a:xfrm>
             <a:off x="566928" y="4736592"/>
-            <a:ext cx="6675120" cy="786384"/>
+            <a:ext cx="6766560" cy="786384"/>
           </a:xfrm>
           <a:prstGeom prst="roundRect">
             <a:avLst>
@@ -4832,7 +4905,7 @@
         <p:spPr>
           <a:xfrm>
             <a:off x="2852928" y="4846320"/>
-            <a:ext cx="4261104" cy="566928"/>
+            <a:ext cx="4352544" cy="566928"/>
           </a:xfrm>
           <a:prstGeom prst="rect">
             <a:avLst/>
@@ -4871,7 +4944,7 @@
         <p:spPr>
           <a:xfrm>
             <a:off x="566928" y="5632704"/>
-            <a:ext cx="6675120" cy="786384"/>
+            <a:ext cx="6766560" cy="786384"/>
           </a:xfrm>
           <a:prstGeom prst="roundRect">
             <a:avLst>
@@ -4995,7 +5068,7 @@
         <p:spPr>
           <a:xfrm>
             <a:off x="2852928" y="5742432"/>
-            <a:ext cx="4261104" cy="566928"/>
+            <a:ext cx="4352544" cy="566928"/>
           </a:xfrm>
           <a:prstGeom prst="rect">
             <a:avLst/>
@@ -5041,8 +5114,8 @@
         </p:blipFill>
         <p:spPr>
           <a:xfrm>
-            <a:off x="7308799" y="1737360"/>
-            <a:ext cx="4315968" cy="3082834"/>
+            <a:off x="7843487" y="1554480"/>
+            <a:ext cx="3881186" cy="3931920"/>
           </a:xfrm>
           <a:prstGeom prst="rect">
             <a:avLst/>
@@ -5057,8 +5130,8 @@
         </p:nvSpPr>
         <p:spPr>
           <a:xfrm>
-            <a:off x="7308799" y="4892040"/>
-            <a:ext cx="4315968" cy="731520"/>
+            <a:off x="7680960" y="5541264"/>
+            <a:ext cx="3931920" cy="640080"/>
           </a:xfrm>
           <a:prstGeom prst="rect">
             <a:avLst/>
@@ -5070,11 +5143,11 @@
           <a:bodyPr wrap="square" lIns="0" tIns="0" rIns="0" bIns="0" rtlCol="0" anchor="t"/>
           <a:lstStyle/>
           <a:p>
-            <a:pPr indent="0" marL="0">
-              <a:buNone/>
-            </a:pPr>
-            <a:r>
-              <a:rPr lang="en-US" sz="1250" i="1" dirty="0">
+            <a:pPr algn="ctr" indent="0" marL="0">
+              <a:buNone/>
+            </a:pPr>
+            <a:r>
+              <a:rPr lang="en-US" sz="1150" i="1" dirty="0">
                 <a:solidFill>
                   <a:srgbClr val="176B44"/>
                 </a:solidFill>
@@ -5084,7 +5157,7 @@
               </a:rPr>
               <a:t>PAUD HI bukan program tambahan, melainkan cara satuan PAUD memandang dan melayani anak secara utuh.</a:t>
             </a:r>
-            <a:endParaRPr lang="en-US" sz="1250" dirty="0"/>
+            <a:endParaRPr lang="en-US" sz="1150" dirty="0"/>
           </a:p>
         </p:txBody>
       </p:sp>
@@ -6109,7 +6182,7 @@
         <p:spPr>
           <a:xfrm>
             <a:off x="566928" y="4261104"/>
-            <a:ext cx="6766560" cy="1463040"/>
+            <a:ext cx="8229600" cy="1463040"/>
           </a:xfrm>
           <a:prstGeom prst="roundRect">
             <a:avLst>
@@ -6143,7 +6216,7 @@
         <p:spPr>
           <a:xfrm>
             <a:off x="896112" y="4443984"/>
-            <a:ext cx="6035040" cy="292608"/>
+            <a:ext cx="7498080" cy="292608"/>
           </a:xfrm>
           <a:prstGeom prst="rect">
             <a:avLst/>
@@ -6182,7 +6255,7 @@
         <p:spPr>
           <a:xfrm>
             <a:off x="896112" y="4754880"/>
-            <a:ext cx="6089904" cy="841248"/>
+            <a:ext cx="7589520" cy="877824"/>
           </a:xfrm>
           <a:prstGeom prst="rect">
             <a:avLst/>
@@ -6206,7 +6279,7 @@
                 <a:ea typeface="Calibri" pitchFamily="34" charset="-122"/>
                 <a:cs typeface="Calibri" pitchFamily="34" charset="-120"/>
               </a:rPr>
-              <a:t>Kelima layanan ini melekat pada setiap anak usia dini — termasuk anak dengan disabilitas, anak dari keluarga rentan, dan anak yang belum memiliki dokumen kependudukan. Satuan PAUD memastikan tidak ada anak yang terlewat.</a:t>
+              <a:t>Kelima layanan ini melekat pada setiap anak usia dini — termasuk anak dengan disabilitas, anak dari keluarga rentan, dan anak yang belum memiliki dokumen kependudukan. Satuan PAUD menjadi rumah kedua tempat layanan esensial lainnya ikut didorong pemenuhannya melalui koordinasi lintas sektor.</a:t>
             </a:r>
             <a:endParaRPr lang="en-US" sz="1200" dirty="0"/>
           </a:p>
@@ -6228,8 +6301,8 @@
         </p:blipFill>
         <p:spPr>
           <a:xfrm>
-            <a:off x="7516368" y="4224528"/>
-            <a:ext cx="1590185" cy="1517904"/>
+            <a:off x="10271650" y="4114800"/>
+            <a:ext cx="1215957" cy="1828800"/>
           </a:xfrm>
           <a:prstGeom prst="rect">
             <a:avLst/>
@@ -6239,45 +6312,6 @@
       <p:sp>
         <p:nvSpPr>
           <p:cNvPr id="35" name="Text 27"/>
-          <p:cNvSpPr/>
-          <p:nvPr/>
-        </p:nvSpPr>
-        <p:spPr>
-          <a:xfrm>
-            <a:off x="9189720" y="4425696"/>
-            <a:ext cx="2432304" cy="1280160"/>
-          </a:xfrm>
-          <a:prstGeom prst="rect">
-            <a:avLst/>
-          </a:prstGeom>
-          <a:noFill/>
-          <a:ln/>
-        </p:spPr>
-        <p:txBody>
-          <a:bodyPr wrap="square" lIns="0" tIns="0" rIns="0" bIns="0" rtlCol="0" anchor="t"/>
-          <a:lstStyle/>
-          <a:p>
-            <a:pPr indent="0" marL="0">
-              <a:buNone/>
-            </a:pPr>
-            <a:r>
-              <a:rPr lang="en-US" sz="1100" dirty="0">
-                <a:solidFill>
-                  <a:srgbClr val="3E5C77"/>
-                </a:solidFill>
-                <a:latin typeface="Calibri" pitchFamily="34" charset="0"/>
-                <a:ea typeface="Calibri" pitchFamily="34" charset="-122"/>
-                <a:cs typeface="Calibri" pitchFamily="34" charset="-120"/>
-              </a:rPr>
-              <a:t>Sektor pendidikan menjadi rumah kedua bagi anak — tempat layanan esensial lainnya ikut didorong pemenuhannya melalui koordinasi lintas sektor.</a:t>
-            </a:r>
-            <a:endParaRPr lang="en-US" sz="1100" dirty="0"/>
-          </a:p>
-        </p:txBody>
-      </p:sp>
-      <p:sp>
-        <p:nvSpPr>
-          <p:cNvPr id="36" name="Text 28"/>
           <p:cNvSpPr/>
           <p:nvPr/>
         </p:nvSpPr>
@@ -6316,7 +6350,7 @@
       </p:sp>
       <p:sp>
         <p:nvSpPr>
-          <p:cNvPr id="37" name="Text 29"/>
+          <p:cNvPr id="36" name="Text 28"/>
           <p:cNvSpPr/>
           <p:nvPr/>
         </p:nvSpPr>
@@ -7159,44 +7193,20 @@
           </a:p>
         </p:txBody>
       </p:sp>
-      <p:pic>
-        <p:nvPicPr>
-          <p:cNvPr id="26" name="Image 4" descr="preencoded.png">    </p:cNvPr>
-          <p:cNvPicPr>
-            <a:picLocks noChangeAspect="1"/>
-          </p:cNvPicPr>
-          <p:nvPr/>
-        </p:nvPicPr>
-        <p:blipFill>
-          <a:blip r:embed="rId5"/>
-          <a:stretch>
-            <a:fillRect/>
-          </a:stretch>
-        </p:blipFill>
-        <p:spPr>
-          <a:xfrm>
-            <a:off x="7775974" y="1554480"/>
-            <a:ext cx="3391593" cy="3108960"/>
-          </a:xfrm>
-          <a:prstGeom prst="rect">
-            <a:avLst/>
-          </a:prstGeom>
-        </p:spPr>
-      </p:pic>
-      <p:sp>
-        <p:nvSpPr>
-          <p:cNvPr id="27" name="Shape 20"/>
-          <p:cNvSpPr/>
-          <p:nvPr/>
-        </p:nvSpPr>
-        <p:spPr>
-          <a:xfrm>
-            <a:off x="566928" y="4626864"/>
-            <a:ext cx="11057839" cy="1060704"/>
+      <p:sp>
+        <p:nvSpPr>
+          <p:cNvPr id="26" name="Shape 20"/>
+          <p:cNvSpPr/>
+          <p:nvPr/>
+        </p:nvSpPr>
+        <p:spPr>
+          <a:xfrm>
+            <a:off x="7680960" y="1572768"/>
+            <a:ext cx="3943807" cy="2816352"/>
           </a:xfrm>
           <a:prstGeom prst="roundRect">
             <a:avLst>
-              <a:gd name="adj" fmla="val 12069"/>
+              <a:gd name="adj" fmla="val 4545"/>
             </a:avLst>
           </a:prstGeom>
           <a:solidFill>
@@ -7219,7 +7229,167 @@
       </p:sp>
       <p:sp>
         <p:nvSpPr>
-          <p:cNvPr id="28" name="Text 21"/>
+          <p:cNvPr id="27" name="Text 21"/>
+          <p:cNvSpPr/>
+          <p:nvPr/>
+        </p:nvSpPr>
+        <p:spPr>
+          <a:xfrm>
+            <a:off x="7882128" y="1700784"/>
+            <a:ext cx="3566160" cy="457200"/>
+          </a:xfrm>
+          <a:prstGeom prst="rect">
+            <a:avLst/>
+          </a:prstGeom>
+          <a:noFill/>
+          <a:ln/>
+        </p:spPr>
+        <p:txBody>
+          <a:bodyPr wrap="square" lIns="0" tIns="0" rIns="0" bIns="0" rtlCol="0" anchor="t"/>
+          <a:lstStyle/>
+          <a:p>
+            <a:pPr algn="ctr" indent="0" marL="0">
+              <a:buNone/>
+            </a:pPr>
+            <a:r>
+              <a:rPr lang="en-US" sz="1250" b="1" dirty="0">
+                <a:solidFill>
+                  <a:srgbClr val="7A66B8"/>
+                </a:solidFill>
+                <a:latin typeface="Calibri" pitchFamily="34" charset="0"/>
+                <a:ea typeface="Calibri" pitchFamily="34" charset="-122"/>
+                <a:cs typeface="Calibri" pitchFamily="34" charset="-120"/>
+              </a:rPr>
+              <a:t>Dua elemen PAUD Berkualitas yang paling terkait</a:t>
+            </a:r>
+            <a:endParaRPr lang="en-US" sz="1250" dirty="0"/>
+          </a:p>
+        </p:txBody>
+      </p:sp>
+      <p:pic>
+        <p:nvPicPr>
+          <p:cNvPr id="28" name="Image 4" descr="preencoded.png">    </p:cNvPr>
+          <p:cNvPicPr>
+            <a:picLocks noChangeAspect="1"/>
+          </p:cNvPicPr>
+          <p:nvPr/>
+        </p:nvPicPr>
+        <p:blipFill>
+          <a:blip r:embed="rId5"/>
+          <a:stretch>
+            <a:fillRect/>
+          </a:stretch>
+        </p:blipFill>
+        <p:spPr>
+          <a:xfrm>
+            <a:off x="8202168" y="2231136"/>
+            <a:ext cx="1060704" cy="1060704"/>
+          </a:xfrm>
+          <a:prstGeom prst="rect">
+            <a:avLst/>
+          </a:prstGeom>
+        </p:spPr>
+      </p:pic>
+      <p:pic>
+        <p:nvPicPr>
+          <p:cNvPr id="29" name="Image 5" descr="preencoded.png">    </p:cNvPr>
+          <p:cNvPicPr>
+            <a:picLocks noChangeAspect="1"/>
+          </p:cNvPicPr>
+          <p:nvPr/>
+        </p:nvPicPr>
+        <p:blipFill>
+          <a:blip r:embed="rId6"/>
+          <a:stretch>
+            <a:fillRect/>
+          </a:stretch>
+        </p:blipFill>
+        <p:spPr>
+          <a:xfrm>
+            <a:off x="10030338" y="2231136"/>
+            <a:ext cx="1061964" cy="1060704"/>
+          </a:xfrm>
+          <a:prstGeom prst="rect">
+            <a:avLst/>
+          </a:prstGeom>
+        </p:spPr>
+      </p:pic>
+      <p:sp>
+        <p:nvSpPr>
+          <p:cNvPr id="30" name="Text 22"/>
+          <p:cNvSpPr/>
+          <p:nvPr/>
+        </p:nvSpPr>
+        <p:spPr>
+          <a:xfrm>
+            <a:off x="7918704" y="3419856"/>
+            <a:ext cx="3493008" cy="877824"/>
+          </a:xfrm>
+          <a:prstGeom prst="rect">
+            <a:avLst/>
+          </a:prstGeom>
+          <a:noFill/>
+          <a:ln/>
+        </p:spPr>
+        <p:txBody>
+          <a:bodyPr wrap="square" lIns="0" tIns="0" rIns="0" bIns="0" rtlCol="0" anchor="t"/>
+          <a:lstStyle/>
+          <a:p>
+            <a:pPr algn="ctr" indent="0" marL="0">
+              <a:buNone/>
+            </a:pPr>
+            <a:r>
+              <a:rPr lang="en-US" sz="1050" dirty="0">
+                <a:solidFill>
+                  <a:srgbClr val="3E5C77"/>
+                </a:solidFill>
+                <a:latin typeface="Calibri" pitchFamily="34" charset="0"/>
+                <a:ea typeface="Calibri" pitchFamily="34" charset="-122"/>
+                <a:cs typeface="Calibri" pitchFamily="34" charset="-120"/>
+              </a:rPr>
+              <a:t>Kemitraan dengan orang tua dan dukungan pemenuhan kebutuhan esensial anak usia dini adalah dua elemen yang paling langsung diwujudkan lewat kemitraan.</a:t>
+            </a:r>
+            <a:endParaRPr lang="en-US" sz="1050" dirty="0"/>
+          </a:p>
+        </p:txBody>
+      </p:sp>
+      <p:sp>
+        <p:nvSpPr>
+          <p:cNvPr id="31" name="Shape 23"/>
+          <p:cNvSpPr/>
+          <p:nvPr/>
+        </p:nvSpPr>
+        <p:spPr>
+          <a:xfrm>
+            <a:off x="566928" y="4626864"/>
+            <a:ext cx="11057839" cy="1060704"/>
+          </a:xfrm>
+          <a:prstGeom prst="roundRect">
+            <a:avLst>
+              <a:gd name="adj" fmla="val 12069"/>
+            </a:avLst>
+          </a:prstGeom>
+          <a:solidFill>
+            <a:srgbClr val="F0EBFA"/>
+          </a:solidFill>
+          <a:ln w="12700">
+            <a:solidFill>
+              <a:srgbClr val="DED4F2"/>
+            </a:solidFill>
+            <a:prstDash val="solid"/>
+          </a:ln>
+          <a:effectLst>
+            <a:outerShdw sx="100000" sy="100000" kx="0" ky="0" algn="bl" rotWithShape="0" blurRad="177800" dist="38100" dir="5400000">
+              <a:srgbClr val="0F3352">
+                <a:alpha val="10000"/>
+              </a:srgbClr>
+            </a:outerShdw>
+          </a:effectLst>
+        </p:spPr>
+      </p:sp>
+      <p:sp>
+        <p:nvSpPr>
+          <p:cNvPr id="32" name="Text 24"/>
           <p:cNvSpPr/>
           <p:nvPr/>
         </p:nvSpPr>
@@ -7258,7 +7428,7 @@
       </p:sp>
       <p:sp>
         <p:nvSpPr>
-          <p:cNvPr id="29" name="Text 22"/>
+          <p:cNvPr id="33" name="Text 25"/>
           <p:cNvSpPr/>
           <p:nvPr/>
         </p:nvSpPr>
@@ -7297,7 +7467,7 @@
       </p:sp>
       <p:sp>
         <p:nvSpPr>
-          <p:cNvPr id="30" name="Text 23"/>
+          <p:cNvPr id="34" name="Text 26"/>
           <p:cNvSpPr/>
           <p:nvPr/>
         </p:nvSpPr>
@@ -7496,7 +7666,7 @@
         </p:nvSpPr>
         <p:spPr>
           <a:xfrm>
-            <a:off x="1599560" y="2212848"/>
+            <a:off x="1599560" y="2066544"/>
             <a:ext cx="8992575" cy="0"/>
           </a:xfrm>
           <a:prstGeom prst="line">
@@ -7519,7 +7689,7 @@
         </p:nvSpPr>
         <p:spPr>
           <a:xfrm>
-            <a:off x="1215512" y="1828800"/>
+            <a:off x="1215512" y="1682496"/>
             <a:ext cx="768096" cy="768096"/>
           </a:xfrm>
           <a:prstGeom prst="ellipse">
@@ -7552,7 +7722,7 @@
         </p:blipFill>
         <p:spPr>
           <a:xfrm>
-            <a:off x="1398392" y="2011680"/>
+            <a:off x="1398392" y="1865376"/>
             <a:ext cx="402336" cy="402336"/>
           </a:xfrm>
           <a:prstGeom prst="rect">
@@ -7568,8 +7738,8 @@
         </p:nvSpPr>
         <p:spPr>
           <a:xfrm>
-            <a:off x="566928" y="2798064"/>
-            <a:ext cx="2065264" cy="2286000"/>
+            <a:off x="566928" y="2651760"/>
+            <a:ext cx="2065264" cy="2157984"/>
           </a:xfrm>
           <a:prstGeom prst="roundRect">
             <a:avLst>
@@ -7602,7 +7772,7 @@
         </p:nvSpPr>
         <p:spPr>
           <a:xfrm>
-            <a:off x="749808" y="2944368"/>
+            <a:off x="749808" y="2779776"/>
             <a:ext cx="1699504" cy="329184"/>
           </a:xfrm>
           <a:prstGeom prst="rect">
@@ -7641,8 +7811,8 @@
         </p:nvSpPr>
         <p:spPr>
           <a:xfrm>
-            <a:off x="731520" y="3273552"/>
-            <a:ext cx="1736080" cy="548640"/>
+            <a:off x="731520" y="3108960"/>
+            <a:ext cx="1736080" cy="512064"/>
           </a:xfrm>
           <a:prstGeom prst="rect">
             <a:avLst/>
@@ -7680,8 +7850,8 @@
         </p:nvSpPr>
         <p:spPr>
           <a:xfrm>
-            <a:off x="749808" y="3840480"/>
-            <a:ext cx="1699504" cy="1097280"/>
+            <a:off x="749808" y="3639312"/>
+            <a:ext cx="1699504" cy="1060704"/>
           </a:xfrm>
           <a:prstGeom prst="rect">
             <a:avLst/>
@@ -7719,7 +7889,7 @@
         </p:nvSpPr>
         <p:spPr>
           <a:xfrm>
-            <a:off x="3463656" y="1828800"/>
+            <a:off x="3463656" y="1682496"/>
             <a:ext cx="768096" cy="768096"/>
           </a:xfrm>
           <a:prstGeom prst="ellipse">
@@ -7752,7 +7922,7 @@
         </p:blipFill>
         <p:spPr>
           <a:xfrm>
-            <a:off x="3646536" y="2011680"/>
+            <a:off x="3646536" y="1865376"/>
             <a:ext cx="402336" cy="402336"/>
           </a:xfrm>
           <a:prstGeom prst="rect">
@@ -7768,8 +7938,8 @@
         </p:nvSpPr>
         <p:spPr>
           <a:xfrm>
-            <a:off x="2815072" y="2798064"/>
-            <a:ext cx="2065264" cy="2286000"/>
+            <a:off x="2815072" y="2651760"/>
+            <a:ext cx="2065264" cy="2157984"/>
           </a:xfrm>
           <a:prstGeom prst="roundRect">
             <a:avLst>
@@ -7802,7 +7972,7 @@
         </p:nvSpPr>
         <p:spPr>
           <a:xfrm>
-            <a:off x="2997952" y="2944368"/>
+            <a:off x="2997952" y="2779776"/>
             <a:ext cx="1699504" cy="329184"/>
           </a:xfrm>
           <a:prstGeom prst="rect">
@@ -7841,8 +8011,8 @@
         </p:nvSpPr>
         <p:spPr>
           <a:xfrm>
-            <a:off x="2979664" y="3273552"/>
-            <a:ext cx="1736080" cy="548640"/>
+            <a:off x="2979664" y="3108960"/>
+            <a:ext cx="1736080" cy="512064"/>
           </a:xfrm>
           <a:prstGeom prst="rect">
             <a:avLst/>
@@ -7880,8 +8050,8 @@
         </p:nvSpPr>
         <p:spPr>
           <a:xfrm>
-            <a:off x="2997952" y="3840480"/>
-            <a:ext cx="1699504" cy="1097280"/>
+            <a:off x="2997952" y="3639312"/>
+            <a:ext cx="1699504" cy="1060704"/>
           </a:xfrm>
           <a:prstGeom prst="rect">
             <a:avLst/>
@@ -7905,7 +8075,7 @@
                 <a:ea typeface="Calibri" pitchFamily="34" charset="-122"/>
                 <a:cs typeface="Calibri" pitchFamily="34" charset="-120"/>
               </a:rPr>
-              <a:t>Payung utama: kebutuhan esensial anak dipenuhi secara simultan dan terintegrasi.</a:t>
+              <a:t>Payung utama: kebutuhan esensial anak dipenuhi simultan dan terintegrasi.</a:t>
             </a:r>
             <a:endParaRPr lang="en-US" sz="1050" dirty="0"/>
           </a:p>
@@ -7919,7 +8089,7 @@
         </p:nvSpPr>
         <p:spPr>
           <a:xfrm>
-            <a:off x="5711800" y="1828800"/>
+            <a:off x="5711800" y="1682496"/>
             <a:ext cx="768096" cy="768096"/>
           </a:xfrm>
           <a:prstGeom prst="ellipse">
@@ -7952,7 +8122,7 @@
         </p:blipFill>
         <p:spPr>
           <a:xfrm>
-            <a:off x="5894680" y="2011680"/>
+            <a:off x="5894680" y="1865376"/>
             <a:ext cx="402336" cy="402336"/>
           </a:xfrm>
           <a:prstGeom prst="rect">
@@ -7968,8 +8138,8 @@
         </p:nvSpPr>
         <p:spPr>
           <a:xfrm>
-            <a:off x="5063216" y="2798064"/>
-            <a:ext cx="2065264" cy="2286000"/>
+            <a:off x="5063216" y="2651760"/>
+            <a:ext cx="2065264" cy="2157984"/>
           </a:xfrm>
           <a:prstGeom prst="roundRect">
             <a:avLst>
@@ -8002,7 +8172,7 @@
         </p:nvSpPr>
         <p:spPr>
           <a:xfrm>
-            <a:off x="5246096" y="2944368"/>
+            <a:off x="5246096" y="2779776"/>
             <a:ext cx="1699504" cy="329184"/>
           </a:xfrm>
           <a:prstGeom prst="rect">
@@ -8041,8 +8211,8 @@
         </p:nvSpPr>
         <p:spPr>
           <a:xfrm>
-            <a:off x="5227808" y="3273552"/>
-            <a:ext cx="1736080" cy="548640"/>
+            <a:off x="5227808" y="3108960"/>
+            <a:ext cx="1736080" cy="512064"/>
           </a:xfrm>
           <a:prstGeom prst="rect">
             <a:avLst/>
@@ -8080,8 +8250,8 @@
         </p:nvSpPr>
         <p:spPr>
           <a:xfrm>
-            <a:off x="5246096" y="3840480"/>
-            <a:ext cx="1699504" cy="1097280"/>
+            <a:off x="5246096" y="3639312"/>
+            <a:ext cx="1699504" cy="1060704"/>
           </a:xfrm>
           <a:prstGeom prst="rect">
             <a:avLst/>
@@ -8119,7 +8289,7 @@
         </p:nvSpPr>
         <p:spPr>
           <a:xfrm>
-            <a:off x="7959943" y="1828800"/>
+            <a:off x="7959943" y="1682496"/>
             <a:ext cx="768096" cy="768096"/>
           </a:xfrm>
           <a:prstGeom prst="ellipse">
@@ -8152,7 +8322,7 @@
         </p:blipFill>
         <p:spPr>
           <a:xfrm>
-            <a:off x="8142823" y="2011680"/>
+            <a:off x="8142823" y="1865376"/>
             <a:ext cx="402336" cy="402336"/>
           </a:xfrm>
           <a:prstGeom prst="rect">
@@ -8168,8 +8338,8 @@
         </p:nvSpPr>
         <p:spPr>
           <a:xfrm>
-            <a:off x="7311360" y="2798064"/>
-            <a:ext cx="2065264" cy="2286000"/>
+            <a:off x="7311360" y="2651760"/>
+            <a:ext cx="2065264" cy="2157984"/>
           </a:xfrm>
           <a:prstGeom prst="roundRect">
             <a:avLst>
@@ -8202,7 +8372,7 @@
         </p:nvSpPr>
         <p:spPr>
           <a:xfrm>
-            <a:off x="7494240" y="2944368"/>
+            <a:off x="7494240" y="2779776"/>
             <a:ext cx="1699504" cy="329184"/>
           </a:xfrm>
           <a:prstGeom prst="rect">
@@ -8241,8 +8411,8 @@
         </p:nvSpPr>
         <p:spPr>
           <a:xfrm>
-            <a:off x="7475952" y="3273552"/>
-            <a:ext cx="1736080" cy="548640"/>
+            <a:off x="7475952" y="3108960"/>
+            <a:ext cx="1736080" cy="512064"/>
           </a:xfrm>
           <a:prstGeom prst="rect">
             <a:avLst/>
@@ -8280,8 +8450,8 @@
         </p:nvSpPr>
         <p:spPr>
           <a:xfrm>
-            <a:off x="7494240" y="3840480"/>
-            <a:ext cx="1699504" cy="1097280"/>
+            <a:off x="7494240" y="3639312"/>
+            <a:ext cx="1699504" cy="1060704"/>
           </a:xfrm>
           <a:prstGeom prst="rect">
             <a:avLst/>
@@ -8319,7 +8489,7 @@
         </p:nvSpPr>
         <p:spPr>
           <a:xfrm>
-            <a:off x="10208087" y="1828800"/>
+            <a:off x="10208087" y="1682496"/>
             <a:ext cx="768096" cy="768096"/>
           </a:xfrm>
           <a:prstGeom prst="ellipse">
@@ -8352,7 +8522,7 @@
         </p:blipFill>
         <p:spPr>
           <a:xfrm>
-            <a:off x="10390967" y="2011680"/>
+            <a:off x="10390967" y="1865376"/>
             <a:ext cx="402336" cy="402336"/>
           </a:xfrm>
           <a:prstGeom prst="rect">
@@ -8368,8 +8538,8 @@
         </p:nvSpPr>
         <p:spPr>
           <a:xfrm>
-            <a:off x="9559503" y="2798064"/>
-            <a:ext cx="2065264" cy="2286000"/>
+            <a:off x="9559503" y="2651760"/>
+            <a:ext cx="2065264" cy="2157984"/>
           </a:xfrm>
           <a:prstGeom prst="roundRect">
             <a:avLst>
@@ -8402,7 +8572,7 @@
         </p:nvSpPr>
         <p:spPr>
           <a:xfrm>
-            <a:off x="9742383" y="2944368"/>
+            <a:off x="9742383" y="2779776"/>
             <a:ext cx="1699504" cy="329184"/>
           </a:xfrm>
           <a:prstGeom prst="rect">
@@ -8441,8 +8611,8 @@
         </p:nvSpPr>
         <p:spPr>
           <a:xfrm>
-            <a:off x="9724095" y="3273552"/>
-            <a:ext cx="1736080" cy="548640"/>
+            <a:off x="9724095" y="3108960"/>
+            <a:ext cx="1736080" cy="512064"/>
           </a:xfrm>
           <a:prstGeom prst="rect">
             <a:avLst/>
@@ -8480,8 +8650,8 @@
         </p:nvSpPr>
         <p:spPr>
           <a:xfrm>
-            <a:off x="9742383" y="3840480"/>
-            <a:ext cx="1699504" cy="1097280"/>
+            <a:off x="9742383" y="3639312"/>
+            <a:ext cx="1699504" cy="1060704"/>
           </a:xfrm>
           <a:prstGeom prst="rect">
             <a:avLst/>
@@ -8513,14 +8683,96 @@
       </p:sp>
       <p:sp>
         <p:nvSpPr>
-          <p:cNvPr id="37" name="Text 30"/>
-          <p:cNvSpPr/>
-          <p:nvPr/>
-        </p:nvSpPr>
-        <p:spPr>
-          <a:xfrm>
-            <a:off x="566928" y="5266944"/>
-            <a:ext cx="11057839" cy="365760"/>
+          <p:cNvPr id="37" name="Shape 30"/>
+          <p:cNvSpPr/>
+          <p:nvPr/>
+        </p:nvSpPr>
+        <p:spPr>
+          <a:xfrm>
+            <a:off x="566928" y="4956048"/>
+            <a:ext cx="11057839" cy="1298448"/>
+          </a:xfrm>
+          <a:prstGeom prst="roundRect">
+            <a:avLst>
+              <a:gd name="adj" fmla="val 9859"/>
+            </a:avLst>
+          </a:prstGeom>
+          <a:solidFill>
+            <a:srgbClr val="DCEDFB"/>
+          </a:solidFill>
+          <a:ln w="12700">
+            <a:solidFill>
+              <a:srgbClr val="B9DBF6"/>
+            </a:solidFill>
+            <a:prstDash val="solid"/>
+          </a:ln>
+          <a:effectLst>
+            <a:outerShdw sx="100000" sy="100000" kx="0" ky="0" algn="bl" rotWithShape="0" blurRad="177800" dist="38100" dir="5400000">
+              <a:srgbClr val="0F3352">
+                <a:alpha val="10000"/>
+              </a:srgbClr>
+            </a:outerShdw>
+          </a:effectLst>
+        </p:spPr>
+      </p:sp>
+      <p:pic>
+        <p:nvPicPr>
+          <p:cNvPr id="38" name="Image 5" descr="preencoded.png">    </p:cNvPr>
+          <p:cNvPicPr>
+            <a:picLocks noChangeAspect="1"/>
+          </p:cNvPicPr>
+          <p:nvPr/>
+        </p:nvPicPr>
+        <p:blipFill>
+          <a:blip r:embed="rId6"/>
+          <a:stretch>
+            <a:fillRect/>
+          </a:stretch>
+        </p:blipFill>
+        <p:spPr>
+          <a:xfrm>
+            <a:off x="713232" y="5074920"/>
+            <a:ext cx="1578429" cy="1060704"/>
+          </a:xfrm>
+          <a:prstGeom prst="rect">
+            <a:avLst/>
+          </a:prstGeom>
+        </p:spPr>
+      </p:pic>
+      <p:pic>
+        <p:nvPicPr>
+          <p:cNvPr id="39" name="Image 6" descr="preencoded.png">    </p:cNvPr>
+          <p:cNvPicPr>
+            <a:picLocks noChangeAspect="1"/>
+          </p:cNvPicPr>
+          <p:nvPr/>
+        </p:nvPicPr>
+        <p:blipFill>
+          <a:blip r:embed="rId7"/>
+          <a:stretch>
+            <a:fillRect/>
+          </a:stretch>
+        </p:blipFill>
+        <p:spPr>
+          <a:xfrm>
+            <a:off x="10393092" y="5074920"/>
+            <a:ext cx="1085372" cy="1060704"/>
+          </a:xfrm>
+          <a:prstGeom prst="rect">
+            <a:avLst/>
+          </a:prstGeom>
+        </p:spPr>
+      </p:pic>
+      <p:sp>
+        <p:nvSpPr>
+          <p:cNvPr id="40" name="Text 31"/>
+          <p:cNvSpPr/>
+          <p:nvPr/>
+        </p:nvSpPr>
+        <p:spPr>
+          <a:xfrm>
+            <a:off x="2487168" y="5102352"/>
+            <a:ext cx="7863840" cy="1005840"/>
           </a:xfrm>
           <a:prstGeom prst="rect">
             <a:avLst/>
@@ -8532,11 +8784,11 @@
           <a:bodyPr wrap="square" lIns="0" tIns="0" rIns="0" bIns="0" rtlCol="0" anchor="ctr"/>
           <a:lstStyle/>
           <a:p>
-            <a:pPr algn="ctr" indent="0" marL="0">
-              <a:buNone/>
-            </a:pPr>
-            <a:r>
-              <a:rPr lang="en-US" sz="1300" b="1" dirty="0">
+            <a:pPr indent="0" marL="0">
+              <a:buNone/>
+            </a:pPr>
+            <a:r>
+              <a:rPr lang="en-US" sz="1200" dirty="0">
                 <a:solidFill>
                   <a:srgbClr val="173753"/>
                 </a:solidFill>
@@ -8544,15 +8796,15 @@
                 <a:ea typeface="Calibri" pitchFamily="34" charset="-122"/>
                 <a:cs typeface="Calibri" pitchFamily="34" charset="-120"/>
               </a:rPr>
-              <a:t>Regulasi menegaskan satu hal: PAUD HI adalah kerja bersama lintas sektor, bukan tugas satu instansi.</a:t>
-            </a:r>
-            <a:endParaRPr lang="en-US" sz="1300" dirty="0"/>
-          </a:p>
-        </p:txBody>
-      </p:sp>
-      <p:sp>
-        <p:nvSpPr>
-          <p:cNvPr id="38" name="Text 31"/>
+              <a:t>Regulasi menegaskan satu hal: PAUD HI adalah kerja bersama lintas sektor, bukan tugas satu instansi. Gugus Tugas PAUD HI beranggotakan kementerian dan lembaga lintas bidang — pendidikan, kesehatan, sosial, agama, dalam negeri, desa, dan kependudukan.</a:t>
+            </a:r>
+            <a:endParaRPr lang="en-US" sz="1200" dirty="0"/>
+          </a:p>
+        </p:txBody>
+      </p:sp>
+      <p:sp>
+        <p:nvSpPr>
+          <p:cNvPr id="41" name="Text 32"/>
           <p:cNvSpPr/>
           <p:nvPr/>
         </p:nvSpPr>
@@ -8591,7 +8843,7 @@
       </p:sp>
       <p:sp>
         <p:nvSpPr>
-          <p:cNvPr id="39" name="Text 32"/>
+          <p:cNvPr id="42" name="Text 33"/>
           <p:cNvSpPr/>
           <p:nvPr/>
         </p:nvSpPr>
@@ -9987,20 +10239,44 @@
           </a:p>
         </p:txBody>
       </p:sp>
-      <p:sp>
-        <p:nvSpPr>
-          <p:cNvPr id="6" name="Shape 4"/>
-          <p:cNvSpPr/>
-          <p:nvPr/>
-        </p:nvSpPr>
-        <p:spPr>
-          <a:xfrm>
-            <a:off x="566928" y="1481328"/>
-            <a:ext cx="2596896" cy="1700784"/>
+      <p:pic>
+        <p:nvPicPr>
+          <p:cNvPr id="6" name="Image 0" descr="preencoded.png">    </p:cNvPr>
+          <p:cNvPicPr>
+            <a:picLocks noChangeAspect="1"/>
+          </p:cNvPicPr>
+          <p:nvPr/>
+        </p:nvPicPr>
+        <p:blipFill>
+          <a:blip r:embed="rId1"/>
+          <a:stretch>
+            <a:fillRect/>
+          </a:stretch>
+        </p:blipFill>
+        <p:spPr>
+          <a:xfrm>
+            <a:off x="636645" y="1536192"/>
+            <a:ext cx="4121669" cy="4114800"/>
+          </a:xfrm>
+          <a:prstGeom prst="rect">
+            <a:avLst/>
+          </a:prstGeom>
+        </p:spPr>
+      </p:pic>
+      <p:sp>
+        <p:nvSpPr>
+          <p:cNvPr id="7" name="Shape 4"/>
+          <p:cNvSpPr/>
+          <p:nvPr/>
+        </p:nvSpPr>
+        <p:spPr>
+          <a:xfrm>
+            <a:off x="4937760" y="1481328"/>
+            <a:ext cx="3346704" cy="950976"/>
           </a:xfrm>
           <a:prstGeom prst="roundRect">
             <a:avLst>
-              <a:gd name="adj" fmla="val 7527"/>
+              <a:gd name="adj" fmla="val 13462"/>
             </a:avLst>
           </a:prstGeom>
           <a:solidFill>
@@ -10023,18 +10299,18 @@
       </p:sp>
       <p:sp>
         <p:nvSpPr>
-          <p:cNvPr id="7" name="Shape 5"/>
-          <p:cNvSpPr/>
-          <p:nvPr/>
-        </p:nvSpPr>
-        <p:spPr>
-          <a:xfrm>
-            <a:off x="786384" y="1700784"/>
-            <a:ext cx="566928" cy="566928"/>
+          <p:cNvPr id="8" name="Shape 5"/>
+          <p:cNvSpPr/>
+          <p:nvPr/>
+        </p:nvSpPr>
+        <p:spPr>
+          <a:xfrm>
+            <a:off x="5120640" y="1709928"/>
+            <a:ext cx="493776" cy="493776"/>
           </a:xfrm>
           <a:prstGeom prst="ellipse">
             <a:avLst>
-              <a:gd name="adj" fmla="val 19355"/>
+              <a:gd name="adj" fmla="val 22222"/>
             </a:avLst>
           </a:prstGeom>
           <a:solidFill>
@@ -10050,22 +10326,22 @@
       </p:sp>
       <p:pic>
         <p:nvPicPr>
-          <p:cNvPr id="8" name="Image 0" descr="preencoded.png">    </p:cNvPr>
+          <p:cNvPr id="9" name="Image 1" descr="preencoded.png">    </p:cNvPr>
           <p:cNvPicPr>
             <a:picLocks noChangeAspect="1"/>
           </p:cNvPicPr>
           <p:nvPr/>
         </p:nvPicPr>
         <p:blipFill>
-          <a:blip r:embed="rId1"/>
+          <a:blip r:embed="rId2"/>
           <a:stretch>
             <a:fillRect/>
           </a:stretch>
         </p:blipFill>
         <p:spPr>
           <a:xfrm>
-            <a:off x="922447" y="1836847"/>
-            <a:ext cx="294803" cy="294803"/>
+            <a:off x="5239146" y="1828434"/>
+            <a:ext cx="256764" cy="256764"/>
           </a:xfrm>
           <a:prstGeom prst="rect">
             <a:avLst/>
@@ -10074,55 +10350,14 @@
       </p:pic>
       <p:sp>
         <p:nvSpPr>
-          <p:cNvPr id="9" name="Text 6"/>
-          <p:cNvSpPr/>
-          <p:nvPr/>
-        </p:nvSpPr>
-        <p:spPr>
-          <a:xfrm>
-            <a:off x="2377440" y="1664208"/>
-            <a:ext cx="566928" cy="365760"/>
-          </a:xfrm>
-          <a:prstGeom prst="rect">
-            <a:avLst/>
-          </a:prstGeom>
-          <a:noFill/>
-          <a:ln/>
-        </p:spPr>
-        <p:txBody>
-          <a:bodyPr wrap="square" lIns="0" tIns="0" rIns="0" bIns="0" rtlCol="0" anchor="ctr"/>
-          <a:lstStyle/>
-          <a:p>
-            <a:pPr algn="r" indent="0" marL="0">
-              <a:buNone/>
-            </a:pPr>
-            <a:r>
-              <a:rPr lang="en-US" sz="2000" b="1" dirty="0">
-                <a:solidFill>
-                  <a:srgbClr val="1E76C8">
-                    <a:alpha val="35000"/>
-                  </a:srgbClr>
-                </a:solidFill>
-                <a:latin typeface="Calibri" pitchFamily="34" charset="0"/>
-                <a:ea typeface="Calibri" pitchFamily="34" charset="-122"/>
-                <a:cs typeface="Calibri" pitchFamily="34" charset="-120"/>
-              </a:rPr>
-              <a:t>01</a:t>
-            </a:r>
-            <a:endParaRPr lang="en-US" sz="2000" dirty="0"/>
-          </a:p>
-        </p:txBody>
-      </p:sp>
-      <p:sp>
-        <p:nvSpPr>
-          <p:cNvPr id="10" name="Text 7"/>
-          <p:cNvSpPr/>
-          <p:nvPr/>
-        </p:nvSpPr>
-        <p:spPr>
-          <a:xfrm>
-            <a:off x="786384" y="2340864"/>
-            <a:ext cx="2157984" cy="438912"/>
+          <p:cNvPr id="10" name="Text 6"/>
+          <p:cNvSpPr/>
+          <p:nvPr/>
+        </p:nvSpPr>
+        <p:spPr>
+          <a:xfrm>
+            <a:off x="5724144" y="1572768"/>
+            <a:ext cx="2377440" cy="384048"/>
           </a:xfrm>
           <a:prstGeom prst="rect">
             <a:avLst/>
@@ -10146,7 +10381,7 @@
                 <a:ea typeface="Calibri" pitchFamily="34" charset="-122"/>
                 <a:cs typeface="Calibri" pitchFamily="34" charset="-120"/>
               </a:rPr>
-              <a:t>Kelas Orang Tua</a:t>
+              <a:t>1. Kelas Orang Tua</a:t>
             </a:r>
             <a:endParaRPr lang="en-US" sz="1250" dirty="0"/>
           </a:p>
@@ -10154,14 +10389,14 @@
       </p:sp>
       <p:sp>
         <p:nvSpPr>
-          <p:cNvPr id="11" name="Text 8"/>
-          <p:cNvSpPr/>
-          <p:nvPr/>
-        </p:nvSpPr>
-        <p:spPr>
-          <a:xfrm>
-            <a:off x="786384" y="2779776"/>
-            <a:ext cx="2157984" cy="365760"/>
+          <p:cNvPr id="11" name="Text 7"/>
+          <p:cNvSpPr/>
+          <p:nvPr/>
+        </p:nvSpPr>
+        <p:spPr>
+          <a:xfrm>
+            <a:off x="5724144" y="1956816"/>
+            <a:ext cx="2377440" cy="402336"/>
           </a:xfrm>
           <a:prstGeom prst="rect">
             <a:avLst/>
@@ -10193,18 +10428,18 @@
       </p:sp>
       <p:sp>
         <p:nvSpPr>
-          <p:cNvPr id="12" name="Shape 9"/>
-          <p:cNvSpPr/>
-          <p:nvPr/>
-        </p:nvSpPr>
-        <p:spPr>
-          <a:xfrm>
-            <a:off x="3383280" y="1481328"/>
-            <a:ext cx="2596896" cy="1700784"/>
+          <p:cNvPr id="12" name="Shape 8"/>
+          <p:cNvSpPr/>
+          <p:nvPr/>
+        </p:nvSpPr>
+        <p:spPr>
+          <a:xfrm>
+            <a:off x="8503920" y="1481328"/>
+            <a:ext cx="3346704" cy="950976"/>
           </a:xfrm>
           <a:prstGeom prst="roundRect">
             <a:avLst>
-              <a:gd name="adj" fmla="val 7527"/>
+              <a:gd name="adj" fmla="val 13462"/>
             </a:avLst>
           </a:prstGeom>
           <a:solidFill>
@@ -10227,18 +10462,18 @@
       </p:sp>
       <p:sp>
         <p:nvSpPr>
-          <p:cNvPr id="13" name="Shape 10"/>
-          <p:cNvSpPr/>
-          <p:nvPr/>
-        </p:nvSpPr>
-        <p:spPr>
-          <a:xfrm>
-            <a:off x="3602736" y="1700784"/>
-            <a:ext cx="566928" cy="566928"/>
+          <p:cNvPr id="13" name="Shape 9"/>
+          <p:cNvSpPr/>
+          <p:nvPr/>
+        </p:nvSpPr>
+        <p:spPr>
+          <a:xfrm>
+            <a:off x="8686800" y="1709928"/>
+            <a:ext cx="493776" cy="493776"/>
           </a:xfrm>
           <a:prstGeom prst="ellipse">
             <a:avLst>
-              <a:gd name="adj" fmla="val 19355"/>
+              <a:gd name="adj" fmla="val 22222"/>
             </a:avLst>
           </a:prstGeom>
           <a:solidFill>
@@ -10254,22 +10489,22 @@
       </p:sp>
       <p:pic>
         <p:nvPicPr>
-          <p:cNvPr id="14" name="Image 1" descr="preencoded.png">    </p:cNvPr>
+          <p:cNvPr id="14" name="Image 2" descr="preencoded.png">    </p:cNvPr>
           <p:cNvPicPr>
             <a:picLocks noChangeAspect="1"/>
           </p:cNvPicPr>
           <p:nvPr/>
         </p:nvPicPr>
         <p:blipFill>
-          <a:blip r:embed="rId2"/>
+          <a:blip r:embed="rId3"/>
           <a:stretch>
             <a:fillRect/>
           </a:stretch>
         </p:blipFill>
         <p:spPr>
           <a:xfrm>
-            <a:off x="3738799" y="1836847"/>
-            <a:ext cx="294803" cy="294803"/>
+            <a:off x="8805306" y="1828434"/>
+            <a:ext cx="256764" cy="256764"/>
           </a:xfrm>
           <a:prstGeom prst="rect">
             <a:avLst/>
@@ -10278,55 +10513,14 @@
       </p:pic>
       <p:sp>
         <p:nvSpPr>
-          <p:cNvPr id="15" name="Text 11"/>
-          <p:cNvSpPr/>
-          <p:nvPr/>
-        </p:nvSpPr>
-        <p:spPr>
-          <a:xfrm>
-            <a:off x="5193792" y="1664208"/>
-            <a:ext cx="566928" cy="365760"/>
-          </a:xfrm>
-          <a:prstGeom prst="rect">
-            <a:avLst/>
-          </a:prstGeom>
-          <a:noFill/>
-          <a:ln/>
-        </p:spPr>
-        <p:txBody>
-          <a:bodyPr wrap="square" lIns="0" tIns="0" rIns="0" bIns="0" rtlCol="0" anchor="ctr"/>
-          <a:lstStyle/>
-          <a:p>
-            <a:pPr algn="r" indent="0" marL="0">
-              <a:buNone/>
-            </a:pPr>
-            <a:r>
-              <a:rPr lang="en-US" sz="2000" b="1" dirty="0">
-                <a:solidFill>
-                  <a:srgbClr val="2FA36B">
-                    <a:alpha val="35000"/>
-                  </a:srgbClr>
-                </a:solidFill>
-                <a:latin typeface="Calibri" pitchFamily="34" charset="0"/>
-                <a:ea typeface="Calibri" pitchFamily="34" charset="-122"/>
-                <a:cs typeface="Calibri" pitchFamily="34" charset="-120"/>
-              </a:rPr>
-              <a:t>02</a:t>
-            </a:r>
-            <a:endParaRPr lang="en-US" sz="2000" dirty="0"/>
-          </a:p>
-        </p:txBody>
-      </p:sp>
-      <p:sp>
-        <p:nvSpPr>
-          <p:cNvPr id="16" name="Text 12"/>
-          <p:cNvSpPr/>
-          <p:nvPr/>
-        </p:nvSpPr>
-        <p:spPr>
-          <a:xfrm>
-            <a:off x="3602736" y="2340864"/>
-            <a:ext cx="2157984" cy="438912"/>
+          <p:cNvPr id="15" name="Text 10"/>
+          <p:cNvSpPr/>
+          <p:nvPr/>
+        </p:nvSpPr>
+        <p:spPr>
+          <a:xfrm>
+            <a:off x="9290304" y="1572768"/>
+            <a:ext cx="2377440" cy="384048"/>
           </a:xfrm>
           <a:prstGeom prst="rect">
             <a:avLst/>
@@ -10350,7 +10544,7 @@
                 <a:ea typeface="Calibri" pitchFamily="34" charset="-122"/>
                 <a:cs typeface="Calibri" pitchFamily="34" charset="-120"/>
               </a:rPr>
-              <a:t>Pemantauan Pertumbuhan</a:t>
+              <a:t>2. Pemantauan Pertumbuhan</a:t>
             </a:r>
             <a:endParaRPr lang="en-US" sz="1250" dirty="0"/>
           </a:p>
@@ -10358,14 +10552,14 @@
       </p:sp>
       <p:sp>
         <p:nvSpPr>
-          <p:cNvPr id="17" name="Text 13"/>
-          <p:cNvSpPr/>
-          <p:nvPr/>
-        </p:nvSpPr>
-        <p:spPr>
-          <a:xfrm>
-            <a:off x="3602736" y="2779776"/>
-            <a:ext cx="2157984" cy="365760"/>
+          <p:cNvPr id="16" name="Text 11"/>
+          <p:cNvSpPr/>
+          <p:nvPr/>
+        </p:nvSpPr>
+        <p:spPr>
+          <a:xfrm>
+            <a:off x="9290304" y="1956816"/>
+            <a:ext cx="2377440" cy="402336"/>
           </a:xfrm>
           <a:prstGeom prst="rect">
             <a:avLst/>
@@ -10397,18 +10591,18 @@
       </p:sp>
       <p:sp>
         <p:nvSpPr>
-          <p:cNvPr id="18" name="Shape 14"/>
-          <p:cNvSpPr/>
-          <p:nvPr/>
-        </p:nvSpPr>
-        <p:spPr>
-          <a:xfrm>
-            <a:off x="6199632" y="1481328"/>
-            <a:ext cx="2596896" cy="1700784"/>
+          <p:cNvPr id="17" name="Shape 12"/>
+          <p:cNvSpPr/>
+          <p:nvPr/>
+        </p:nvSpPr>
+        <p:spPr>
+          <a:xfrm>
+            <a:off x="4937760" y="2551176"/>
+            <a:ext cx="3346704" cy="950976"/>
           </a:xfrm>
           <a:prstGeom prst="roundRect">
             <a:avLst>
-              <a:gd name="adj" fmla="val 7527"/>
+              <a:gd name="adj" fmla="val 13462"/>
             </a:avLst>
           </a:prstGeom>
           <a:solidFill>
@@ -10431,18 +10625,18 @@
       </p:sp>
       <p:sp>
         <p:nvSpPr>
-          <p:cNvPr id="19" name="Shape 15"/>
-          <p:cNvSpPr/>
-          <p:nvPr/>
-        </p:nvSpPr>
-        <p:spPr>
-          <a:xfrm>
-            <a:off x="6419088" y="1700784"/>
-            <a:ext cx="566928" cy="566928"/>
+          <p:cNvPr id="18" name="Shape 13"/>
+          <p:cNvSpPr/>
+          <p:nvPr/>
+        </p:nvSpPr>
+        <p:spPr>
+          <a:xfrm>
+            <a:off x="5120640" y="2779776"/>
+            <a:ext cx="493776" cy="493776"/>
           </a:xfrm>
           <a:prstGeom prst="ellipse">
             <a:avLst>
-              <a:gd name="adj" fmla="val 19355"/>
+              <a:gd name="adj" fmla="val 22222"/>
             </a:avLst>
           </a:prstGeom>
           <a:solidFill>
@@ -10458,22 +10652,22 @@
       </p:sp>
       <p:pic>
         <p:nvPicPr>
-          <p:cNvPr id="20" name="Image 2" descr="preencoded.png">    </p:cNvPr>
+          <p:cNvPr id="19" name="Image 3" descr="preencoded.png">    </p:cNvPr>
           <p:cNvPicPr>
             <a:picLocks noChangeAspect="1"/>
           </p:cNvPicPr>
           <p:nvPr/>
         </p:nvPicPr>
         <p:blipFill>
-          <a:blip r:embed="rId3"/>
+          <a:blip r:embed="rId4"/>
           <a:stretch>
             <a:fillRect/>
           </a:stretch>
         </p:blipFill>
         <p:spPr>
           <a:xfrm>
-            <a:off x="6555151" y="1836847"/>
-            <a:ext cx="294803" cy="294803"/>
+            <a:off x="5239146" y="2898282"/>
+            <a:ext cx="256764" cy="256764"/>
           </a:xfrm>
           <a:prstGeom prst="rect">
             <a:avLst/>
@@ -10482,55 +10676,14 @@
       </p:pic>
       <p:sp>
         <p:nvSpPr>
-          <p:cNvPr id="21" name="Text 16"/>
-          <p:cNvSpPr/>
-          <p:nvPr/>
-        </p:nvSpPr>
-        <p:spPr>
-          <a:xfrm>
-            <a:off x="8010144" y="1664208"/>
-            <a:ext cx="566928" cy="365760"/>
-          </a:xfrm>
-          <a:prstGeom prst="rect">
-            <a:avLst/>
-          </a:prstGeom>
-          <a:noFill/>
-          <a:ln/>
-        </p:spPr>
-        <p:txBody>
-          <a:bodyPr wrap="square" lIns="0" tIns="0" rIns="0" bIns="0" rtlCol="0" anchor="ctr"/>
-          <a:lstStyle/>
-          <a:p>
-            <a:pPr algn="r" indent="0" marL="0">
-              <a:buNone/>
-            </a:pPr>
-            <a:r>
-              <a:rPr lang="en-US" sz="2000" b="1" dirty="0">
-                <a:solidFill>
-                  <a:srgbClr val="F5871F">
-                    <a:alpha val="35000"/>
-                  </a:srgbClr>
-                </a:solidFill>
-                <a:latin typeface="Calibri" pitchFamily="34" charset="0"/>
-                <a:ea typeface="Calibri" pitchFamily="34" charset="-122"/>
-                <a:cs typeface="Calibri" pitchFamily="34" charset="-120"/>
-              </a:rPr>
-              <a:t>03</a:t>
-            </a:r>
-            <a:endParaRPr lang="en-US" sz="2000" dirty="0"/>
-          </a:p>
-        </p:txBody>
-      </p:sp>
-      <p:sp>
-        <p:nvSpPr>
-          <p:cNvPr id="22" name="Text 17"/>
-          <p:cNvSpPr/>
-          <p:nvPr/>
-        </p:nvSpPr>
-        <p:spPr>
-          <a:xfrm>
-            <a:off x="6419088" y="2340864"/>
-            <a:ext cx="2157984" cy="438912"/>
+          <p:cNvPr id="20" name="Text 14"/>
+          <p:cNvSpPr/>
+          <p:nvPr/>
+        </p:nvSpPr>
+        <p:spPr>
+          <a:xfrm>
+            <a:off x="5724144" y="2642616"/>
+            <a:ext cx="2377440" cy="384048"/>
           </a:xfrm>
           <a:prstGeom prst="rect">
             <a:avLst/>
@@ -10554,7 +10707,7 @@
                 <a:ea typeface="Calibri" pitchFamily="34" charset="-122"/>
                 <a:cs typeface="Calibri" pitchFamily="34" charset="-120"/>
               </a:rPr>
-              <a:t>Pemantauan Perkembangan</a:t>
+              <a:t>3. Pemantauan Perkembangan</a:t>
             </a:r>
             <a:endParaRPr lang="en-US" sz="1250" dirty="0"/>
           </a:p>
@@ -10562,14 +10715,14 @@
       </p:sp>
       <p:sp>
         <p:nvSpPr>
-          <p:cNvPr id="23" name="Text 18"/>
-          <p:cNvSpPr/>
-          <p:nvPr/>
-        </p:nvSpPr>
-        <p:spPr>
-          <a:xfrm>
-            <a:off x="6419088" y="2779776"/>
-            <a:ext cx="2157984" cy="365760"/>
+          <p:cNvPr id="21" name="Text 15"/>
+          <p:cNvSpPr/>
+          <p:nvPr/>
+        </p:nvSpPr>
+        <p:spPr>
+          <a:xfrm>
+            <a:off x="5724144" y="3026664"/>
+            <a:ext cx="2377440" cy="402336"/>
           </a:xfrm>
           <a:prstGeom prst="rect">
             <a:avLst/>
@@ -10601,18 +10754,18 @@
       </p:sp>
       <p:sp>
         <p:nvSpPr>
-          <p:cNvPr id="24" name="Shape 19"/>
-          <p:cNvSpPr/>
-          <p:nvPr/>
-        </p:nvSpPr>
-        <p:spPr>
-          <a:xfrm>
-            <a:off x="9015984" y="1481328"/>
-            <a:ext cx="2596896" cy="1700784"/>
+          <p:cNvPr id="22" name="Shape 16"/>
+          <p:cNvSpPr/>
+          <p:nvPr/>
+        </p:nvSpPr>
+        <p:spPr>
+          <a:xfrm>
+            <a:off x="8503920" y="2551176"/>
+            <a:ext cx="3346704" cy="950976"/>
           </a:xfrm>
           <a:prstGeom prst="roundRect">
             <a:avLst>
-              <a:gd name="adj" fmla="val 7527"/>
+              <a:gd name="adj" fmla="val 13462"/>
             </a:avLst>
           </a:prstGeom>
           <a:solidFill>
@@ -10635,18 +10788,18 @@
       </p:sp>
       <p:sp>
         <p:nvSpPr>
-          <p:cNvPr id="25" name="Shape 20"/>
-          <p:cNvSpPr/>
-          <p:nvPr/>
-        </p:nvSpPr>
-        <p:spPr>
-          <a:xfrm>
-            <a:off x="9235440" y="1700784"/>
-            <a:ext cx="566928" cy="566928"/>
+          <p:cNvPr id="23" name="Shape 17"/>
+          <p:cNvSpPr/>
+          <p:nvPr/>
+        </p:nvSpPr>
+        <p:spPr>
+          <a:xfrm>
+            <a:off x="8686800" y="2779776"/>
+            <a:ext cx="493776" cy="493776"/>
           </a:xfrm>
           <a:prstGeom prst="ellipse">
             <a:avLst>
-              <a:gd name="adj" fmla="val 19355"/>
+              <a:gd name="adj" fmla="val 22222"/>
             </a:avLst>
           </a:prstGeom>
           <a:solidFill>
@@ -10662,22 +10815,22 @@
       </p:sp>
       <p:pic>
         <p:nvPicPr>
-          <p:cNvPr id="26" name="Image 3" descr="preencoded.png">    </p:cNvPr>
+          <p:cNvPr id="24" name="Image 4" descr="preencoded.png">    </p:cNvPr>
           <p:cNvPicPr>
             <a:picLocks noChangeAspect="1"/>
           </p:cNvPicPr>
           <p:nvPr/>
         </p:nvPicPr>
         <p:blipFill>
-          <a:blip r:embed="rId4"/>
+          <a:blip r:embed="rId5"/>
           <a:stretch>
             <a:fillRect/>
           </a:stretch>
         </p:blipFill>
         <p:spPr>
           <a:xfrm>
-            <a:off x="9371503" y="1836847"/>
-            <a:ext cx="294803" cy="294803"/>
+            <a:off x="8805306" y="2898282"/>
+            <a:ext cx="256764" cy="256764"/>
           </a:xfrm>
           <a:prstGeom prst="rect">
             <a:avLst/>
@@ -10686,55 +10839,14 @@
       </p:pic>
       <p:sp>
         <p:nvSpPr>
-          <p:cNvPr id="27" name="Text 21"/>
-          <p:cNvSpPr/>
-          <p:nvPr/>
-        </p:nvSpPr>
-        <p:spPr>
-          <a:xfrm>
-            <a:off x="10826496" y="1664208"/>
-            <a:ext cx="566928" cy="365760"/>
-          </a:xfrm>
-          <a:prstGeom prst="rect">
-            <a:avLst/>
-          </a:prstGeom>
-          <a:noFill/>
-          <a:ln/>
-        </p:spPr>
-        <p:txBody>
-          <a:bodyPr wrap="square" lIns="0" tIns="0" rIns="0" bIns="0" rtlCol="0" anchor="ctr"/>
-          <a:lstStyle/>
-          <a:p>
-            <a:pPr algn="r" indent="0" marL="0">
-              <a:buNone/>
-            </a:pPr>
-            <a:r>
-              <a:rPr lang="en-US" sz="2000" b="1" dirty="0">
-                <a:solidFill>
-                  <a:srgbClr val="7A66B8">
-                    <a:alpha val="35000"/>
-                  </a:srgbClr>
-                </a:solidFill>
-                <a:latin typeface="Calibri" pitchFamily="34" charset="0"/>
-                <a:ea typeface="Calibri" pitchFamily="34" charset="-122"/>
-                <a:cs typeface="Calibri" pitchFamily="34" charset="-120"/>
-              </a:rPr>
-              <a:t>04</a:t>
-            </a:r>
-            <a:endParaRPr lang="en-US" sz="2000" dirty="0"/>
-          </a:p>
-        </p:txBody>
-      </p:sp>
-      <p:sp>
-        <p:nvSpPr>
-          <p:cNvPr id="28" name="Text 22"/>
-          <p:cNvSpPr/>
-          <p:nvPr/>
-        </p:nvSpPr>
-        <p:spPr>
-          <a:xfrm>
-            <a:off x="9235440" y="2340864"/>
-            <a:ext cx="2157984" cy="438912"/>
+          <p:cNvPr id="25" name="Text 18"/>
+          <p:cNvSpPr/>
+          <p:nvPr/>
+        </p:nvSpPr>
+        <p:spPr>
+          <a:xfrm>
+            <a:off x="9290304" y="2642616"/>
+            <a:ext cx="2377440" cy="384048"/>
           </a:xfrm>
           <a:prstGeom prst="rect">
             <a:avLst/>
@@ -10758,7 +10870,7 @@
                 <a:ea typeface="Calibri" pitchFamily="34" charset="-122"/>
                 <a:cs typeface="Calibri" pitchFamily="34" charset="-120"/>
               </a:rPr>
-              <a:t>Koordinasi Lintas Sektor</a:t>
+              <a:t>4. Koordinasi Lintas Sektor</a:t>
             </a:r>
             <a:endParaRPr lang="en-US" sz="1250" dirty="0"/>
           </a:p>
@@ -10766,14 +10878,14 @@
       </p:sp>
       <p:sp>
         <p:nvSpPr>
-          <p:cNvPr id="29" name="Text 23"/>
-          <p:cNvSpPr/>
-          <p:nvPr/>
-        </p:nvSpPr>
-        <p:spPr>
-          <a:xfrm>
-            <a:off x="9235440" y="2779776"/>
-            <a:ext cx="2157984" cy="365760"/>
+          <p:cNvPr id="26" name="Text 19"/>
+          <p:cNvSpPr/>
+          <p:nvPr/>
+        </p:nvSpPr>
+        <p:spPr>
+          <a:xfrm>
+            <a:off x="9290304" y="3026664"/>
+            <a:ext cx="2377440" cy="402336"/>
           </a:xfrm>
           <a:prstGeom prst="rect">
             <a:avLst/>
@@ -10805,18 +10917,18 @@
       </p:sp>
       <p:sp>
         <p:nvSpPr>
-          <p:cNvPr id="30" name="Shape 24"/>
-          <p:cNvSpPr/>
-          <p:nvPr/>
-        </p:nvSpPr>
-        <p:spPr>
-          <a:xfrm>
-            <a:off x="566928" y="3401568"/>
-            <a:ext cx="2596896" cy="1700784"/>
+          <p:cNvPr id="27" name="Shape 20"/>
+          <p:cNvSpPr/>
+          <p:nvPr/>
+        </p:nvSpPr>
+        <p:spPr>
+          <a:xfrm>
+            <a:off x="4937760" y="3621024"/>
+            <a:ext cx="3346704" cy="950976"/>
           </a:xfrm>
           <a:prstGeom prst="roundRect">
             <a:avLst>
-              <a:gd name="adj" fmla="val 7527"/>
+              <a:gd name="adj" fmla="val 13462"/>
             </a:avLst>
           </a:prstGeom>
           <a:solidFill>
@@ -10839,18 +10951,18 @@
       </p:sp>
       <p:sp>
         <p:nvSpPr>
-          <p:cNvPr id="31" name="Shape 25"/>
-          <p:cNvSpPr/>
-          <p:nvPr/>
-        </p:nvSpPr>
-        <p:spPr>
-          <a:xfrm>
-            <a:off x="786384" y="3621024"/>
-            <a:ext cx="566928" cy="566928"/>
+          <p:cNvPr id="28" name="Shape 21"/>
+          <p:cNvSpPr/>
+          <p:nvPr/>
+        </p:nvSpPr>
+        <p:spPr>
+          <a:xfrm>
+            <a:off x="5120640" y="3849624"/>
+            <a:ext cx="493776" cy="493776"/>
           </a:xfrm>
           <a:prstGeom prst="ellipse">
             <a:avLst>
-              <a:gd name="adj" fmla="val 19355"/>
+              <a:gd name="adj" fmla="val 22222"/>
             </a:avLst>
           </a:prstGeom>
           <a:solidFill>
@@ -10866,22 +10978,22 @@
       </p:sp>
       <p:pic>
         <p:nvPicPr>
-          <p:cNvPr id="32" name="Image 4" descr="preencoded.png">    </p:cNvPr>
+          <p:cNvPr id="29" name="Image 5" descr="preencoded.png">    </p:cNvPr>
           <p:cNvPicPr>
             <a:picLocks noChangeAspect="1"/>
           </p:cNvPicPr>
           <p:nvPr/>
         </p:nvPicPr>
         <p:blipFill>
-          <a:blip r:embed="rId5"/>
+          <a:blip r:embed="rId6"/>
           <a:stretch>
             <a:fillRect/>
           </a:stretch>
         </p:blipFill>
         <p:spPr>
           <a:xfrm>
-            <a:off x="922447" y="3757087"/>
-            <a:ext cx="294803" cy="294803"/>
+            <a:off x="5239146" y="3968130"/>
+            <a:ext cx="256764" cy="256764"/>
           </a:xfrm>
           <a:prstGeom prst="rect">
             <a:avLst/>
@@ -10890,55 +11002,14 @@
       </p:pic>
       <p:sp>
         <p:nvSpPr>
-          <p:cNvPr id="33" name="Text 26"/>
-          <p:cNvSpPr/>
-          <p:nvPr/>
-        </p:nvSpPr>
-        <p:spPr>
-          <a:xfrm>
-            <a:off x="2377440" y="3584448"/>
-            <a:ext cx="566928" cy="365760"/>
-          </a:xfrm>
-          <a:prstGeom prst="rect">
-            <a:avLst/>
-          </a:prstGeom>
-          <a:noFill/>
-          <a:ln/>
-        </p:spPr>
-        <p:txBody>
-          <a:bodyPr wrap="square" lIns="0" tIns="0" rIns="0" bIns="0" rtlCol="0" anchor="ctr"/>
-          <a:lstStyle/>
-          <a:p>
-            <a:pPr algn="r" indent="0" marL="0">
-              <a:buNone/>
-            </a:pPr>
-            <a:r>
-              <a:rPr lang="en-US" sz="2000" b="1" dirty="0">
-                <a:solidFill>
-                  <a:srgbClr val="1F9C9C">
-                    <a:alpha val="35000"/>
-                  </a:srgbClr>
-                </a:solidFill>
-                <a:latin typeface="Calibri" pitchFamily="34" charset="0"/>
-                <a:ea typeface="Calibri" pitchFamily="34" charset="-122"/>
-                <a:cs typeface="Calibri" pitchFamily="34" charset="-120"/>
-              </a:rPr>
-              <a:t>05</a:t>
-            </a:r>
-            <a:endParaRPr lang="en-US" sz="2000" dirty="0"/>
-          </a:p>
-        </p:txBody>
-      </p:sp>
-      <p:sp>
-        <p:nvSpPr>
-          <p:cNvPr id="34" name="Text 27"/>
-          <p:cNvSpPr/>
-          <p:nvPr/>
-        </p:nvSpPr>
-        <p:spPr>
-          <a:xfrm>
-            <a:off x="786384" y="4261104"/>
-            <a:ext cx="2157984" cy="438912"/>
+          <p:cNvPr id="30" name="Text 22"/>
+          <p:cNvSpPr/>
+          <p:nvPr/>
+        </p:nvSpPr>
+        <p:spPr>
+          <a:xfrm>
+            <a:off x="5724144" y="3712464"/>
+            <a:ext cx="2377440" cy="384048"/>
           </a:xfrm>
           <a:prstGeom prst="rect">
             <a:avLst/>
@@ -10962,7 +11033,7 @@
                 <a:ea typeface="Calibri" pitchFamily="34" charset="-122"/>
                 <a:cs typeface="Calibri" pitchFamily="34" charset="-120"/>
               </a:rPr>
-              <a:t>Penerapan PHBS</a:t>
+              <a:t>5. Penerapan PHBS</a:t>
             </a:r>
             <a:endParaRPr lang="en-US" sz="1250" dirty="0"/>
           </a:p>
@@ -10970,14 +11041,14 @@
       </p:sp>
       <p:sp>
         <p:nvSpPr>
-          <p:cNvPr id="35" name="Text 28"/>
-          <p:cNvSpPr/>
-          <p:nvPr/>
-        </p:nvSpPr>
-        <p:spPr>
-          <a:xfrm>
-            <a:off x="786384" y="4700016"/>
-            <a:ext cx="2157984" cy="365760"/>
+          <p:cNvPr id="31" name="Text 23"/>
+          <p:cNvSpPr/>
+          <p:nvPr/>
+        </p:nvSpPr>
+        <p:spPr>
+          <a:xfrm>
+            <a:off x="5724144" y="4096512"/>
+            <a:ext cx="2377440" cy="402336"/>
           </a:xfrm>
           <a:prstGeom prst="rect">
             <a:avLst/>
@@ -11009,18 +11080,18 @@
       </p:sp>
       <p:sp>
         <p:nvSpPr>
-          <p:cNvPr id="36" name="Shape 29"/>
-          <p:cNvSpPr/>
-          <p:nvPr/>
-        </p:nvSpPr>
-        <p:spPr>
-          <a:xfrm>
-            <a:off x="3383280" y="3401568"/>
-            <a:ext cx="2596896" cy="1700784"/>
+          <p:cNvPr id="32" name="Shape 24"/>
+          <p:cNvSpPr/>
+          <p:nvPr/>
+        </p:nvSpPr>
+        <p:spPr>
+          <a:xfrm>
+            <a:off x="8503920" y="3621024"/>
+            <a:ext cx="3346704" cy="950976"/>
           </a:xfrm>
           <a:prstGeom prst="roundRect">
             <a:avLst>
-              <a:gd name="adj" fmla="val 7527"/>
+              <a:gd name="adj" fmla="val 13462"/>
             </a:avLst>
           </a:prstGeom>
           <a:solidFill>
@@ -11043,18 +11114,18 @@
       </p:sp>
       <p:sp>
         <p:nvSpPr>
-          <p:cNvPr id="37" name="Shape 30"/>
-          <p:cNvSpPr/>
-          <p:nvPr/>
-        </p:nvSpPr>
-        <p:spPr>
-          <a:xfrm>
-            <a:off x="3602736" y="3621024"/>
-            <a:ext cx="566928" cy="566928"/>
+          <p:cNvPr id="33" name="Shape 25"/>
+          <p:cNvSpPr/>
+          <p:nvPr/>
+        </p:nvSpPr>
+        <p:spPr>
+          <a:xfrm>
+            <a:off x="8686800" y="3849624"/>
+            <a:ext cx="493776" cy="493776"/>
           </a:xfrm>
           <a:prstGeom prst="ellipse">
             <a:avLst>
-              <a:gd name="adj" fmla="val 19355"/>
+              <a:gd name="adj" fmla="val 22222"/>
             </a:avLst>
           </a:prstGeom>
           <a:solidFill>
@@ -11070,22 +11141,22 @@
       </p:sp>
       <p:pic>
         <p:nvPicPr>
-          <p:cNvPr id="38" name="Image 5" descr="preencoded.png">    </p:cNvPr>
+          <p:cNvPr id="34" name="Image 6" descr="preencoded.png">    </p:cNvPr>
           <p:cNvPicPr>
             <a:picLocks noChangeAspect="1"/>
           </p:cNvPicPr>
           <p:nvPr/>
         </p:nvPicPr>
         <p:blipFill>
-          <a:blip r:embed="rId6"/>
+          <a:blip r:embed="rId7"/>
           <a:stretch>
             <a:fillRect/>
           </a:stretch>
         </p:blipFill>
         <p:spPr>
           <a:xfrm>
-            <a:off x="3738799" y="3757087"/>
-            <a:ext cx="294803" cy="294803"/>
+            <a:off x="8805306" y="3968130"/>
+            <a:ext cx="256764" cy="256764"/>
           </a:xfrm>
           <a:prstGeom prst="rect">
             <a:avLst/>
@@ -11094,55 +11165,14 @@
       </p:pic>
       <p:sp>
         <p:nvSpPr>
-          <p:cNvPr id="39" name="Text 31"/>
-          <p:cNvSpPr/>
-          <p:nvPr/>
-        </p:nvSpPr>
-        <p:spPr>
-          <a:xfrm>
-            <a:off x="5193792" y="3584448"/>
-            <a:ext cx="566928" cy="365760"/>
-          </a:xfrm>
-          <a:prstGeom prst="rect">
-            <a:avLst/>
-          </a:prstGeom>
-          <a:noFill/>
-          <a:ln/>
-        </p:spPr>
-        <p:txBody>
-          <a:bodyPr wrap="square" lIns="0" tIns="0" rIns="0" bIns="0" rtlCol="0" anchor="ctr"/>
-          <a:lstStyle/>
-          <a:p>
-            <a:pPr algn="r" indent="0" marL="0">
-              <a:buNone/>
-            </a:pPr>
-            <a:r>
-              <a:rPr lang="en-US" sz="2000" b="1" dirty="0">
-                <a:solidFill>
-                  <a:srgbClr val="E0574B">
-                    <a:alpha val="35000"/>
-                  </a:srgbClr>
-                </a:solidFill>
-                <a:latin typeface="Calibri" pitchFamily="34" charset="0"/>
-                <a:ea typeface="Calibri" pitchFamily="34" charset="-122"/>
-                <a:cs typeface="Calibri" pitchFamily="34" charset="-120"/>
-              </a:rPr>
-              <a:t>06</a:t>
-            </a:r>
-            <a:endParaRPr lang="en-US" sz="2000" dirty="0"/>
-          </a:p>
-        </p:txBody>
-      </p:sp>
-      <p:sp>
-        <p:nvSpPr>
-          <p:cNvPr id="40" name="Text 32"/>
-          <p:cNvSpPr/>
-          <p:nvPr/>
-        </p:nvSpPr>
-        <p:spPr>
-          <a:xfrm>
-            <a:off x="3602736" y="4261104"/>
-            <a:ext cx="2157984" cy="438912"/>
+          <p:cNvPr id="35" name="Text 26"/>
+          <p:cNvSpPr/>
+          <p:nvPr/>
+        </p:nvSpPr>
+        <p:spPr>
+          <a:xfrm>
+            <a:off x="9290304" y="3712464"/>
+            <a:ext cx="2377440" cy="384048"/>
           </a:xfrm>
           <a:prstGeom prst="rect">
             <a:avLst/>
@@ -11166,7 +11196,7 @@
                 <a:ea typeface="Calibri" pitchFamily="34" charset="-122"/>
                 <a:cs typeface="Calibri" pitchFamily="34" charset="-120"/>
               </a:rPr>
-              <a:t>PMT &amp; Makanan Bergizi</a:t>
+              <a:t>6. PMT &amp; Makanan Bergizi</a:t>
             </a:r>
             <a:endParaRPr lang="en-US" sz="1250" dirty="0"/>
           </a:p>
@@ -11174,14 +11204,14 @@
       </p:sp>
       <p:sp>
         <p:nvSpPr>
-          <p:cNvPr id="41" name="Text 33"/>
-          <p:cNvSpPr/>
-          <p:nvPr/>
-        </p:nvSpPr>
-        <p:spPr>
-          <a:xfrm>
-            <a:off x="3602736" y="4700016"/>
-            <a:ext cx="2157984" cy="365760"/>
+          <p:cNvPr id="36" name="Text 27"/>
+          <p:cNvSpPr/>
+          <p:nvPr/>
+        </p:nvSpPr>
+        <p:spPr>
+          <a:xfrm>
+            <a:off x="9290304" y="4096512"/>
+            <a:ext cx="2377440" cy="402336"/>
           </a:xfrm>
           <a:prstGeom prst="rect">
             <a:avLst/>
@@ -11205,7 +11235,7 @@
                 <a:ea typeface="Calibri" pitchFamily="34" charset="-122"/>
                 <a:cs typeface="Calibri" pitchFamily="34" charset="-120"/>
               </a:rPr>
-              <a:t>Diberikan secara berkala, minimal tiga bulan sekali.</a:t>
+              <a:t>Diberikan berkala, minimal tiga bulan sekali.</a:t>
             </a:r>
             <a:endParaRPr lang="en-US" sz="1000" dirty="0"/>
           </a:p>
@@ -11213,18 +11243,18 @@
       </p:sp>
       <p:sp>
         <p:nvSpPr>
-          <p:cNvPr id="42" name="Shape 34"/>
-          <p:cNvSpPr/>
-          <p:nvPr/>
-        </p:nvSpPr>
-        <p:spPr>
-          <a:xfrm>
-            <a:off x="6199632" y="3401568"/>
-            <a:ext cx="2596896" cy="1700784"/>
+          <p:cNvPr id="37" name="Shape 28"/>
+          <p:cNvSpPr/>
+          <p:nvPr/>
+        </p:nvSpPr>
+        <p:spPr>
+          <a:xfrm>
+            <a:off x="4937760" y="4690872"/>
+            <a:ext cx="3346704" cy="950976"/>
           </a:xfrm>
           <a:prstGeom prst="roundRect">
             <a:avLst>
-              <a:gd name="adj" fmla="val 7527"/>
+              <a:gd name="adj" fmla="val 13462"/>
             </a:avLst>
           </a:prstGeom>
           <a:solidFill>
@@ -11247,18 +11277,18 @@
       </p:sp>
       <p:sp>
         <p:nvSpPr>
-          <p:cNvPr id="43" name="Shape 35"/>
-          <p:cNvSpPr/>
-          <p:nvPr/>
-        </p:nvSpPr>
-        <p:spPr>
-          <a:xfrm>
-            <a:off x="6419088" y="3621024"/>
-            <a:ext cx="566928" cy="566928"/>
+          <p:cNvPr id="38" name="Shape 29"/>
+          <p:cNvSpPr/>
+          <p:nvPr/>
+        </p:nvSpPr>
+        <p:spPr>
+          <a:xfrm>
+            <a:off x="5120640" y="4919472"/>
+            <a:ext cx="493776" cy="493776"/>
           </a:xfrm>
           <a:prstGeom prst="ellipse">
             <a:avLst>
-              <a:gd name="adj" fmla="val 19355"/>
+              <a:gd name="adj" fmla="val 22222"/>
             </a:avLst>
           </a:prstGeom>
           <a:solidFill>
@@ -11274,22 +11304,22 @@
       </p:sp>
       <p:pic>
         <p:nvPicPr>
-          <p:cNvPr id="44" name="Image 6" descr="preencoded.png">    </p:cNvPr>
+          <p:cNvPr id="39" name="Image 7" descr="preencoded.png">    </p:cNvPr>
           <p:cNvPicPr>
             <a:picLocks noChangeAspect="1"/>
           </p:cNvPicPr>
           <p:nvPr/>
         </p:nvPicPr>
         <p:blipFill>
-          <a:blip r:embed="rId7"/>
+          <a:blip r:embed="rId8"/>
           <a:stretch>
             <a:fillRect/>
           </a:stretch>
         </p:blipFill>
         <p:spPr>
           <a:xfrm>
-            <a:off x="6555151" y="3757087"/>
-            <a:ext cx="294803" cy="294803"/>
+            <a:off x="5239146" y="5037978"/>
+            <a:ext cx="256764" cy="256764"/>
           </a:xfrm>
           <a:prstGeom prst="rect">
             <a:avLst/>
@@ -11298,55 +11328,14 @@
       </p:pic>
       <p:sp>
         <p:nvSpPr>
-          <p:cNvPr id="45" name="Text 36"/>
-          <p:cNvSpPr/>
-          <p:nvPr/>
-        </p:nvSpPr>
-        <p:spPr>
-          <a:xfrm>
-            <a:off x="8010144" y="3584448"/>
-            <a:ext cx="566928" cy="365760"/>
-          </a:xfrm>
-          <a:prstGeom prst="rect">
-            <a:avLst/>
-          </a:prstGeom>
-          <a:noFill/>
-          <a:ln/>
-        </p:spPr>
-        <p:txBody>
-          <a:bodyPr wrap="square" lIns="0" tIns="0" rIns="0" bIns="0" rtlCol="0" anchor="ctr"/>
-          <a:lstStyle/>
-          <a:p>
-            <a:pPr algn="r" indent="0" marL="0">
-              <a:buNone/>
-            </a:pPr>
-            <a:r>
-              <a:rPr lang="en-US" sz="2000" b="1" dirty="0">
-                <a:solidFill>
-                  <a:srgbClr val="0F4C88">
-                    <a:alpha val="35000"/>
-                  </a:srgbClr>
-                </a:solidFill>
-                <a:latin typeface="Calibri" pitchFamily="34" charset="0"/>
-                <a:ea typeface="Calibri" pitchFamily="34" charset="-122"/>
-                <a:cs typeface="Calibri" pitchFamily="34" charset="-120"/>
-              </a:rPr>
-              <a:t>07</a:t>
-            </a:r>
-            <a:endParaRPr lang="en-US" sz="2000" dirty="0"/>
-          </a:p>
-        </p:txBody>
-      </p:sp>
-      <p:sp>
-        <p:nvSpPr>
-          <p:cNvPr id="46" name="Text 37"/>
-          <p:cNvSpPr/>
-          <p:nvPr/>
-        </p:nvSpPr>
-        <p:spPr>
-          <a:xfrm>
-            <a:off x="6419088" y="4261104"/>
-            <a:ext cx="2157984" cy="438912"/>
+          <p:cNvPr id="40" name="Text 30"/>
+          <p:cNvSpPr/>
+          <p:nvPr/>
+        </p:nvSpPr>
+        <p:spPr>
+          <a:xfrm>
+            <a:off x="5724144" y="4782312"/>
+            <a:ext cx="2377440" cy="384048"/>
           </a:xfrm>
           <a:prstGeom prst="rect">
             <a:avLst/>
@@ -11370,7 +11359,7 @@
                 <a:ea typeface="Calibri" pitchFamily="34" charset="-122"/>
                 <a:cs typeface="Calibri" pitchFamily="34" charset="-120"/>
               </a:rPr>
-              <a:t>Kepemilikan NIK</a:t>
+              <a:t>7. Kepemilikan NIK</a:t>
             </a:r>
             <a:endParaRPr lang="en-US" sz="1250" dirty="0"/>
           </a:p>
@@ -11378,14 +11367,14 @@
       </p:sp>
       <p:sp>
         <p:nvSpPr>
-          <p:cNvPr id="47" name="Text 38"/>
-          <p:cNvSpPr/>
-          <p:nvPr/>
-        </p:nvSpPr>
-        <p:spPr>
-          <a:xfrm>
-            <a:off x="6419088" y="4700016"/>
-            <a:ext cx="2157984" cy="365760"/>
+          <p:cNvPr id="41" name="Text 31"/>
+          <p:cNvSpPr/>
+          <p:nvPr/>
+        </p:nvSpPr>
+        <p:spPr>
+          <a:xfrm>
+            <a:off x="5724144" y="5166360"/>
+            <a:ext cx="2377440" cy="402336"/>
           </a:xfrm>
           <a:prstGeom prst="rect">
             <a:avLst/>
@@ -11417,18 +11406,18 @@
       </p:sp>
       <p:sp>
         <p:nvSpPr>
-          <p:cNvPr id="48" name="Shape 39"/>
-          <p:cNvSpPr/>
-          <p:nvPr/>
-        </p:nvSpPr>
-        <p:spPr>
-          <a:xfrm>
-            <a:off x="9015984" y="3401568"/>
-            <a:ext cx="2596896" cy="1700784"/>
+          <p:cNvPr id="42" name="Shape 32"/>
+          <p:cNvSpPr/>
+          <p:nvPr/>
+        </p:nvSpPr>
+        <p:spPr>
+          <a:xfrm>
+            <a:off x="8503920" y="4690872"/>
+            <a:ext cx="3346704" cy="950976"/>
           </a:xfrm>
           <a:prstGeom prst="roundRect">
             <a:avLst>
-              <a:gd name="adj" fmla="val 7527"/>
+              <a:gd name="adj" fmla="val 13462"/>
             </a:avLst>
           </a:prstGeom>
           <a:solidFill>
@@ -11451,18 +11440,18 @@
       </p:sp>
       <p:sp>
         <p:nvSpPr>
-          <p:cNvPr id="49" name="Shape 40"/>
-          <p:cNvSpPr/>
-          <p:nvPr/>
-        </p:nvSpPr>
-        <p:spPr>
-          <a:xfrm>
-            <a:off x="9235440" y="3621024"/>
-            <a:ext cx="566928" cy="566928"/>
+          <p:cNvPr id="43" name="Shape 33"/>
+          <p:cNvSpPr/>
+          <p:nvPr/>
+        </p:nvSpPr>
+        <p:spPr>
+          <a:xfrm>
+            <a:off x="8686800" y="4919472"/>
+            <a:ext cx="493776" cy="493776"/>
           </a:xfrm>
           <a:prstGeom prst="ellipse">
             <a:avLst>
-              <a:gd name="adj" fmla="val 19355"/>
+              <a:gd name="adj" fmla="val 22222"/>
             </a:avLst>
           </a:prstGeom>
           <a:solidFill>
@@ -11478,22 +11467,22 @@
       </p:sp>
       <p:pic>
         <p:nvPicPr>
-          <p:cNvPr id="50" name="Image 7" descr="preencoded.png">    </p:cNvPr>
+          <p:cNvPr id="44" name="Image 8" descr="preencoded.png">    </p:cNvPr>
           <p:cNvPicPr>
             <a:picLocks noChangeAspect="1"/>
           </p:cNvPicPr>
           <p:nvPr/>
         </p:nvPicPr>
         <p:blipFill>
-          <a:blip r:embed="rId8"/>
+          <a:blip r:embed="rId9"/>
           <a:stretch>
             <a:fillRect/>
           </a:stretch>
         </p:blipFill>
         <p:spPr>
           <a:xfrm>
-            <a:off x="9371503" y="3757087"/>
-            <a:ext cx="294803" cy="294803"/>
+            <a:off x="8805306" y="5037978"/>
+            <a:ext cx="256764" cy="256764"/>
           </a:xfrm>
           <a:prstGeom prst="rect">
             <a:avLst/>
@@ -11502,55 +11491,14 @@
       </p:pic>
       <p:sp>
         <p:nvSpPr>
-          <p:cNvPr id="51" name="Text 41"/>
-          <p:cNvSpPr/>
-          <p:nvPr/>
-        </p:nvSpPr>
-        <p:spPr>
-          <a:xfrm>
-            <a:off x="10826496" y="3584448"/>
-            <a:ext cx="566928" cy="365760"/>
-          </a:xfrm>
-          <a:prstGeom prst="rect">
-            <a:avLst/>
-          </a:prstGeom>
-          <a:noFill/>
-          <a:ln/>
-        </p:spPr>
-        <p:txBody>
-          <a:bodyPr wrap="square" lIns="0" tIns="0" rIns="0" bIns="0" rtlCol="0" anchor="ctr"/>
-          <a:lstStyle/>
-          <a:p>
-            <a:pPr algn="r" indent="0" marL="0">
-              <a:buNone/>
-            </a:pPr>
-            <a:r>
-              <a:rPr lang="en-US" sz="2000" b="1" dirty="0">
-                <a:solidFill>
-                  <a:srgbClr val="176B44">
-                    <a:alpha val="35000"/>
-                  </a:srgbClr>
-                </a:solidFill>
-                <a:latin typeface="Calibri" pitchFamily="34" charset="0"/>
-                <a:ea typeface="Calibri" pitchFamily="34" charset="-122"/>
-                <a:cs typeface="Calibri" pitchFamily="34" charset="-120"/>
-              </a:rPr>
-              <a:t>08</a:t>
-            </a:r>
-            <a:endParaRPr lang="en-US" sz="2000" dirty="0"/>
-          </a:p>
-        </p:txBody>
-      </p:sp>
-      <p:sp>
-        <p:nvSpPr>
-          <p:cNvPr id="52" name="Text 42"/>
-          <p:cNvSpPr/>
-          <p:nvPr/>
-        </p:nvSpPr>
-        <p:spPr>
-          <a:xfrm>
-            <a:off x="9235440" y="4261104"/>
-            <a:ext cx="2157984" cy="438912"/>
+          <p:cNvPr id="45" name="Text 34"/>
+          <p:cNvSpPr/>
+          <p:nvPr/>
+        </p:nvSpPr>
+        <p:spPr>
+          <a:xfrm>
+            <a:off x="9290304" y="4782312"/>
+            <a:ext cx="2377440" cy="384048"/>
           </a:xfrm>
           <a:prstGeom prst="rect">
             <a:avLst/>
@@ -11574,7 +11522,7 @@
                 <a:ea typeface="Calibri" pitchFamily="34" charset="-122"/>
                 <a:cs typeface="Calibri" pitchFamily="34" charset="-120"/>
               </a:rPr>
-              <a:t>Sanitasi &amp; Air Bersih</a:t>
+              <a:t>8. Sanitasi &amp; Air Bersih</a:t>
             </a:r>
             <a:endParaRPr lang="en-US" sz="1250" dirty="0"/>
           </a:p>
@@ -11582,14 +11530,14 @@
       </p:sp>
       <p:sp>
         <p:nvSpPr>
-          <p:cNvPr id="53" name="Text 43"/>
-          <p:cNvSpPr/>
-          <p:nvPr/>
-        </p:nvSpPr>
-        <p:spPr>
-          <a:xfrm>
-            <a:off x="9235440" y="4700016"/>
-            <a:ext cx="2157984" cy="365760"/>
+          <p:cNvPr id="46" name="Text 35"/>
+          <p:cNvSpPr/>
+          <p:nvPr/>
+        </p:nvSpPr>
+        <p:spPr>
+          <a:xfrm>
+            <a:off x="9290304" y="5166360"/>
+            <a:ext cx="2377440" cy="402336"/>
           </a:xfrm>
           <a:prstGeom prst="rect">
             <a:avLst/>
@@ -11621,18 +11569,18 @@
       </p:sp>
       <p:sp>
         <p:nvSpPr>
-          <p:cNvPr id="54" name="Shape 44"/>
-          <p:cNvSpPr/>
-          <p:nvPr/>
-        </p:nvSpPr>
-        <p:spPr>
-          <a:xfrm>
-            <a:off x="566928" y="5193792"/>
-            <a:ext cx="11057839" cy="786384"/>
+          <p:cNvPr id="47" name="Shape 36"/>
+          <p:cNvSpPr/>
+          <p:nvPr/>
+        </p:nvSpPr>
+        <p:spPr>
+          <a:xfrm>
+            <a:off x="566928" y="5687568"/>
+            <a:ext cx="11057839" cy="658368"/>
           </a:xfrm>
           <a:prstGeom prst="roundRect">
             <a:avLst>
-              <a:gd name="adj" fmla="val 16279"/>
+              <a:gd name="adj" fmla="val 19444"/>
             </a:avLst>
           </a:prstGeom>
           <a:solidFill>
@@ -11655,13 +11603,13 @@
       </p:sp>
       <p:sp>
         <p:nvSpPr>
-          <p:cNvPr id="55" name="Text 45"/>
-          <p:cNvSpPr/>
-          <p:nvPr/>
-        </p:nvSpPr>
-        <p:spPr>
-          <a:xfrm>
-            <a:off x="896112" y="5303520"/>
+          <p:cNvPr id="48" name="Text 37"/>
+          <p:cNvSpPr/>
+          <p:nvPr/>
+        </p:nvSpPr>
+        <p:spPr>
+          <a:xfrm>
+            <a:off x="896112" y="5742432"/>
             <a:ext cx="10399471" cy="548640"/>
           </a:xfrm>
           <a:prstGeom prst="rect">
@@ -11694,7 +11642,7 @@
       </p:sp>
       <p:sp>
         <p:nvSpPr>
-          <p:cNvPr id="56" name="Text 46"/>
+          <p:cNvPr id="49" name="Text 38"/>
           <p:cNvSpPr/>
           <p:nvPr/>
         </p:nvSpPr>
@@ -11733,7 +11681,7 @@
       </p:sp>
       <p:sp>
         <p:nvSpPr>
-          <p:cNvPr id="57" name="Text 47"/>
+          <p:cNvPr id="50" name="Text 39"/>
           <p:cNvSpPr/>
           <p:nvPr/>
         </p:nvSpPr>
@@ -12612,9 +12560,65 @@
           <a:chExt cx="0" cy="0"/>
         </a:xfrm>
       </p:grpSpPr>
+      <p:sp>
+        <p:nvSpPr>
+          <p:cNvPr id="2" name="Shape 0"/>
+          <p:cNvSpPr/>
+          <p:nvPr/>
+        </p:nvSpPr>
+        <p:spPr>
+          <a:xfrm>
+            <a:off x="-1097280" y="-1280160"/>
+            <a:ext cx="3840480" cy="3840480"/>
+          </a:xfrm>
+          <a:prstGeom prst="ellipse">
+            <a:avLst/>
+          </a:prstGeom>
+          <a:solidFill>
+            <a:srgbClr val="FFFFFF">
+              <a:alpha val="12000"/>
+            </a:srgbClr>
+          </a:solidFill>
+          <a:ln/>
+        </p:spPr>
+      </p:sp>
+      <p:sp>
+        <p:nvSpPr>
+          <p:cNvPr id="3" name="Shape 1"/>
+          <p:cNvSpPr/>
+          <p:nvPr/>
+        </p:nvSpPr>
+        <p:spPr>
+          <a:xfrm>
+            <a:off x="3846424" y="3447288"/>
+            <a:ext cx="4498848" cy="3054096"/>
+          </a:xfrm>
+          <a:prstGeom prst="roundRect">
+            <a:avLst>
+              <a:gd name="adj" fmla="val 4192"/>
+            </a:avLst>
+          </a:prstGeom>
+          <a:solidFill>
+            <a:srgbClr val="FFFFFF"/>
+          </a:solidFill>
+          <a:ln w="12700">
+            <a:solidFill>
+              <a:srgbClr val="333333"/>
+            </a:solidFill>
+            <a:prstDash val="solid"/>
+          </a:ln>
+          <a:effectLst>
+            <a:outerShdw sx="100000" sy="100000" kx="0" ky="0" algn="bl" rotWithShape="0" blurRad="177800" dist="38100" dir="5400000">
+              <a:srgbClr val="0F3352">
+                <a:alpha val="10000"/>
+              </a:srgbClr>
+            </a:outerShdw>
+          </a:effectLst>
+        </p:spPr>
+      </p:sp>
       <p:pic>
         <p:nvPicPr>
-          <p:cNvPr id="2" name="Image 0" descr="preencoded.png">    </p:cNvPr>
+          <p:cNvPr id="4" name="Image 0" descr="preencoded.png">    </p:cNvPr>
           <p:cNvPicPr>
             <a:picLocks noChangeAspect="1"/>
           </p:cNvPicPr>
@@ -12628,8 +12632,8 @@
         </p:blipFill>
         <p:spPr>
           <a:xfrm>
-            <a:off x="3828136" y="4023360"/>
-            <a:ext cx="4535424" cy="2834640"/>
+            <a:off x="3928720" y="3529584"/>
+            <a:ext cx="4334256" cy="2889504"/>
           </a:xfrm>
           <a:prstGeom prst="rect">
             <a:avLst/>
@@ -12638,29 +12642,7 @@
       </p:pic>
       <p:sp>
         <p:nvSpPr>
-          <p:cNvPr id="3" name="Shape 0"/>
-          <p:cNvSpPr/>
-          <p:nvPr/>
-        </p:nvSpPr>
-        <p:spPr>
-          <a:xfrm>
-            <a:off x="-1097280" y="-1280160"/>
-            <a:ext cx="3840480" cy="3840480"/>
-          </a:xfrm>
-          <a:prstGeom prst="ellipse">
-            <a:avLst/>
-          </a:prstGeom>
-          <a:solidFill>
-            <a:srgbClr val="FFFFFF">
-              <a:alpha val="12000"/>
-            </a:srgbClr>
-          </a:solidFill>
-          <a:ln/>
-        </p:spPr>
-      </p:sp>
-      <p:sp>
-        <p:nvSpPr>
-          <p:cNvPr id="4" name="Text 1"/>
+          <p:cNvPr id="5" name="Text 2"/>
           <p:cNvSpPr/>
           <p:nvPr/>
         </p:nvSpPr>
@@ -12701,7 +12683,7 @@
       </p:sp>
       <p:sp>
         <p:nvSpPr>
-          <p:cNvPr id="5" name="Text 2"/>
+          <p:cNvPr id="6" name="Text 3"/>
           <p:cNvSpPr/>
           <p:nvPr/>
         </p:nvSpPr>
@@ -12740,14 +12722,14 @@
       </p:sp>
       <p:sp>
         <p:nvSpPr>
-          <p:cNvPr id="6" name="Text 3"/>
+          <p:cNvPr id="7" name="Text 4"/>
           <p:cNvSpPr/>
           <p:nvPr/>
         </p:nvSpPr>
         <p:spPr>
           <a:xfrm>
             <a:off x="566928" y="2706624"/>
-            <a:ext cx="8778240" cy="822960"/>
+            <a:ext cx="8778240" cy="731520"/>
           </a:xfrm>
           <a:prstGeom prst="rect">
             <a:avLst/>
@@ -12781,7 +12763,7 @@
       </p:sp>
       <p:sp>
         <p:nvSpPr>
-          <p:cNvPr id="7" name="Text 4"/>
+          <p:cNvPr id="8" name="Text 5"/>
           <p:cNvSpPr/>
           <p:nvPr/>
         </p:nvSpPr>
@@ -12820,7 +12802,7 @@
       </p:sp>
       <p:sp>
         <p:nvSpPr>
-          <p:cNvPr id="8" name="Text 5"/>
+          <p:cNvPr id="9" name="Text 6"/>
           <p:cNvSpPr/>
           <p:nvPr/>
         </p:nvSpPr>
@@ -13011,44 +12993,20 @@
           </a:p>
         </p:txBody>
       </p:sp>
-      <p:pic>
-        <p:nvPicPr>
-          <p:cNvPr id="6" name="Image 0" descr="preencoded.png">    </p:cNvPr>
-          <p:cNvPicPr>
-            <a:picLocks noChangeAspect="1"/>
-          </p:cNvPicPr>
-          <p:nvPr/>
-        </p:nvPicPr>
-        <p:blipFill>
-          <a:blip r:embed="rId1"/>
-          <a:stretch>
-            <a:fillRect/>
-          </a:stretch>
-        </p:blipFill>
-        <p:spPr>
-          <a:xfrm>
-            <a:off x="429768" y="2286000"/>
-            <a:ext cx="3491345" cy="3200400"/>
-          </a:xfrm>
-          <a:prstGeom prst="rect">
-            <a:avLst/>
-          </a:prstGeom>
-        </p:spPr>
-      </p:pic>
-      <p:sp>
-        <p:nvSpPr>
-          <p:cNvPr id="7" name="Shape 4"/>
+      <p:sp>
+        <p:nvSpPr>
+          <p:cNvPr id="6" name="Shape 4"/>
           <p:cNvSpPr/>
           <p:nvPr/>
         </p:nvSpPr>
         <p:spPr>
           <a:xfrm>
             <a:off x="566928" y="1499616"/>
-            <a:ext cx="4114800" cy="859536"/>
+            <a:ext cx="4206240" cy="1188720"/>
           </a:xfrm>
           <a:prstGeom prst="roundRect">
             <a:avLst>
-              <a:gd name="adj" fmla="val 14894"/>
+              <a:gd name="adj" fmla="val 10769"/>
             </a:avLst>
           </a:prstGeom>
           <a:solidFill>
@@ -13071,14 +13029,14 @@
       </p:sp>
       <p:sp>
         <p:nvSpPr>
-          <p:cNvPr id="8" name="Text 5"/>
-          <p:cNvSpPr/>
-          <p:nvPr/>
-        </p:nvSpPr>
-        <p:spPr>
-          <a:xfrm>
-            <a:off x="786384" y="1572768"/>
-            <a:ext cx="3675888" cy="731520"/>
+          <p:cNvPr id="7" name="Text 5"/>
+          <p:cNvSpPr/>
+          <p:nvPr/>
+        </p:nvSpPr>
+        <p:spPr>
+          <a:xfrm>
+            <a:off x="804672" y="1609344"/>
+            <a:ext cx="3730752" cy="969264"/>
           </a:xfrm>
           <a:prstGeom prst="rect">
             <a:avLst/>
@@ -13094,7 +13052,7 @@
               <a:buNone/>
             </a:pPr>
             <a:r>
-              <a:rPr lang="en-US" sz="1150" dirty="0">
+              <a:rPr lang="en-US" sz="1200" dirty="0">
                 <a:solidFill>
                   <a:srgbClr val="173753"/>
                 </a:solidFill>
@@ -13104,10 +13062,34 @@
               </a:rPr>
               <a:t>Kemitraan strategis adalah kerja sama terencana antara satuan PAUD dan pihak lain untuk memenuhi kebutuhan esensial anak secara berkelanjutan.</a:t>
             </a:r>
-            <a:endParaRPr lang="en-US" sz="1150" dirty="0"/>
-          </a:p>
-        </p:txBody>
-      </p:sp>
+            <a:endParaRPr lang="en-US" sz="1200" dirty="0"/>
+          </a:p>
+        </p:txBody>
+      </p:sp>
+      <p:pic>
+        <p:nvPicPr>
+          <p:cNvPr id="8" name="Image 0" descr="preencoded.png">    </p:cNvPr>
+          <p:cNvPicPr>
+            <a:picLocks noChangeAspect="1"/>
+          </p:cNvPicPr>
+          <p:nvPr/>
+        </p:nvPicPr>
+        <p:blipFill>
+          <a:blip r:embed="rId1"/>
+          <a:stretch>
+            <a:fillRect/>
+          </a:stretch>
+        </p:blipFill>
+        <p:spPr>
+          <a:xfrm>
+            <a:off x="1527048" y="2798064"/>
+            <a:ext cx="2286000" cy="2286000"/>
+          </a:xfrm>
+          <a:prstGeom prst="rect">
+            <a:avLst/>
+          </a:prstGeom>
+        </p:spPr>
+      </p:pic>
       <p:sp>
         <p:nvSpPr>
           <p:cNvPr id="9" name="Shape 6"/>
@@ -13116,8 +13098,66 @@
         </p:nvSpPr>
         <p:spPr>
           <a:xfrm>
-            <a:off x="5029200" y="1499616"/>
-            <a:ext cx="6595567" cy="822960"/>
+            <a:off x="484632" y="4946904"/>
+            <a:ext cx="2564312" cy="1170432"/>
+          </a:xfrm>
+          <a:prstGeom prst="roundRect">
+            <a:avLst>
+              <a:gd name="adj" fmla="val 10938"/>
+            </a:avLst>
+          </a:prstGeom>
+          <a:solidFill>
+            <a:srgbClr val="FFFFFF"/>
+          </a:solidFill>
+          <a:ln w="12700">
+            <a:solidFill>
+              <a:srgbClr val="333333"/>
+            </a:solidFill>
+            <a:prstDash val="solid"/>
+          </a:ln>
+          <a:effectLst>
+            <a:outerShdw sx="100000" sy="100000" kx="0" ky="0" algn="bl" rotWithShape="0" blurRad="177800" dist="38100" dir="5400000">
+              <a:srgbClr val="0F3352">
+                <a:alpha val="10000"/>
+              </a:srgbClr>
+            </a:outerShdw>
+          </a:effectLst>
+        </p:spPr>
+      </p:sp>
+      <p:pic>
+        <p:nvPicPr>
+          <p:cNvPr id="10" name="Image 1" descr="preencoded.png">    </p:cNvPr>
+          <p:cNvPicPr>
+            <a:picLocks noChangeAspect="1"/>
+          </p:cNvPicPr>
+          <p:nvPr/>
+        </p:nvPicPr>
+        <p:blipFill>
+          <a:blip r:embed="rId2"/>
+          <a:stretch>
+            <a:fillRect/>
+          </a:stretch>
+        </p:blipFill>
+        <p:spPr>
+          <a:xfrm>
+            <a:off x="566928" y="5029200"/>
+            <a:ext cx="2399720" cy="1005840"/>
+          </a:xfrm>
+          <a:prstGeom prst="rect">
+            <a:avLst/>
+          </a:prstGeom>
+        </p:spPr>
+      </p:pic>
+      <p:sp>
+        <p:nvSpPr>
+          <p:cNvPr id="11" name="Shape 7"/>
+          <p:cNvSpPr/>
+          <p:nvPr/>
+        </p:nvSpPr>
+        <p:spPr>
+          <a:xfrm>
+            <a:off x="5120640" y="1499616"/>
+            <a:ext cx="6504127" cy="822960"/>
           </a:xfrm>
           <a:prstGeom prst="roundRect">
             <a:avLst>
@@ -13144,13 +13184,13 @@
       </p:sp>
       <p:sp>
         <p:nvSpPr>
-          <p:cNvPr id="10" name="Shape 7"/>
-          <p:cNvSpPr/>
-          <p:nvPr/>
-        </p:nvSpPr>
-        <p:spPr>
-          <a:xfrm>
-            <a:off x="5248656" y="1645920"/>
+          <p:cNvPr id="12" name="Shape 8"/>
+          <p:cNvSpPr/>
+          <p:nvPr/>
+        </p:nvSpPr>
+        <p:spPr>
+          <a:xfrm>
+            <a:off x="5340096" y="1645920"/>
             <a:ext cx="530352" cy="530352"/>
           </a:xfrm>
           <a:prstGeom prst="ellipse">
@@ -13171,21 +13211,21 @@
       </p:sp>
       <p:pic>
         <p:nvPicPr>
-          <p:cNvPr id="11" name="Image 1" descr="preencoded.png">    </p:cNvPr>
+          <p:cNvPr id="13" name="Image 2" descr="preencoded.png">    </p:cNvPr>
           <p:cNvPicPr>
             <a:picLocks noChangeAspect="1"/>
           </p:cNvPicPr>
           <p:nvPr/>
         </p:nvPicPr>
         <p:blipFill>
-          <a:blip r:embed="rId2"/>
+          <a:blip r:embed="rId3"/>
           <a:stretch>
             <a:fillRect/>
           </a:stretch>
         </p:blipFill>
         <p:spPr>
           <a:xfrm>
-            <a:off x="5375940" y="1773204"/>
+            <a:off x="5467380" y="1773204"/>
             <a:ext cx="275783" cy="275783"/>
           </a:xfrm>
           <a:prstGeom prst="rect">
@@ -13195,13 +13235,13 @@
       </p:pic>
       <p:sp>
         <p:nvSpPr>
-          <p:cNvPr id="12" name="Text 8"/>
-          <p:cNvSpPr/>
-          <p:nvPr/>
-        </p:nvSpPr>
-        <p:spPr>
-          <a:xfrm>
-            <a:off x="5925312" y="1627632"/>
+          <p:cNvPr id="14" name="Text 9"/>
+          <p:cNvSpPr/>
+          <p:nvPr/>
+        </p:nvSpPr>
+        <p:spPr>
+          <a:xfrm>
+            <a:off x="6016752" y="1627632"/>
             <a:ext cx="2011680" cy="292608"/>
           </a:xfrm>
           <a:prstGeom prst="rect">
@@ -13234,14 +13274,14 @@
       </p:sp>
       <p:sp>
         <p:nvSpPr>
-          <p:cNvPr id="13" name="Text 9"/>
-          <p:cNvSpPr/>
-          <p:nvPr/>
-        </p:nvSpPr>
-        <p:spPr>
-          <a:xfrm>
-            <a:off x="7863840" y="1627632"/>
-            <a:ext cx="3200400" cy="603504"/>
+          <p:cNvPr id="15" name="Text 10"/>
+          <p:cNvSpPr/>
+          <p:nvPr/>
+        </p:nvSpPr>
+        <p:spPr>
+          <a:xfrm>
+            <a:off x="7955280" y="1627632"/>
+            <a:ext cx="3108960" cy="603504"/>
           </a:xfrm>
           <a:prstGeom prst="rect">
             <a:avLst/>
@@ -13273,14 +13313,14 @@
       </p:sp>
       <p:sp>
         <p:nvSpPr>
-          <p:cNvPr id="14" name="Shape 10"/>
-          <p:cNvSpPr/>
-          <p:nvPr/>
-        </p:nvSpPr>
-        <p:spPr>
-          <a:xfrm>
-            <a:off x="5029200" y="2404872"/>
-            <a:ext cx="6595567" cy="822960"/>
+          <p:cNvPr id="16" name="Shape 11"/>
+          <p:cNvSpPr/>
+          <p:nvPr/>
+        </p:nvSpPr>
+        <p:spPr>
+          <a:xfrm>
+            <a:off x="5120640" y="2404872"/>
+            <a:ext cx="6504127" cy="822960"/>
           </a:xfrm>
           <a:prstGeom prst="roundRect">
             <a:avLst>
@@ -13307,13 +13347,13 @@
       </p:sp>
       <p:sp>
         <p:nvSpPr>
-          <p:cNvPr id="15" name="Shape 11"/>
-          <p:cNvSpPr/>
-          <p:nvPr/>
-        </p:nvSpPr>
-        <p:spPr>
-          <a:xfrm>
-            <a:off x="5248656" y="2551176"/>
+          <p:cNvPr id="17" name="Shape 12"/>
+          <p:cNvSpPr/>
+          <p:nvPr/>
+        </p:nvSpPr>
+        <p:spPr>
+          <a:xfrm>
+            <a:off x="5340096" y="2551176"/>
             <a:ext cx="530352" cy="530352"/>
           </a:xfrm>
           <a:prstGeom prst="ellipse">
@@ -13334,21 +13374,21 @@
       </p:sp>
       <p:pic>
         <p:nvPicPr>
-          <p:cNvPr id="16" name="Image 2" descr="preencoded.png">    </p:cNvPr>
+          <p:cNvPr id="18" name="Image 3" descr="preencoded.png">    </p:cNvPr>
           <p:cNvPicPr>
             <a:picLocks noChangeAspect="1"/>
           </p:cNvPicPr>
           <p:nvPr/>
         </p:nvPicPr>
         <p:blipFill>
-          <a:blip r:embed="rId3"/>
+          <a:blip r:embed="rId4"/>
           <a:stretch>
             <a:fillRect/>
           </a:stretch>
         </p:blipFill>
         <p:spPr>
           <a:xfrm>
-            <a:off x="5375940" y="2678460"/>
+            <a:off x="5467380" y="2678460"/>
             <a:ext cx="275783" cy="275783"/>
           </a:xfrm>
           <a:prstGeom prst="rect">
@@ -13358,13 +13398,13 @@
       </p:pic>
       <p:sp>
         <p:nvSpPr>
-          <p:cNvPr id="17" name="Text 12"/>
-          <p:cNvSpPr/>
-          <p:nvPr/>
-        </p:nvSpPr>
-        <p:spPr>
-          <a:xfrm>
-            <a:off x="5925312" y="2532888"/>
+          <p:cNvPr id="19" name="Text 13"/>
+          <p:cNvSpPr/>
+          <p:nvPr/>
+        </p:nvSpPr>
+        <p:spPr>
+          <a:xfrm>
+            <a:off x="6016752" y="2532888"/>
             <a:ext cx="2011680" cy="292608"/>
           </a:xfrm>
           <a:prstGeom prst="rect">
@@ -13397,14 +13437,14 @@
       </p:sp>
       <p:sp>
         <p:nvSpPr>
-          <p:cNvPr id="18" name="Text 13"/>
-          <p:cNvSpPr/>
-          <p:nvPr/>
-        </p:nvSpPr>
-        <p:spPr>
-          <a:xfrm>
-            <a:off x="7863840" y="2532888"/>
-            <a:ext cx="3200400" cy="603504"/>
+          <p:cNvPr id="20" name="Text 14"/>
+          <p:cNvSpPr/>
+          <p:nvPr/>
+        </p:nvSpPr>
+        <p:spPr>
+          <a:xfrm>
+            <a:off x="7955280" y="2532888"/>
+            <a:ext cx="3108960" cy="603504"/>
           </a:xfrm>
           <a:prstGeom prst="rect">
             <a:avLst/>
@@ -13436,14 +13476,14 @@
       </p:sp>
       <p:sp>
         <p:nvSpPr>
-          <p:cNvPr id="19" name="Shape 14"/>
-          <p:cNvSpPr/>
-          <p:nvPr/>
-        </p:nvSpPr>
-        <p:spPr>
-          <a:xfrm>
-            <a:off x="5029200" y="3310128"/>
-            <a:ext cx="6595567" cy="822960"/>
+          <p:cNvPr id="21" name="Shape 15"/>
+          <p:cNvSpPr/>
+          <p:nvPr/>
+        </p:nvSpPr>
+        <p:spPr>
+          <a:xfrm>
+            <a:off x="5120640" y="3310128"/>
+            <a:ext cx="6504127" cy="822960"/>
           </a:xfrm>
           <a:prstGeom prst="roundRect">
             <a:avLst>
@@ -13470,13 +13510,13 @@
       </p:sp>
       <p:sp>
         <p:nvSpPr>
-          <p:cNvPr id="20" name="Shape 15"/>
-          <p:cNvSpPr/>
-          <p:nvPr/>
-        </p:nvSpPr>
-        <p:spPr>
-          <a:xfrm>
-            <a:off x="5248656" y="3456432"/>
+          <p:cNvPr id="22" name="Shape 16"/>
+          <p:cNvSpPr/>
+          <p:nvPr/>
+        </p:nvSpPr>
+        <p:spPr>
+          <a:xfrm>
+            <a:off x="5340096" y="3456432"/>
             <a:ext cx="530352" cy="530352"/>
           </a:xfrm>
           <a:prstGeom prst="ellipse">
@@ -13497,21 +13537,21 @@
       </p:sp>
       <p:pic>
         <p:nvPicPr>
-          <p:cNvPr id="21" name="Image 3" descr="preencoded.png">    </p:cNvPr>
+          <p:cNvPr id="23" name="Image 4" descr="preencoded.png">    </p:cNvPr>
           <p:cNvPicPr>
             <a:picLocks noChangeAspect="1"/>
           </p:cNvPicPr>
           <p:nvPr/>
         </p:nvPicPr>
         <p:blipFill>
-          <a:blip r:embed="rId4"/>
+          <a:blip r:embed="rId5"/>
           <a:stretch>
             <a:fillRect/>
           </a:stretch>
         </p:blipFill>
         <p:spPr>
           <a:xfrm>
-            <a:off x="5375940" y="3583716"/>
+            <a:off x="5467380" y="3583716"/>
             <a:ext cx="275783" cy="275783"/>
           </a:xfrm>
           <a:prstGeom prst="rect">
@@ -13521,13 +13561,13 @@
       </p:pic>
       <p:sp>
         <p:nvSpPr>
-          <p:cNvPr id="22" name="Text 16"/>
-          <p:cNvSpPr/>
-          <p:nvPr/>
-        </p:nvSpPr>
-        <p:spPr>
-          <a:xfrm>
-            <a:off x="5925312" y="3438144"/>
+          <p:cNvPr id="24" name="Text 17"/>
+          <p:cNvSpPr/>
+          <p:nvPr/>
+        </p:nvSpPr>
+        <p:spPr>
+          <a:xfrm>
+            <a:off x="6016752" y="3438144"/>
             <a:ext cx="2011680" cy="292608"/>
           </a:xfrm>
           <a:prstGeom prst="rect">
@@ -13560,14 +13600,14 @@
       </p:sp>
       <p:sp>
         <p:nvSpPr>
-          <p:cNvPr id="23" name="Text 17"/>
-          <p:cNvSpPr/>
-          <p:nvPr/>
-        </p:nvSpPr>
-        <p:spPr>
-          <a:xfrm>
-            <a:off x="7863840" y="3438144"/>
-            <a:ext cx="3200400" cy="603504"/>
+          <p:cNvPr id="25" name="Text 18"/>
+          <p:cNvSpPr/>
+          <p:nvPr/>
+        </p:nvSpPr>
+        <p:spPr>
+          <a:xfrm>
+            <a:off x="7955280" y="3438144"/>
+            <a:ext cx="3108960" cy="603504"/>
           </a:xfrm>
           <a:prstGeom prst="rect">
             <a:avLst/>
@@ -13599,14 +13639,14 @@
       </p:sp>
       <p:sp>
         <p:nvSpPr>
-          <p:cNvPr id="24" name="Shape 18"/>
-          <p:cNvSpPr/>
-          <p:nvPr/>
-        </p:nvSpPr>
-        <p:spPr>
-          <a:xfrm>
-            <a:off x="5029200" y="4215384"/>
-            <a:ext cx="6595567" cy="822960"/>
+          <p:cNvPr id="26" name="Shape 19"/>
+          <p:cNvSpPr/>
+          <p:nvPr/>
+        </p:nvSpPr>
+        <p:spPr>
+          <a:xfrm>
+            <a:off x="5120640" y="4215384"/>
+            <a:ext cx="6504127" cy="822960"/>
           </a:xfrm>
           <a:prstGeom prst="roundRect">
             <a:avLst>
@@ -13633,13 +13673,13 @@
       </p:sp>
       <p:sp>
         <p:nvSpPr>
-          <p:cNvPr id="25" name="Shape 19"/>
-          <p:cNvSpPr/>
-          <p:nvPr/>
-        </p:nvSpPr>
-        <p:spPr>
-          <a:xfrm>
-            <a:off x="5248656" y="4361688"/>
+          <p:cNvPr id="27" name="Shape 20"/>
+          <p:cNvSpPr/>
+          <p:nvPr/>
+        </p:nvSpPr>
+        <p:spPr>
+          <a:xfrm>
+            <a:off x="5340096" y="4361688"/>
             <a:ext cx="530352" cy="530352"/>
           </a:xfrm>
           <a:prstGeom prst="ellipse">
@@ -13660,21 +13700,21 @@
       </p:sp>
       <p:pic>
         <p:nvPicPr>
-          <p:cNvPr id="26" name="Image 4" descr="preencoded.png">    </p:cNvPr>
+          <p:cNvPr id="28" name="Image 5" descr="preencoded.png">    </p:cNvPr>
           <p:cNvPicPr>
             <a:picLocks noChangeAspect="1"/>
           </p:cNvPicPr>
           <p:nvPr/>
         </p:nvPicPr>
         <p:blipFill>
-          <a:blip r:embed="rId5"/>
+          <a:blip r:embed="rId6"/>
           <a:stretch>
             <a:fillRect/>
           </a:stretch>
         </p:blipFill>
         <p:spPr>
           <a:xfrm>
-            <a:off x="5375940" y="4488972"/>
+            <a:off x="5467380" y="4488972"/>
             <a:ext cx="275783" cy="275783"/>
           </a:xfrm>
           <a:prstGeom prst="rect">
@@ -13684,13 +13724,13 @@
       </p:pic>
       <p:sp>
         <p:nvSpPr>
-          <p:cNvPr id="27" name="Text 20"/>
-          <p:cNvSpPr/>
-          <p:nvPr/>
-        </p:nvSpPr>
-        <p:spPr>
-          <a:xfrm>
-            <a:off x="5925312" y="4343400"/>
+          <p:cNvPr id="29" name="Text 21"/>
+          <p:cNvSpPr/>
+          <p:nvPr/>
+        </p:nvSpPr>
+        <p:spPr>
+          <a:xfrm>
+            <a:off x="6016752" y="4343400"/>
             <a:ext cx="2011680" cy="292608"/>
           </a:xfrm>
           <a:prstGeom prst="rect">
@@ -13723,14 +13763,14 @@
       </p:sp>
       <p:sp>
         <p:nvSpPr>
-          <p:cNvPr id="28" name="Text 21"/>
-          <p:cNvSpPr/>
-          <p:nvPr/>
-        </p:nvSpPr>
-        <p:spPr>
-          <a:xfrm>
-            <a:off x="7863840" y="4343400"/>
-            <a:ext cx="3200400" cy="603504"/>
+          <p:cNvPr id="30" name="Text 22"/>
+          <p:cNvSpPr/>
+          <p:nvPr/>
+        </p:nvSpPr>
+        <p:spPr>
+          <a:xfrm>
+            <a:off x="7955280" y="4343400"/>
+            <a:ext cx="3108960" cy="603504"/>
           </a:xfrm>
           <a:prstGeom prst="rect">
             <a:avLst/>
@@ -13762,14 +13802,14 @@
       </p:sp>
       <p:sp>
         <p:nvSpPr>
-          <p:cNvPr id="29" name="Shape 22"/>
-          <p:cNvSpPr/>
-          <p:nvPr/>
-        </p:nvSpPr>
-        <p:spPr>
-          <a:xfrm>
-            <a:off x="5029200" y="5120640"/>
-            <a:ext cx="6595567" cy="822960"/>
+          <p:cNvPr id="31" name="Shape 23"/>
+          <p:cNvSpPr/>
+          <p:nvPr/>
+        </p:nvSpPr>
+        <p:spPr>
+          <a:xfrm>
+            <a:off x="5120640" y="5120640"/>
+            <a:ext cx="6504127" cy="822960"/>
           </a:xfrm>
           <a:prstGeom prst="roundRect">
             <a:avLst>
@@ -13796,13 +13836,13 @@
       </p:sp>
       <p:sp>
         <p:nvSpPr>
-          <p:cNvPr id="30" name="Shape 23"/>
-          <p:cNvSpPr/>
-          <p:nvPr/>
-        </p:nvSpPr>
-        <p:spPr>
-          <a:xfrm>
-            <a:off x="5248656" y="5266944"/>
+          <p:cNvPr id="32" name="Shape 24"/>
+          <p:cNvSpPr/>
+          <p:nvPr/>
+        </p:nvSpPr>
+        <p:spPr>
+          <a:xfrm>
+            <a:off x="5340096" y="5266944"/>
             <a:ext cx="530352" cy="530352"/>
           </a:xfrm>
           <a:prstGeom prst="ellipse">
@@ -13823,21 +13863,21 @@
       </p:sp>
       <p:pic>
         <p:nvPicPr>
-          <p:cNvPr id="31" name="Image 5" descr="preencoded.png">    </p:cNvPr>
+          <p:cNvPr id="33" name="Image 6" descr="preencoded.png">    </p:cNvPr>
           <p:cNvPicPr>
             <a:picLocks noChangeAspect="1"/>
           </p:cNvPicPr>
           <p:nvPr/>
         </p:nvPicPr>
         <p:blipFill>
-          <a:blip r:embed="rId6"/>
+          <a:blip r:embed="rId7"/>
           <a:stretch>
             <a:fillRect/>
           </a:stretch>
         </p:blipFill>
         <p:spPr>
           <a:xfrm>
-            <a:off x="5375940" y="5394228"/>
+            <a:off x="5467380" y="5394228"/>
             <a:ext cx="275783" cy="275783"/>
           </a:xfrm>
           <a:prstGeom prst="rect">
@@ -13847,13 +13887,13 @@
       </p:pic>
       <p:sp>
         <p:nvSpPr>
-          <p:cNvPr id="32" name="Text 24"/>
-          <p:cNvSpPr/>
-          <p:nvPr/>
-        </p:nvSpPr>
-        <p:spPr>
-          <a:xfrm>
-            <a:off x="5925312" y="5248656"/>
+          <p:cNvPr id="34" name="Text 25"/>
+          <p:cNvSpPr/>
+          <p:nvPr/>
+        </p:nvSpPr>
+        <p:spPr>
+          <a:xfrm>
+            <a:off x="6016752" y="5248656"/>
             <a:ext cx="2011680" cy="292608"/>
           </a:xfrm>
           <a:prstGeom prst="rect">
@@ -13886,14 +13926,14 @@
       </p:sp>
       <p:sp>
         <p:nvSpPr>
-          <p:cNvPr id="33" name="Text 25"/>
-          <p:cNvSpPr/>
-          <p:nvPr/>
-        </p:nvSpPr>
-        <p:spPr>
-          <a:xfrm>
-            <a:off x="7863840" y="5248656"/>
-            <a:ext cx="3200400" cy="603504"/>
+          <p:cNvPr id="35" name="Text 26"/>
+          <p:cNvSpPr/>
+          <p:nvPr/>
+        </p:nvSpPr>
+        <p:spPr>
+          <a:xfrm>
+            <a:off x="7955280" y="5248656"/>
+            <a:ext cx="3108960" cy="603504"/>
           </a:xfrm>
           <a:prstGeom prst="rect">
             <a:avLst/>
@@ -13925,7 +13965,7 @@
       </p:sp>
       <p:sp>
         <p:nvSpPr>
-          <p:cNvPr id="34" name="Text 26"/>
+          <p:cNvPr id="36" name="Text 27"/>
           <p:cNvSpPr/>
           <p:nvPr/>
         </p:nvSpPr>
@@ -13964,7 +14004,7 @@
       </p:sp>
       <p:sp>
         <p:nvSpPr>
-          <p:cNvPr id="35" name="Text 27"/>
+          <p:cNvPr id="37" name="Text 28"/>
           <p:cNvSpPr/>
           <p:nvPr/>
         </p:nvSpPr>
@@ -14155,43 +14195,40 @@
           </a:p>
         </p:txBody>
       </p:sp>
-      <p:sp>
-        <p:nvSpPr>
-          <p:cNvPr id="6" name="Shape 4"/>
-          <p:cNvSpPr/>
-          <p:nvPr/>
-        </p:nvSpPr>
-        <p:spPr>
-          <a:xfrm>
-            <a:off x="4297680" y="1508760"/>
-            <a:ext cx="4572000" cy="4572000"/>
-          </a:xfrm>
-          <a:prstGeom prst="ellipse">
-            <a:avLst/>
-          </a:prstGeom>
-          <a:solidFill>
-            <a:srgbClr val="DCEDFB">
-              <a:alpha val="45000"/>
-            </a:srgbClr>
-          </a:solidFill>
-          <a:ln w="12700">
-            <a:solidFill>
-              <a:srgbClr val="333333"/>
-            </a:solidFill>
-            <a:prstDash val="solid"/>
-          </a:ln>
-        </p:spPr>
-      </p:sp>
-      <p:sp>
-        <p:nvSpPr>
-          <p:cNvPr id="7" name="Shape 5"/>
-          <p:cNvSpPr/>
-          <p:nvPr/>
-        </p:nvSpPr>
-        <p:spPr>
-          <a:xfrm>
-            <a:off x="5650992" y="2862072"/>
-            <a:ext cx="1865376" cy="1865376"/>
+      <p:pic>
+        <p:nvPicPr>
+          <p:cNvPr id="6" name="Image 0" descr="preencoded.png">    </p:cNvPr>
+          <p:cNvPicPr>
+            <a:picLocks noChangeAspect="1"/>
+          </p:cNvPicPr>
+          <p:nvPr/>
+        </p:nvPicPr>
+        <p:blipFill>
+          <a:blip r:embed="rId1"/>
+          <a:stretch>
+            <a:fillRect/>
+          </a:stretch>
+        </p:blipFill>
+        <p:spPr>
+          <a:xfrm>
+            <a:off x="4615670" y="1828800"/>
+            <a:ext cx="3936020" cy="3931920"/>
+          </a:xfrm>
+          <a:prstGeom prst="rect">
+            <a:avLst/>
+          </a:prstGeom>
+        </p:spPr>
+      </p:pic>
+      <p:sp>
+        <p:nvSpPr>
+          <p:cNvPr id="7" name="Shape 4"/>
+          <p:cNvSpPr/>
+          <p:nvPr/>
+        </p:nvSpPr>
+        <p:spPr>
+          <a:xfrm>
+            <a:off x="5742432" y="2953512"/>
+            <a:ext cx="1682496" cy="1682496"/>
           </a:xfrm>
           <a:prstGeom prst="ellipse">
             <a:avLst/>
@@ -14216,14 +14253,14 @@
       </p:sp>
       <p:sp>
         <p:nvSpPr>
-          <p:cNvPr id="8" name="Text 6"/>
-          <p:cNvSpPr/>
-          <p:nvPr/>
-        </p:nvSpPr>
-        <p:spPr>
-          <a:xfrm>
-            <a:off x="5669280" y="3410712"/>
-            <a:ext cx="1828800" cy="822960"/>
+          <p:cNvPr id="8" name="Text 5"/>
+          <p:cNvSpPr/>
+          <p:nvPr/>
+        </p:nvSpPr>
+        <p:spPr>
+          <a:xfrm>
+            <a:off x="5760720" y="3410712"/>
+            <a:ext cx="1645920" cy="822960"/>
           </a:xfrm>
           <a:prstGeom prst="rect">
             <a:avLst/>
@@ -14239,7 +14276,7 @@
               <a:buNone/>
             </a:pPr>
             <a:r>
-              <a:rPr lang="en-US" sz="1700" b="1" dirty="0">
+              <a:rPr lang="en-US" sz="1600" b="1" dirty="0">
                 <a:solidFill>
                   <a:srgbClr val="FFFFFF"/>
                 </a:solidFill>
@@ -14249,14 +14286,14 @@
               </a:rPr>
               <a:t>SATUAN</a:t>
             </a:r>
-            <a:endParaRPr lang="en-US" sz="1700" dirty="0"/>
+            <a:endParaRPr lang="en-US" sz="1600" dirty="0"/>
           </a:p>
           <a:p>
             <a:pPr algn="ctr" indent="0" marL="0">
               <a:buNone/>
             </a:pPr>
             <a:r>
-              <a:rPr lang="en-US" sz="1700" b="1" dirty="0">
+              <a:rPr lang="en-US" sz="1600" b="1" dirty="0">
                 <a:solidFill>
                   <a:srgbClr val="FFFFFF"/>
                 </a:solidFill>
@@ -14266,41 +14303,19 @@
               </a:rPr>
               <a:t>PAUD</a:t>
             </a:r>
-            <a:endParaRPr lang="en-US" sz="1700" dirty="0"/>
-          </a:p>
-        </p:txBody>
-      </p:sp>
-      <p:sp>
-        <p:nvSpPr>
-          <p:cNvPr id="9" name="Shape 7"/>
-          <p:cNvSpPr/>
-          <p:nvPr/>
-        </p:nvSpPr>
-        <p:spPr>
-          <a:xfrm>
-            <a:off x="3017520" y="1783080"/>
-            <a:ext cx="7132320" cy="4023360"/>
-          </a:xfrm>
-          <a:prstGeom prst="ellipse">
-            <a:avLst/>
-          </a:prstGeom>
-          <a:ln w="22225">
-            <a:solidFill>
-              <a:srgbClr val="B9DBF6"/>
-            </a:solidFill>
-            <a:prstDash val="sysDash"/>
-          </a:ln>
-        </p:spPr>
-      </p:sp>
-      <p:sp>
-        <p:nvSpPr>
-          <p:cNvPr id="10" name="Shape 8"/>
-          <p:cNvSpPr/>
-          <p:nvPr/>
-        </p:nvSpPr>
-        <p:spPr>
-          <a:xfrm>
-            <a:off x="5513832" y="1499616"/>
+            <a:endParaRPr lang="en-US" sz="1600" dirty="0"/>
+          </a:p>
+        </p:txBody>
+      </p:sp>
+      <p:sp>
+        <p:nvSpPr>
+          <p:cNvPr id="9" name="Shape 6"/>
+          <p:cNvSpPr/>
+          <p:nvPr/>
+        </p:nvSpPr>
+        <p:spPr>
+          <a:xfrm>
+            <a:off x="5513832" y="1426464"/>
             <a:ext cx="2139696" cy="566928"/>
           </a:xfrm>
           <a:prstGeom prst="roundRect">
@@ -14328,13 +14343,13 @@
       </p:sp>
       <p:sp>
         <p:nvSpPr>
-          <p:cNvPr id="11" name="Shape 9"/>
-          <p:cNvSpPr/>
-          <p:nvPr/>
-        </p:nvSpPr>
-        <p:spPr>
-          <a:xfrm>
-            <a:off x="5586984" y="1572768"/>
+          <p:cNvPr id="10" name="Shape 7"/>
+          <p:cNvSpPr/>
+          <p:nvPr/>
+        </p:nvSpPr>
+        <p:spPr>
+          <a:xfrm>
+            <a:off x="5586984" y="1499616"/>
             <a:ext cx="420624" cy="420624"/>
           </a:xfrm>
           <a:prstGeom prst="ellipse">
@@ -14348,21 +14363,21 @@
       </p:sp>
       <p:pic>
         <p:nvPicPr>
-          <p:cNvPr id="12" name="Image 0" descr="preencoded.png">    </p:cNvPr>
+          <p:cNvPr id="11" name="Image 1" descr="preencoded.png">    </p:cNvPr>
           <p:cNvPicPr>
             <a:picLocks noChangeAspect="1"/>
           </p:cNvPicPr>
           <p:nvPr/>
         </p:nvPicPr>
         <p:blipFill>
-          <a:blip r:embed="rId1"/>
+          <a:blip r:embed="rId2"/>
           <a:stretch>
             <a:fillRect/>
           </a:stretch>
         </p:blipFill>
         <p:spPr>
           <a:xfrm>
-            <a:off x="5687568" y="1673352"/>
+            <a:off x="5687568" y="1600200"/>
             <a:ext cx="219456" cy="219456"/>
           </a:xfrm>
           <a:prstGeom prst="rect">
@@ -14372,13 +14387,13 @@
       </p:pic>
       <p:sp>
         <p:nvSpPr>
-          <p:cNvPr id="13" name="Text 10"/>
-          <p:cNvSpPr/>
-          <p:nvPr/>
-        </p:nvSpPr>
-        <p:spPr>
-          <a:xfrm>
-            <a:off x="6062472" y="1536192"/>
+          <p:cNvPr id="12" name="Text 8"/>
+          <p:cNvSpPr/>
+          <p:nvPr/>
+        </p:nvSpPr>
+        <p:spPr>
+          <a:xfrm>
+            <a:off x="6062472" y="1463040"/>
             <a:ext cx="1517904" cy="493776"/>
           </a:xfrm>
           <a:prstGeom prst="rect">
@@ -14411,13 +14426,13 @@
       </p:sp>
       <p:sp>
         <p:nvSpPr>
-          <p:cNvPr id="14" name="Shape 11"/>
-          <p:cNvSpPr/>
-          <p:nvPr/>
-        </p:nvSpPr>
-        <p:spPr>
-          <a:xfrm>
-            <a:off x="8035488" y="2088823"/>
+          <p:cNvPr id="13" name="Shape 9"/>
+          <p:cNvSpPr/>
+          <p:nvPr/>
+        </p:nvSpPr>
+        <p:spPr>
+          <a:xfrm>
+            <a:off x="8100146" y="2037097"/>
             <a:ext cx="2139696" cy="566928"/>
           </a:xfrm>
           <a:prstGeom prst="roundRect">
@@ -14445,13 +14460,13 @@
       </p:sp>
       <p:sp>
         <p:nvSpPr>
-          <p:cNvPr id="15" name="Shape 12"/>
-          <p:cNvSpPr/>
-          <p:nvPr/>
-        </p:nvSpPr>
-        <p:spPr>
-          <a:xfrm>
-            <a:off x="8108640" y="2161975"/>
+          <p:cNvPr id="14" name="Shape 10"/>
+          <p:cNvSpPr/>
+          <p:nvPr/>
+        </p:nvSpPr>
+        <p:spPr>
+          <a:xfrm>
+            <a:off x="8173298" y="2110249"/>
             <a:ext cx="420624" cy="420624"/>
           </a:xfrm>
           <a:prstGeom prst="ellipse">
@@ -14465,21 +14480,21 @@
       </p:sp>
       <p:pic>
         <p:nvPicPr>
-          <p:cNvPr id="16" name="Image 1" descr="preencoded.png">    </p:cNvPr>
+          <p:cNvPr id="15" name="Image 2" descr="preencoded.png">    </p:cNvPr>
           <p:cNvPicPr>
             <a:picLocks noChangeAspect="1"/>
           </p:cNvPicPr>
           <p:nvPr/>
         </p:nvPicPr>
         <p:blipFill>
-          <a:blip r:embed="rId2"/>
+          <a:blip r:embed="rId3"/>
           <a:stretch>
             <a:fillRect/>
           </a:stretch>
         </p:blipFill>
         <p:spPr>
           <a:xfrm>
-            <a:off x="8209224" y="2262559"/>
+            <a:off x="8273882" y="2210833"/>
             <a:ext cx="219456" cy="219456"/>
           </a:xfrm>
           <a:prstGeom prst="rect">
@@ -14489,13 +14504,13 @@
       </p:pic>
       <p:sp>
         <p:nvSpPr>
-          <p:cNvPr id="17" name="Text 13"/>
-          <p:cNvSpPr/>
-          <p:nvPr/>
-        </p:nvSpPr>
-        <p:spPr>
-          <a:xfrm>
-            <a:off x="8584128" y="2125399"/>
+          <p:cNvPr id="16" name="Text 11"/>
+          <p:cNvSpPr/>
+          <p:nvPr/>
+        </p:nvSpPr>
+        <p:spPr>
+          <a:xfrm>
+            <a:off x="8648786" y="2073673"/>
             <a:ext cx="1517904" cy="493776"/>
           </a:xfrm>
           <a:prstGeom prst="rect">
@@ -14528,13 +14543,13 @@
       </p:sp>
       <p:sp>
         <p:nvSpPr>
-          <p:cNvPr id="18" name="Shape 14"/>
-          <p:cNvSpPr/>
-          <p:nvPr/>
-        </p:nvSpPr>
-        <p:spPr>
-          <a:xfrm>
-            <a:off x="9079992" y="3511296"/>
+          <p:cNvPr id="17" name="Shape 12"/>
+          <p:cNvSpPr/>
+          <p:nvPr/>
+        </p:nvSpPr>
+        <p:spPr>
+          <a:xfrm>
+            <a:off x="9171432" y="3511296"/>
             <a:ext cx="2139696" cy="566928"/>
           </a:xfrm>
           <a:prstGeom prst="roundRect">
@@ -14562,13 +14577,13 @@
       </p:sp>
       <p:sp>
         <p:nvSpPr>
-          <p:cNvPr id="19" name="Shape 15"/>
-          <p:cNvSpPr/>
-          <p:nvPr/>
-        </p:nvSpPr>
-        <p:spPr>
-          <a:xfrm>
-            <a:off x="9153144" y="3584448"/>
+          <p:cNvPr id="18" name="Shape 13"/>
+          <p:cNvSpPr/>
+          <p:nvPr/>
+        </p:nvSpPr>
+        <p:spPr>
+          <a:xfrm>
+            <a:off x="9244584" y="3584448"/>
             <a:ext cx="420624" cy="420624"/>
           </a:xfrm>
           <a:prstGeom prst="ellipse">
@@ -14582,21 +14597,21 @@
       </p:sp>
       <p:pic>
         <p:nvPicPr>
-          <p:cNvPr id="20" name="Image 2" descr="preencoded.png">    </p:cNvPr>
+          <p:cNvPr id="19" name="Image 3" descr="preencoded.png">    </p:cNvPr>
           <p:cNvPicPr>
             <a:picLocks noChangeAspect="1"/>
           </p:cNvPicPr>
           <p:nvPr/>
         </p:nvPicPr>
         <p:blipFill>
-          <a:blip r:embed="rId3"/>
+          <a:blip r:embed="rId4"/>
           <a:stretch>
             <a:fillRect/>
           </a:stretch>
         </p:blipFill>
         <p:spPr>
           <a:xfrm>
-            <a:off x="9253728" y="3685032"/>
+            <a:off x="9345168" y="3685032"/>
             <a:ext cx="219456" cy="219456"/>
           </a:xfrm>
           <a:prstGeom prst="rect">
@@ -14606,13 +14621,13 @@
       </p:pic>
       <p:sp>
         <p:nvSpPr>
-          <p:cNvPr id="21" name="Text 16"/>
-          <p:cNvSpPr/>
-          <p:nvPr/>
-        </p:nvSpPr>
-        <p:spPr>
-          <a:xfrm>
-            <a:off x="9628632" y="3547872"/>
+          <p:cNvPr id="20" name="Text 14"/>
+          <p:cNvSpPr/>
+          <p:nvPr/>
+        </p:nvSpPr>
+        <p:spPr>
+          <a:xfrm>
+            <a:off x="9720072" y="3547872"/>
             <a:ext cx="1517904" cy="493776"/>
           </a:xfrm>
           <a:prstGeom prst="rect">
@@ -14645,13 +14660,13 @@
       </p:sp>
       <p:sp>
         <p:nvSpPr>
-          <p:cNvPr id="22" name="Shape 17"/>
-          <p:cNvSpPr/>
-          <p:nvPr/>
-        </p:nvSpPr>
-        <p:spPr>
-          <a:xfrm>
-            <a:off x="8035488" y="4933769"/>
+          <p:cNvPr id="21" name="Shape 15"/>
+          <p:cNvSpPr/>
+          <p:nvPr/>
+        </p:nvSpPr>
+        <p:spPr>
+          <a:xfrm>
+            <a:off x="8100146" y="4985495"/>
             <a:ext cx="2139696" cy="566928"/>
           </a:xfrm>
           <a:prstGeom prst="roundRect">
@@ -14679,13 +14694,13 @@
       </p:sp>
       <p:sp>
         <p:nvSpPr>
-          <p:cNvPr id="23" name="Shape 18"/>
-          <p:cNvSpPr/>
-          <p:nvPr/>
-        </p:nvSpPr>
-        <p:spPr>
-          <a:xfrm>
-            <a:off x="8108640" y="5006921"/>
+          <p:cNvPr id="22" name="Shape 16"/>
+          <p:cNvSpPr/>
+          <p:nvPr/>
+        </p:nvSpPr>
+        <p:spPr>
+          <a:xfrm>
+            <a:off x="8173298" y="5058647"/>
             <a:ext cx="420624" cy="420624"/>
           </a:xfrm>
           <a:prstGeom prst="ellipse">
@@ -14699,21 +14714,21 @@
       </p:sp>
       <p:pic>
         <p:nvPicPr>
-          <p:cNvPr id="24" name="Image 3" descr="preencoded.png">    </p:cNvPr>
+          <p:cNvPr id="23" name="Image 4" descr="preencoded.png">    </p:cNvPr>
           <p:cNvPicPr>
             <a:picLocks noChangeAspect="1"/>
           </p:cNvPicPr>
           <p:nvPr/>
         </p:nvPicPr>
         <p:blipFill>
-          <a:blip r:embed="rId4"/>
+          <a:blip r:embed="rId5"/>
           <a:stretch>
             <a:fillRect/>
           </a:stretch>
         </p:blipFill>
         <p:spPr>
           <a:xfrm>
-            <a:off x="8209224" y="5107505"/>
+            <a:off x="8273882" y="5159231"/>
             <a:ext cx="219456" cy="219456"/>
           </a:xfrm>
           <a:prstGeom prst="rect">
@@ -14723,13 +14738,13 @@
       </p:pic>
       <p:sp>
         <p:nvSpPr>
-          <p:cNvPr id="25" name="Text 19"/>
-          <p:cNvSpPr/>
-          <p:nvPr/>
-        </p:nvSpPr>
-        <p:spPr>
-          <a:xfrm>
-            <a:off x="8584128" y="4970345"/>
+          <p:cNvPr id="24" name="Text 17"/>
+          <p:cNvSpPr/>
+          <p:nvPr/>
+        </p:nvSpPr>
+        <p:spPr>
+          <a:xfrm>
+            <a:off x="8648786" y="5022071"/>
             <a:ext cx="1517904" cy="493776"/>
           </a:xfrm>
           <a:prstGeom prst="rect">
@@ -14762,13 +14777,13 @@
       </p:sp>
       <p:sp>
         <p:nvSpPr>
-          <p:cNvPr id="26" name="Shape 20"/>
-          <p:cNvSpPr/>
-          <p:nvPr/>
-        </p:nvSpPr>
-        <p:spPr>
-          <a:xfrm>
-            <a:off x="5513832" y="5522976"/>
+          <p:cNvPr id="25" name="Shape 18"/>
+          <p:cNvSpPr/>
+          <p:nvPr/>
+        </p:nvSpPr>
+        <p:spPr>
+          <a:xfrm>
+            <a:off x="5513832" y="5596128"/>
             <a:ext cx="2139696" cy="566928"/>
           </a:xfrm>
           <a:prstGeom prst="roundRect">
@@ -14796,13 +14811,13 @@
       </p:sp>
       <p:sp>
         <p:nvSpPr>
-          <p:cNvPr id="27" name="Shape 21"/>
-          <p:cNvSpPr/>
-          <p:nvPr/>
-        </p:nvSpPr>
-        <p:spPr>
-          <a:xfrm>
-            <a:off x="5586984" y="5596128"/>
+          <p:cNvPr id="26" name="Shape 19"/>
+          <p:cNvSpPr/>
+          <p:nvPr/>
+        </p:nvSpPr>
+        <p:spPr>
+          <a:xfrm>
+            <a:off x="5586984" y="5669280"/>
             <a:ext cx="420624" cy="420624"/>
           </a:xfrm>
           <a:prstGeom prst="ellipse">
@@ -14816,21 +14831,21 @@
       </p:sp>
       <p:pic>
         <p:nvPicPr>
-          <p:cNvPr id="28" name="Image 4" descr="preencoded.png">    </p:cNvPr>
+          <p:cNvPr id="27" name="Image 5" descr="preencoded.png">    </p:cNvPr>
           <p:cNvPicPr>
             <a:picLocks noChangeAspect="1"/>
           </p:cNvPicPr>
           <p:nvPr/>
         </p:nvPicPr>
         <p:blipFill>
-          <a:blip r:embed="rId5"/>
+          <a:blip r:embed="rId6"/>
           <a:stretch>
             <a:fillRect/>
           </a:stretch>
         </p:blipFill>
         <p:spPr>
           <a:xfrm>
-            <a:off x="5687568" y="5696712"/>
+            <a:off x="5687568" y="5769864"/>
             <a:ext cx="219456" cy="219456"/>
           </a:xfrm>
           <a:prstGeom prst="rect">
@@ -14840,13 +14855,13 @@
       </p:pic>
       <p:sp>
         <p:nvSpPr>
-          <p:cNvPr id="29" name="Text 22"/>
-          <p:cNvSpPr/>
-          <p:nvPr/>
-        </p:nvSpPr>
-        <p:spPr>
-          <a:xfrm>
-            <a:off x="6062472" y="5559552"/>
+          <p:cNvPr id="28" name="Text 20"/>
+          <p:cNvSpPr/>
+          <p:nvPr/>
+        </p:nvSpPr>
+        <p:spPr>
+          <a:xfrm>
+            <a:off x="6062472" y="5632704"/>
             <a:ext cx="1517904" cy="493776"/>
           </a:xfrm>
           <a:prstGeom prst="rect">
@@ -14879,13 +14894,13 @@
       </p:sp>
       <p:sp>
         <p:nvSpPr>
-          <p:cNvPr id="30" name="Shape 23"/>
-          <p:cNvSpPr/>
-          <p:nvPr/>
-        </p:nvSpPr>
-        <p:spPr>
-          <a:xfrm>
-            <a:off x="2992176" y="4933769"/>
+          <p:cNvPr id="29" name="Shape 21"/>
+          <p:cNvSpPr/>
+          <p:nvPr/>
+        </p:nvSpPr>
+        <p:spPr>
+          <a:xfrm>
+            <a:off x="2927518" y="4985495"/>
             <a:ext cx="2139696" cy="566928"/>
           </a:xfrm>
           <a:prstGeom prst="roundRect">
@@ -14913,13 +14928,13 @@
       </p:sp>
       <p:sp>
         <p:nvSpPr>
-          <p:cNvPr id="31" name="Shape 24"/>
-          <p:cNvSpPr/>
-          <p:nvPr/>
-        </p:nvSpPr>
-        <p:spPr>
-          <a:xfrm>
-            <a:off x="3065328" y="5006921"/>
+          <p:cNvPr id="30" name="Shape 22"/>
+          <p:cNvSpPr/>
+          <p:nvPr/>
+        </p:nvSpPr>
+        <p:spPr>
+          <a:xfrm>
+            <a:off x="3000670" y="5058647"/>
             <a:ext cx="420624" cy="420624"/>
           </a:xfrm>
           <a:prstGeom prst="ellipse">
@@ -14933,21 +14948,21 @@
       </p:sp>
       <p:pic>
         <p:nvPicPr>
-          <p:cNvPr id="32" name="Image 5" descr="preencoded.png">    </p:cNvPr>
+          <p:cNvPr id="31" name="Image 6" descr="preencoded.png">    </p:cNvPr>
           <p:cNvPicPr>
             <a:picLocks noChangeAspect="1"/>
           </p:cNvPicPr>
           <p:nvPr/>
         </p:nvPicPr>
         <p:blipFill>
-          <a:blip r:embed="rId6"/>
+          <a:blip r:embed="rId7"/>
           <a:stretch>
             <a:fillRect/>
           </a:stretch>
         </p:blipFill>
         <p:spPr>
           <a:xfrm>
-            <a:off x="3165912" y="5107505"/>
+            <a:off x="3101254" y="5159231"/>
             <a:ext cx="219456" cy="219456"/>
           </a:xfrm>
           <a:prstGeom prst="rect">
@@ -14957,13 +14972,13 @@
       </p:pic>
       <p:sp>
         <p:nvSpPr>
-          <p:cNvPr id="33" name="Text 25"/>
-          <p:cNvSpPr/>
-          <p:nvPr/>
-        </p:nvSpPr>
-        <p:spPr>
-          <a:xfrm>
-            <a:off x="3540816" y="4970345"/>
+          <p:cNvPr id="32" name="Text 23"/>
+          <p:cNvSpPr/>
+          <p:nvPr/>
+        </p:nvSpPr>
+        <p:spPr>
+          <a:xfrm>
+            <a:off x="3476158" y="5022071"/>
             <a:ext cx="1517904" cy="493776"/>
           </a:xfrm>
           <a:prstGeom prst="rect">
@@ -14996,13 +15011,13 @@
       </p:sp>
       <p:sp>
         <p:nvSpPr>
-          <p:cNvPr id="34" name="Shape 26"/>
-          <p:cNvSpPr/>
-          <p:nvPr/>
-        </p:nvSpPr>
-        <p:spPr>
-          <a:xfrm>
-            <a:off x="1947672" y="3511296"/>
+          <p:cNvPr id="33" name="Shape 24"/>
+          <p:cNvSpPr/>
+          <p:nvPr/>
+        </p:nvSpPr>
+        <p:spPr>
+          <a:xfrm>
+            <a:off x="1856232" y="3511296"/>
             <a:ext cx="2139696" cy="566928"/>
           </a:xfrm>
           <a:prstGeom prst="roundRect">
@@ -15030,13 +15045,13 @@
       </p:sp>
       <p:sp>
         <p:nvSpPr>
-          <p:cNvPr id="35" name="Shape 27"/>
-          <p:cNvSpPr/>
-          <p:nvPr/>
-        </p:nvSpPr>
-        <p:spPr>
-          <a:xfrm>
-            <a:off x="2020824" y="3584448"/>
+          <p:cNvPr id="34" name="Shape 25"/>
+          <p:cNvSpPr/>
+          <p:nvPr/>
+        </p:nvSpPr>
+        <p:spPr>
+          <a:xfrm>
+            <a:off x="1929384" y="3584448"/>
             <a:ext cx="420624" cy="420624"/>
           </a:xfrm>
           <a:prstGeom prst="ellipse">
@@ -15050,21 +15065,21 @@
       </p:sp>
       <p:pic>
         <p:nvPicPr>
-          <p:cNvPr id="36" name="Image 6" descr="preencoded.png">    </p:cNvPr>
+          <p:cNvPr id="35" name="Image 7" descr="preencoded.png">    </p:cNvPr>
           <p:cNvPicPr>
             <a:picLocks noChangeAspect="1"/>
           </p:cNvPicPr>
           <p:nvPr/>
         </p:nvPicPr>
         <p:blipFill>
-          <a:blip r:embed="rId7"/>
+          <a:blip r:embed="rId8"/>
           <a:stretch>
             <a:fillRect/>
           </a:stretch>
         </p:blipFill>
         <p:spPr>
           <a:xfrm>
-            <a:off x="2121408" y="3685032"/>
+            <a:off x="2029968" y="3685032"/>
             <a:ext cx="219456" cy="219456"/>
           </a:xfrm>
           <a:prstGeom prst="rect">
@@ -15074,13 +15089,13 @@
       </p:pic>
       <p:sp>
         <p:nvSpPr>
-          <p:cNvPr id="37" name="Text 28"/>
-          <p:cNvSpPr/>
-          <p:nvPr/>
-        </p:nvSpPr>
-        <p:spPr>
-          <a:xfrm>
-            <a:off x="2496312" y="3547872"/>
+          <p:cNvPr id="36" name="Text 26"/>
+          <p:cNvSpPr/>
+          <p:nvPr/>
+        </p:nvSpPr>
+        <p:spPr>
+          <a:xfrm>
+            <a:off x="2404872" y="3547872"/>
             <a:ext cx="1517904" cy="493776"/>
           </a:xfrm>
           <a:prstGeom prst="rect">
@@ -15113,13 +15128,13 @@
       </p:sp>
       <p:sp>
         <p:nvSpPr>
-          <p:cNvPr id="38" name="Shape 29"/>
-          <p:cNvSpPr/>
-          <p:nvPr/>
-        </p:nvSpPr>
-        <p:spPr>
-          <a:xfrm>
-            <a:off x="2992176" y="2088823"/>
+          <p:cNvPr id="37" name="Shape 27"/>
+          <p:cNvSpPr/>
+          <p:nvPr/>
+        </p:nvSpPr>
+        <p:spPr>
+          <a:xfrm>
+            <a:off x="2927518" y="2037097"/>
             <a:ext cx="2139696" cy="566928"/>
           </a:xfrm>
           <a:prstGeom prst="roundRect">
@@ -15147,13 +15162,13 @@
       </p:sp>
       <p:sp>
         <p:nvSpPr>
-          <p:cNvPr id="39" name="Shape 30"/>
-          <p:cNvSpPr/>
-          <p:nvPr/>
-        </p:nvSpPr>
-        <p:spPr>
-          <a:xfrm>
-            <a:off x="3065328" y="2161975"/>
+          <p:cNvPr id="38" name="Shape 28"/>
+          <p:cNvSpPr/>
+          <p:nvPr/>
+        </p:nvSpPr>
+        <p:spPr>
+          <a:xfrm>
+            <a:off x="3000670" y="2110249"/>
             <a:ext cx="420624" cy="420624"/>
           </a:xfrm>
           <a:prstGeom prst="ellipse">
@@ -15167,21 +15182,21 @@
       </p:sp>
       <p:pic>
         <p:nvPicPr>
-          <p:cNvPr id="40" name="Image 7" descr="preencoded.png">    </p:cNvPr>
+          <p:cNvPr id="39" name="Image 8" descr="preencoded.png">    </p:cNvPr>
           <p:cNvPicPr>
             <a:picLocks noChangeAspect="1"/>
           </p:cNvPicPr>
           <p:nvPr/>
         </p:nvPicPr>
         <p:blipFill>
-          <a:blip r:embed="rId8"/>
+          <a:blip r:embed="rId9"/>
           <a:stretch>
             <a:fillRect/>
           </a:stretch>
         </p:blipFill>
         <p:spPr>
           <a:xfrm>
-            <a:off x="3165912" y="2262559"/>
+            <a:off x="3101254" y="2210833"/>
             <a:ext cx="219456" cy="219456"/>
           </a:xfrm>
           <a:prstGeom prst="rect">
@@ -15191,13 +15206,13 @@
       </p:pic>
       <p:sp>
         <p:nvSpPr>
-          <p:cNvPr id="41" name="Text 31"/>
-          <p:cNvSpPr/>
-          <p:nvPr/>
-        </p:nvSpPr>
-        <p:spPr>
-          <a:xfrm>
-            <a:off x="3540816" y="2125399"/>
+          <p:cNvPr id="40" name="Text 29"/>
+          <p:cNvSpPr/>
+          <p:nvPr/>
+        </p:nvSpPr>
+        <p:spPr>
+          <a:xfrm>
+            <a:off x="3476158" y="2073673"/>
             <a:ext cx="1517904" cy="493776"/>
           </a:xfrm>
           <a:prstGeom prst="rect">
@@ -15230,7 +15245,7 @@
       </p:sp>
       <p:sp>
         <p:nvSpPr>
-          <p:cNvPr id="42" name="Shape 32"/>
+          <p:cNvPr id="41" name="Shape 30"/>
           <p:cNvSpPr/>
           <p:nvPr/>
         </p:nvSpPr>
@@ -15264,7 +15279,7 @@
       </p:sp>
       <p:sp>
         <p:nvSpPr>
-          <p:cNvPr id="43" name="Text 33"/>
+          <p:cNvPr id="42" name="Text 31"/>
           <p:cNvSpPr/>
           <p:nvPr/>
         </p:nvSpPr>
@@ -15303,7 +15318,7 @@
       </p:sp>
       <p:sp>
         <p:nvSpPr>
-          <p:cNvPr id="44" name="Text 34"/>
+          <p:cNvPr id="43" name="Text 32"/>
           <p:cNvSpPr/>
           <p:nvPr/>
         </p:nvSpPr>
@@ -15342,7 +15357,7 @@
       </p:sp>
       <p:sp>
         <p:nvSpPr>
-          <p:cNvPr id="45" name="Text 35"/>
+          <p:cNvPr id="44" name="Text 33"/>
           <p:cNvSpPr/>
           <p:nvPr/>
         </p:nvSpPr>
@@ -16553,44 +16568,20 @@
           </a:p>
         </p:txBody>
       </p:sp>
-      <p:pic>
-        <p:nvPicPr>
-          <p:cNvPr id="36" name="Image 5" descr="preencoded.png">    </p:cNvPr>
-          <p:cNvPicPr>
-            <a:picLocks noChangeAspect="1"/>
-          </p:cNvPicPr>
-          <p:nvPr/>
-        </p:nvPicPr>
-        <p:blipFill>
-          <a:blip r:embed="rId6"/>
-          <a:stretch>
-            <a:fillRect/>
-          </a:stretch>
-        </p:blipFill>
-        <p:spPr>
-          <a:xfrm>
-            <a:off x="6869887" y="3950208"/>
-            <a:ext cx="4754880" cy="2377440"/>
-          </a:xfrm>
-          <a:prstGeom prst="rect">
-            <a:avLst/>
-          </a:prstGeom>
-        </p:spPr>
-      </p:pic>
-      <p:sp>
-        <p:nvSpPr>
-          <p:cNvPr id="37" name="Shape 29"/>
+      <p:sp>
+        <p:nvSpPr>
+          <p:cNvPr id="36" name="Shape 29"/>
           <p:cNvSpPr/>
           <p:nvPr/>
         </p:nvSpPr>
         <p:spPr>
           <a:xfrm>
             <a:off x="566928" y="4224528"/>
-            <a:ext cx="5577840" cy="1463040"/>
+            <a:ext cx="7863840" cy="1572768"/>
           </a:xfrm>
           <a:prstGeom prst="roundRect">
             <a:avLst>
-              <a:gd name="adj" fmla="val 8750"/>
+              <a:gd name="adj" fmla="val 8140"/>
             </a:avLst>
           </a:prstGeom>
           <a:solidFill>
@@ -16613,14 +16604,14 @@
       </p:sp>
       <p:sp>
         <p:nvSpPr>
-          <p:cNvPr id="38" name="Text 30"/>
-          <p:cNvSpPr/>
-          <p:nvPr/>
-        </p:nvSpPr>
-        <p:spPr>
-          <a:xfrm>
-            <a:off x="877824" y="4407408"/>
-            <a:ext cx="4937760" cy="292608"/>
+          <p:cNvPr id="37" name="Text 30"/>
+          <p:cNvSpPr/>
+          <p:nvPr/>
+        </p:nvSpPr>
+        <p:spPr>
+          <a:xfrm>
+            <a:off x="877824" y="4425696"/>
+            <a:ext cx="7223760" cy="292608"/>
           </a:xfrm>
           <a:prstGeom prst="rect">
             <a:avLst/>
@@ -16636,7 +16627,7 @@
               <a:buNone/>
             </a:pPr>
             <a:r>
-              <a:rPr lang="en-US" sz="1300" b="1" dirty="0">
+              <a:rPr lang="en-US" sz="1400" b="1" dirty="0">
                 <a:solidFill>
                   <a:srgbClr val="0F4C88"/>
                 </a:solidFill>
@@ -16646,20 +16637,20 @@
               </a:rPr>
               <a:t>Satu benang merah</a:t>
             </a:r>
-            <a:endParaRPr lang="en-US" sz="1300" dirty="0"/>
-          </a:p>
-        </p:txBody>
-      </p:sp>
-      <p:sp>
-        <p:nvSpPr>
-          <p:cNvPr id="39" name="Text 31"/>
-          <p:cNvSpPr/>
-          <p:nvPr/>
-        </p:nvSpPr>
-        <p:spPr>
-          <a:xfrm>
-            <a:off x="877824" y="4718304"/>
-            <a:ext cx="4956048" cy="822960"/>
+            <a:endParaRPr lang="en-US" sz="1400" dirty="0"/>
+          </a:p>
+        </p:txBody>
+      </p:sp>
+      <p:sp>
+        <p:nvSpPr>
+          <p:cNvPr id="38" name="Text 31"/>
+          <p:cNvSpPr/>
+          <p:nvPr/>
+        </p:nvSpPr>
+        <p:spPr>
+          <a:xfrm>
+            <a:off x="877824" y="4754880"/>
+            <a:ext cx="7260336" cy="914400"/>
           </a:xfrm>
           <a:prstGeom prst="rect">
             <a:avLst/>
@@ -16675,7 +16666,7 @@
               <a:buNone/>
             </a:pPr>
             <a:r>
-              <a:rPr lang="en-US" sz="1200" dirty="0">
+              <a:rPr lang="en-US" sz="1250" dirty="0">
                 <a:solidFill>
                   <a:srgbClr val="3E5C77"/>
                 </a:solidFill>
@@ -16683,12 +16674,36 @@
                 <a:ea typeface="Calibri" pitchFamily="34" charset="-122"/>
                 <a:cs typeface="Calibri" pitchFamily="34" charset="-120"/>
               </a:rPr>
-              <a:t>Mutu layanan PAUD tidak dibangun sendirian. Setiap bagian sesi ini bergerak dari “memahami” menuju “melakukan bersama mitra”.</a:t>
-            </a:r>
-            <a:endParaRPr lang="en-US" sz="1200" dirty="0"/>
-          </a:p>
-        </p:txBody>
-      </p:sp>
+              <a:t>Mutu layanan PAUD tidak dibangun sendirian. Setiap bagian sesi ini bergerak dari “memahami” menuju “melakukan bersama mitra”, dan ditutup dengan aksi yang bisa langsung dikerjakan satuan.</a:t>
+            </a:r>
+            <a:endParaRPr lang="en-US" sz="1250" dirty="0"/>
+          </a:p>
+        </p:txBody>
+      </p:sp>
+      <p:pic>
+        <p:nvPicPr>
+          <p:cNvPr id="39" name="Image 5" descr="preencoded.png">    </p:cNvPr>
+          <p:cNvPicPr>
+            <a:picLocks noChangeAspect="1"/>
+          </p:cNvPicPr>
+          <p:nvPr/>
+        </p:nvPicPr>
+        <p:blipFill>
+          <a:blip r:embed="rId6"/>
+          <a:stretch>
+            <a:fillRect/>
+          </a:stretch>
+        </p:blipFill>
+        <p:spPr>
+          <a:xfrm>
+            <a:off x="9649663" y="4114800"/>
+            <a:ext cx="1975104" cy="1975104"/>
+          </a:xfrm>
+          <a:prstGeom prst="rect">
+            <a:avLst/>
+          </a:prstGeom>
+        </p:spPr>
+      </p:pic>
       <p:sp>
         <p:nvSpPr>
           <p:cNvPr id="40" name="Text 32"/>
@@ -18539,11 +18554,11 @@
         <p:spPr>
           <a:xfrm>
             <a:off x="566928" y="1499616"/>
-            <a:ext cx="3503066" cy="1883664"/>
+            <a:ext cx="3503066" cy="1773936"/>
           </a:xfrm>
           <a:prstGeom prst="roundRect">
             <a:avLst>
-              <a:gd name="adj" fmla="val 6796"/>
+              <a:gd name="adj" fmla="val 7216"/>
             </a:avLst>
           </a:prstGeom>
           <a:solidFill>
@@ -18702,11 +18717,11 @@
         <p:spPr>
           <a:xfrm>
             <a:off x="4344314" y="1499616"/>
-            <a:ext cx="3503066" cy="1883664"/>
+            <a:ext cx="3503066" cy="1773936"/>
           </a:xfrm>
           <a:prstGeom prst="roundRect">
             <a:avLst>
-              <a:gd name="adj" fmla="val 6796"/>
+              <a:gd name="adj" fmla="val 7216"/>
             </a:avLst>
           </a:prstGeom>
           <a:solidFill>
@@ -18865,11 +18880,11 @@
         <p:spPr>
           <a:xfrm>
             <a:off x="8121701" y="1499616"/>
-            <a:ext cx="3503066" cy="1883664"/>
+            <a:ext cx="3503066" cy="1773936"/>
           </a:xfrm>
           <a:prstGeom prst="roundRect">
             <a:avLst>
-              <a:gd name="adj" fmla="val 6796"/>
+              <a:gd name="adj" fmla="val 7216"/>
             </a:avLst>
           </a:prstGeom>
           <a:solidFill>
@@ -19019,9 +19034,43 @@
           </a:p>
         </p:txBody>
       </p:sp>
+      <p:sp>
+        <p:nvSpPr>
+          <p:cNvPr id="21" name="Shape 16"/>
+          <p:cNvSpPr/>
+          <p:nvPr/>
+        </p:nvSpPr>
+        <p:spPr>
+          <a:xfrm>
+            <a:off x="5297044" y="3355848"/>
+            <a:ext cx="4340807" cy="2962656"/>
+          </a:xfrm>
+          <a:prstGeom prst="roundRect">
+            <a:avLst>
+              <a:gd name="adj" fmla="val 4321"/>
+            </a:avLst>
+          </a:prstGeom>
+          <a:solidFill>
+            <a:srgbClr val="FFFFFF"/>
+          </a:solidFill>
+          <a:ln w="12700">
+            <a:solidFill>
+              <a:srgbClr val="333333"/>
+            </a:solidFill>
+            <a:prstDash val="solid"/>
+          </a:ln>
+          <a:effectLst>
+            <a:outerShdw sx="100000" sy="100000" kx="0" ky="0" algn="bl" rotWithShape="0" blurRad="177800" dist="38100" dir="5400000">
+              <a:srgbClr val="0F3352">
+                <a:alpha val="10000"/>
+              </a:srgbClr>
+            </a:outerShdw>
+          </a:effectLst>
+        </p:spPr>
+      </p:sp>
       <p:pic>
         <p:nvPicPr>
-          <p:cNvPr id="21" name="Image 3" descr="preencoded.png">    </p:cNvPr>
+          <p:cNvPr id="22" name="Image 3" descr="preencoded.png">    </p:cNvPr>
           <p:cNvPicPr>
             <a:picLocks noChangeAspect="1"/>
           </p:cNvPicPr>
@@ -19035,8 +19084,8 @@
         </p:blipFill>
         <p:spPr>
           <a:xfrm>
-            <a:off x="1889608" y="3474720"/>
-            <a:ext cx="8412480" cy="2523744"/>
+            <a:off x="5379340" y="3438144"/>
+            <a:ext cx="4176215" cy="2798064"/>
           </a:xfrm>
           <a:prstGeom prst="rect">
             <a:avLst/>
@@ -19045,30 +19094,30 @@
       </p:pic>
       <p:sp>
         <p:nvSpPr>
-          <p:cNvPr id="22" name="Text 16"/>
-          <p:cNvSpPr/>
-          <p:nvPr/>
-        </p:nvSpPr>
-        <p:spPr>
-          <a:xfrm>
-            <a:off x="566928" y="6053328"/>
-            <a:ext cx="8229600" cy="274320"/>
-          </a:xfrm>
-          <a:prstGeom prst="rect">
-            <a:avLst/>
-          </a:prstGeom>
-          <a:noFill/>
-          <a:ln/>
-        </p:spPr>
-        <p:txBody>
-          <a:bodyPr wrap="square" lIns="0" tIns="0" rIns="0" bIns="0" rtlCol="0" anchor="ctr"/>
+          <p:cNvPr id="23" name="Text 17"/>
+          <p:cNvSpPr/>
+          <p:nvPr/>
+        </p:nvSpPr>
+        <p:spPr>
+          <a:xfrm>
+            <a:off x="566928" y="4023360"/>
+            <a:ext cx="3108960" cy="1280160"/>
+          </a:xfrm>
+          <a:prstGeom prst="rect">
+            <a:avLst/>
+          </a:prstGeom>
+          <a:noFill/>
+          <a:ln/>
+        </p:spPr>
+        <p:txBody>
+          <a:bodyPr wrap="square" lIns="0" tIns="0" rIns="0" bIns="0" rtlCol="0" anchor="t"/>
           <a:lstStyle/>
           <a:p>
             <a:pPr indent="0" marL="0">
               <a:buNone/>
             </a:pPr>
             <a:r>
-              <a:rPr lang="en-US" sz="1150" i="1" dirty="0">
+              <a:rPr lang="en-US" sz="1300" i="1" dirty="0">
                 <a:solidFill>
                   <a:srgbClr val="3E5C77"/>
                 </a:solidFill>
@@ -19078,13 +19127,13 @@
               </a:rPr>
               <a:t>Iklim partisipatif tumbuh saat ketiganya bergerak dengan informasi dan tujuan yang sama.</a:t>
             </a:r>
-            <a:endParaRPr lang="en-US" sz="1150" dirty="0"/>
-          </a:p>
-        </p:txBody>
-      </p:sp>
-      <p:sp>
-        <p:nvSpPr>
-          <p:cNvPr id="23" name="Text 17"/>
+            <a:endParaRPr lang="en-US" sz="1300" dirty="0"/>
+          </a:p>
+        </p:txBody>
+      </p:sp>
+      <p:sp>
+        <p:nvSpPr>
+          <p:cNvPr id="24" name="Text 18"/>
           <p:cNvSpPr/>
           <p:nvPr/>
         </p:nvSpPr>
@@ -19123,7 +19172,7 @@
       </p:sp>
       <p:sp>
         <p:nvSpPr>
-          <p:cNvPr id="24" name="Text 18"/>
+          <p:cNvPr id="25" name="Text 19"/>
           <p:cNvSpPr/>
           <p:nvPr/>
         </p:nvSpPr>
@@ -20747,11 +20796,11 @@
         <p:spPr>
           <a:xfrm>
             <a:off x="566928" y="1773936"/>
-            <a:ext cx="5394960" cy="914400"/>
+            <a:ext cx="5394960" cy="859536"/>
           </a:xfrm>
           <a:prstGeom prst="roundRect">
             <a:avLst>
-              <a:gd name="adj" fmla="val 14000"/>
+              <a:gd name="adj" fmla="val 14894"/>
             </a:avLst>
           </a:prstGeom>
           <a:solidFill>
@@ -20780,12 +20829,12 @@
         </p:nvSpPr>
         <p:spPr>
           <a:xfrm>
-            <a:off x="786384" y="1956816"/>
-            <a:ext cx="548640" cy="548640"/>
+            <a:off x="786384" y="1938528"/>
+            <a:ext cx="530352" cy="530352"/>
           </a:xfrm>
           <a:prstGeom prst="ellipse">
             <a:avLst>
-              <a:gd name="adj" fmla="val 20000"/>
+              <a:gd name="adj" fmla="val 20690"/>
             </a:avLst>
           </a:prstGeom>
           <a:solidFill>
@@ -20815,8 +20864,8 @@
         </p:blipFill>
         <p:spPr>
           <a:xfrm>
-            <a:off x="918058" y="2088490"/>
-            <a:ext cx="285293" cy="285293"/>
+            <a:off x="913668" y="2065812"/>
+            <a:ext cx="275783" cy="275783"/>
           </a:xfrm>
           <a:prstGeom prst="rect">
             <a:avLst/>
@@ -20831,7 +20880,7 @@
         </p:nvSpPr>
         <p:spPr>
           <a:xfrm>
-            <a:off x="1463040" y="1901952"/>
+            <a:off x="1444752" y="1865376"/>
             <a:ext cx="4297680" cy="292608"/>
           </a:xfrm>
           <a:prstGeom prst="rect">
@@ -20870,8 +20919,8 @@
         </p:nvSpPr>
         <p:spPr>
           <a:xfrm>
-            <a:off x="1463040" y="2194560"/>
-            <a:ext cx="4334256" cy="438912"/>
+            <a:off x="1444752" y="2157984"/>
+            <a:ext cx="4352544" cy="420624"/>
           </a:xfrm>
           <a:prstGeom prst="rect">
             <a:avLst/>
@@ -20909,12 +20958,12 @@
         </p:nvSpPr>
         <p:spPr>
           <a:xfrm>
-            <a:off x="566928" y="2779776"/>
-            <a:ext cx="5394960" cy="914400"/>
+            <a:off x="566928" y="2724912"/>
+            <a:ext cx="5394960" cy="859536"/>
           </a:xfrm>
           <a:prstGeom prst="roundRect">
             <a:avLst>
-              <a:gd name="adj" fmla="val 14000"/>
+              <a:gd name="adj" fmla="val 14894"/>
             </a:avLst>
           </a:prstGeom>
           <a:solidFill>
@@ -20943,12 +20992,12 @@
         </p:nvSpPr>
         <p:spPr>
           <a:xfrm>
-            <a:off x="786384" y="2962656"/>
-            <a:ext cx="548640" cy="548640"/>
+            <a:off x="786384" y="2889504"/>
+            <a:ext cx="530352" cy="530352"/>
           </a:xfrm>
           <a:prstGeom prst="ellipse">
             <a:avLst>
-              <a:gd name="adj" fmla="val 20000"/>
+              <a:gd name="adj" fmla="val 20690"/>
             </a:avLst>
           </a:prstGeom>
           <a:solidFill>
@@ -20978,8 +21027,8 @@
         </p:blipFill>
         <p:spPr>
           <a:xfrm>
-            <a:off x="918058" y="3094330"/>
-            <a:ext cx="285293" cy="285293"/>
+            <a:off x="913668" y="3016788"/>
+            <a:ext cx="275783" cy="275783"/>
           </a:xfrm>
           <a:prstGeom prst="rect">
             <a:avLst/>
@@ -20994,7 +21043,7 @@
         </p:nvSpPr>
         <p:spPr>
           <a:xfrm>
-            <a:off x="1463040" y="2907792"/>
+            <a:off x="1444752" y="2816352"/>
             <a:ext cx="4297680" cy="292608"/>
           </a:xfrm>
           <a:prstGeom prst="rect">
@@ -21033,8 +21082,8 @@
         </p:nvSpPr>
         <p:spPr>
           <a:xfrm>
-            <a:off x="1463040" y="3200400"/>
-            <a:ext cx="4334256" cy="438912"/>
+            <a:off x="1444752" y="3108960"/>
+            <a:ext cx="4352544" cy="420624"/>
           </a:xfrm>
           <a:prstGeom prst="rect">
             <a:avLst/>
@@ -21072,12 +21121,12 @@
         </p:nvSpPr>
         <p:spPr>
           <a:xfrm>
-            <a:off x="566928" y="3785616"/>
-            <a:ext cx="5394960" cy="914400"/>
+            <a:off x="566928" y="3675888"/>
+            <a:ext cx="5394960" cy="859536"/>
           </a:xfrm>
           <a:prstGeom prst="roundRect">
             <a:avLst>
-              <a:gd name="adj" fmla="val 14000"/>
+              <a:gd name="adj" fmla="val 14894"/>
             </a:avLst>
           </a:prstGeom>
           <a:solidFill>
@@ -21106,12 +21155,12 @@
         </p:nvSpPr>
         <p:spPr>
           <a:xfrm>
-            <a:off x="786384" y="3968496"/>
-            <a:ext cx="548640" cy="548640"/>
+            <a:off x="786384" y="3840480"/>
+            <a:ext cx="530352" cy="530352"/>
           </a:xfrm>
           <a:prstGeom prst="ellipse">
             <a:avLst>
-              <a:gd name="adj" fmla="val 20000"/>
+              <a:gd name="adj" fmla="val 20690"/>
             </a:avLst>
           </a:prstGeom>
           <a:solidFill>
@@ -21141,8 +21190,8 @@
         </p:blipFill>
         <p:spPr>
           <a:xfrm>
-            <a:off x="918058" y="4100170"/>
-            <a:ext cx="285293" cy="285293"/>
+            <a:off x="913668" y="3967764"/>
+            <a:ext cx="275783" cy="275783"/>
           </a:xfrm>
           <a:prstGeom prst="rect">
             <a:avLst/>
@@ -21157,7 +21206,7 @@
         </p:nvSpPr>
         <p:spPr>
           <a:xfrm>
-            <a:off x="1463040" y="3913632"/>
+            <a:off x="1444752" y="3767328"/>
             <a:ext cx="4297680" cy="292608"/>
           </a:xfrm>
           <a:prstGeom prst="rect">
@@ -21196,8 +21245,8 @@
         </p:nvSpPr>
         <p:spPr>
           <a:xfrm>
-            <a:off x="1463040" y="4206240"/>
-            <a:ext cx="4334256" cy="438912"/>
+            <a:off x="1444752" y="4059936"/>
+            <a:ext cx="4352544" cy="420624"/>
           </a:xfrm>
           <a:prstGeom prst="rect">
             <a:avLst/>
@@ -21235,12 +21284,12 @@
         </p:nvSpPr>
         <p:spPr>
           <a:xfrm>
-            <a:off x="566928" y="4791456"/>
-            <a:ext cx="5394960" cy="914400"/>
+            <a:off x="566928" y="4626864"/>
+            <a:ext cx="5394960" cy="859536"/>
           </a:xfrm>
           <a:prstGeom prst="roundRect">
             <a:avLst>
-              <a:gd name="adj" fmla="val 14000"/>
+              <a:gd name="adj" fmla="val 14894"/>
             </a:avLst>
           </a:prstGeom>
           <a:solidFill>
@@ -21269,12 +21318,12 @@
         </p:nvSpPr>
         <p:spPr>
           <a:xfrm>
-            <a:off x="786384" y="4974336"/>
-            <a:ext cx="548640" cy="548640"/>
+            <a:off x="786384" y="4791456"/>
+            <a:ext cx="530352" cy="530352"/>
           </a:xfrm>
           <a:prstGeom prst="ellipse">
             <a:avLst>
-              <a:gd name="adj" fmla="val 20000"/>
+              <a:gd name="adj" fmla="val 20690"/>
             </a:avLst>
           </a:prstGeom>
           <a:solidFill>
@@ -21304,8 +21353,8 @@
         </p:blipFill>
         <p:spPr>
           <a:xfrm>
-            <a:off x="918058" y="5106010"/>
-            <a:ext cx="285293" cy="285293"/>
+            <a:off x="913668" y="4918740"/>
+            <a:ext cx="275783" cy="275783"/>
           </a:xfrm>
           <a:prstGeom prst="rect">
             <a:avLst/>
@@ -21320,7 +21369,7 @@
         </p:nvSpPr>
         <p:spPr>
           <a:xfrm>
-            <a:off x="1463040" y="4919472"/>
+            <a:off x="1444752" y="4718304"/>
             <a:ext cx="4297680" cy="292608"/>
           </a:xfrm>
           <a:prstGeom prst="rect">
@@ -21359,8 +21408,8 @@
         </p:nvSpPr>
         <p:spPr>
           <a:xfrm>
-            <a:off x="1463040" y="5212080"/>
-            <a:ext cx="4334256" cy="438912"/>
+            <a:off x="1444752" y="5010912"/>
+            <a:ext cx="4352544" cy="420624"/>
           </a:xfrm>
           <a:prstGeom prst="rect">
             <a:avLst/>
@@ -21438,11 +21487,11 @@
         <p:spPr>
           <a:xfrm>
             <a:off x="6345936" y="1773936"/>
-            <a:ext cx="5278831" cy="914400"/>
+            <a:ext cx="5278831" cy="859536"/>
           </a:xfrm>
           <a:prstGeom prst="roundRect">
             <a:avLst>
-              <a:gd name="adj" fmla="val 14000"/>
+              <a:gd name="adj" fmla="val 14894"/>
             </a:avLst>
           </a:prstGeom>
           <a:solidFill>
@@ -21471,12 +21520,12 @@
         </p:nvSpPr>
         <p:spPr>
           <a:xfrm>
-            <a:off x="6565392" y="1956816"/>
-            <a:ext cx="548640" cy="548640"/>
+            <a:off x="6565392" y="1938528"/>
+            <a:ext cx="530352" cy="530352"/>
           </a:xfrm>
           <a:prstGeom prst="ellipse">
             <a:avLst>
-              <a:gd name="adj" fmla="val 20000"/>
+              <a:gd name="adj" fmla="val 20690"/>
             </a:avLst>
           </a:prstGeom>
           <a:solidFill>
@@ -21506,8 +21555,8 @@
         </p:blipFill>
         <p:spPr>
           <a:xfrm>
-            <a:off x="6697066" y="2088490"/>
-            <a:ext cx="285293" cy="285293"/>
+            <a:off x="6692676" y="2065812"/>
+            <a:ext cx="275783" cy="275783"/>
           </a:xfrm>
           <a:prstGeom prst="rect">
             <a:avLst/>
@@ -21522,7 +21571,7 @@
         </p:nvSpPr>
         <p:spPr>
           <a:xfrm>
-            <a:off x="7242048" y="1901952"/>
+            <a:off x="7223760" y="1865376"/>
             <a:ext cx="4114800" cy="292608"/>
           </a:xfrm>
           <a:prstGeom prst="rect">
@@ -21561,8 +21610,8 @@
         </p:nvSpPr>
         <p:spPr>
           <a:xfrm>
-            <a:off x="7242048" y="2194560"/>
-            <a:ext cx="4114800" cy="438912"/>
+            <a:off x="7223760" y="2157984"/>
+            <a:ext cx="4114800" cy="420624"/>
           </a:xfrm>
           <a:prstGeom prst="rect">
             <a:avLst/>
@@ -21600,12 +21649,12 @@
         </p:nvSpPr>
         <p:spPr>
           <a:xfrm>
-            <a:off x="6345936" y="2779776"/>
-            <a:ext cx="5278831" cy="914400"/>
+            <a:off x="6345936" y="2724912"/>
+            <a:ext cx="5278831" cy="859536"/>
           </a:xfrm>
           <a:prstGeom prst="roundRect">
             <a:avLst>
-              <a:gd name="adj" fmla="val 14000"/>
+              <a:gd name="adj" fmla="val 14894"/>
             </a:avLst>
           </a:prstGeom>
           <a:solidFill>
@@ -21634,12 +21683,12 @@
         </p:nvSpPr>
         <p:spPr>
           <a:xfrm>
-            <a:off x="6565392" y="2962656"/>
-            <a:ext cx="548640" cy="548640"/>
+            <a:off x="6565392" y="2889504"/>
+            <a:ext cx="530352" cy="530352"/>
           </a:xfrm>
           <a:prstGeom prst="ellipse">
             <a:avLst>
-              <a:gd name="adj" fmla="val 20000"/>
+              <a:gd name="adj" fmla="val 20690"/>
             </a:avLst>
           </a:prstGeom>
           <a:solidFill>
@@ -21669,8 +21718,8 @@
         </p:blipFill>
         <p:spPr>
           <a:xfrm>
-            <a:off x="6697066" y="3094330"/>
-            <a:ext cx="285293" cy="285293"/>
+            <a:off x="6692676" y="3016788"/>
+            <a:ext cx="275783" cy="275783"/>
           </a:xfrm>
           <a:prstGeom prst="rect">
             <a:avLst/>
@@ -21685,7 +21734,7 @@
         </p:nvSpPr>
         <p:spPr>
           <a:xfrm>
-            <a:off x="7242048" y="2907792"/>
+            <a:off x="7223760" y="2816352"/>
             <a:ext cx="4114800" cy="292608"/>
           </a:xfrm>
           <a:prstGeom prst="rect">
@@ -21724,8 +21773,8 @@
         </p:nvSpPr>
         <p:spPr>
           <a:xfrm>
-            <a:off x="7242048" y="3200400"/>
-            <a:ext cx="4114800" cy="438912"/>
+            <a:off x="7223760" y="3108960"/>
+            <a:ext cx="4114800" cy="420624"/>
           </a:xfrm>
           <a:prstGeom prst="rect">
             <a:avLst/>
@@ -21763,12 +21812,12 @@
         </p:nvSpPr>
         <p:spPr>
           <a:xfrm>
-            <a:off x="6345936" y="3785616"/>
-            <a:ext cx="5278831" cy="914400"/>
+            <a:off x="6345936" y="3675888"/>
+            <a:ext cx="5278831" cy="859536"/>
           </a:xfrm>
           <a:prstGeom prst="roundRect">
             <a:avLst>
-              <a:gd name="adj" fmla="val 14000"/>
+              <a:gd name="adj" fmla="val 14894"/>
             </a:avLst>
           </a:prstGeom>
           <a:solidFill>
@@ -21797,12 +21846,12 @@
         </p:nvSpPr>
         <p:spPr>
           <a:xfrm>
-            <a:off x="6565392" y="3968496"/>
-            <a:ext cx="548640" cy="548640"/>
+            <a:off x="6565392" y="3840480"/>
+            <a:ext cx="530352" cy="530352"/>
           </a:xfrm>
           <a:prstGeom prst="ellipse">
             <a:avLst>
-              <a:gd name="adj" fmla="val 20000"/>
+              <a:gd name="adj" fmla="val 20690"/>
             </a:avLst>
           </a:prstGeom>
           <a:solidFill>
@@ -21832,8 +21881,8 @@
         </p:blipFill>
         <p:spPr>
           <a:xfrm>
-            <a:off x="6697066" y="4100170"/>
-            <a:ext cx="285293" cy="285293"/>
+            <a:off x="6692676" y="3967764"/>
+            <a:ext cx="275783" cy="275783"/>
           </a:xfrm>
           <a:prstGeom prst="rect">
             <a:avLst/>
@@ -21848,7 +21897,7 @@
         </p:nvSpPr>
         <p:spPr>
           <a:xfrm>
-            <a:off x="7242048" y="3913632"/>
+            <a:off x="7223760" y="3767328"/>
             <a:ext cx="4114800" cy="292608"/>
           </a:xfrm>
           <a:prstGeom prst="rect">
@@ -21887,8 +21936,8 @@
         </p:nvSpPr>
         <p:spPr>
           <a:xfrm>
-            <a:off x="7242048" y="4206240"/>
-            <a:ext cx="4114800" cy="438912"/>
+            <a:off x="7223760" y="4059936"/>
+            <a:ext cx="4114800" cy="420624"/>
           </a:xfrm>
           <a:prstGeom prst="rect">
             <a:avLst/>
@@ -21926,12 +21975,12 @@
         </p:nvSpPr>
         <p:spPr>
           <a:xfrm>
-            <a:off x="6345936" y="4791456"/>
-            <a:ext cx="5278831" cy="914400"/>
+            <a:off x="6345936" y="4626864"/>
+            <a:ext cx="5278831" cy="859536"/>
           </a:xfrm>
           <a:prstGeom prst="roundRect">
             <a:avLst>
-              <a:gd name="adj" fmla="val 14000"/>
+              <a:gd name="adj" fmla="val 14894"/>
             </a:avLst>
           </a:prstGeom>
           <a:solidFill>
@@ -21960,12 +22009,12 @@
         </p:nvSpPr>
         <p:spPr>
           <a:xfrm>
-            <a:off x="6565392" y="4974336"/>
-            <a:ext cx="548640" cy="548640"/>
+            <a:off x="6565392" y="4791456"/>
+            <a:ext cx="530352" cy="530352"/>
           </a:xfrm>
           <a:prstGeom prst="ellipse">
             <a:avLst>
-              <a:gd name="adj" fmla="val 20000"/>
+              <a:gd name="adj" fmla="val 20690"/>
             </a:avLst>
           </a:prstGeom>
           <a:solidFill>
@@ -21995,8 +22044,8 @@
         </p:blipFill>
         <p:spPr>
           <a:xfrm>
-            <a:off x="6697066" y="5106010"/>
-            <a:ext cx="285293" cy="285293"/>
+            <a:off x="6692676" y="4918740"/>
+            <a:ext cx="275783" cy="275783"/>
           </a:xfrm>
           <a:prstGeom prst="rect">
             <a:avLst/>
@@ -22011,7 +22060,7 @@
         </p:nvSpPr>
         <p:spPr>
           <a:xfrm>
-            <a:off x="7242048" y="4919472"/>
+            <a:off x="7223760" y="4718304"/>
             <a:ext cx="4114800" cy="292608"/>
           </a:xfrm>
           <a:prstGeom prst="rect">
@@ -22050,8 +22099,8 @@
         </p:nvSpPr>
         <p:spPr>
           <a:xfrm>
-            <a:off x="7242048" y="5212080"/>
-            <a:ext cx="4114800" cy="438912"/>
+            <a:off x="7223760" y="5010912"/>
+            <a:ext cx="4114800" cy="420624"/>
           </a:xfrm>
           <a:prstGeom prst="rect">
             <a:avLst/>
@@ -22083,14 +22132,72 @@
       </p:sp>
       <p:sp>
         <p:nvSpPr>
-          <p:cNvPr id="48" name="Text 38"/>
-          <p:cNvSpPr/>
-          <p:nvPr/>
-        </p:nvSpPr>
-        <p:spPr>
-          <a:xfrm>
-            <a:off x="566928" y="5797296"/>
-            <a:ext cx="11057839" cy="365760"/>
+          <p:cNvPr id="48" name="Shape 38"/>
+          <p:cNvSpPr/>
+          <p:nvPr/>
+        </p:nvSpPr>
+        <p:spPr>
+          <a:xfrm>
+            <a:off x="566928" y="5541264"/>
+            <a:ext cx="11057839" cy="749808"/>
+          </a:xfrm>
+          <a:prstGeom prst="roundRect">
+            <a:avLst>
+              <a:gd name="adj" fmla="val 17073"/>
+            </a:avLst>
+          </a:prstGeom>
+          <a:solidFill>
+            <a:srgbClr val="DCEDFB"/>
+          </a:solidFill>
+          <a:ln w="12700">
+            <a:solidFill>
+              <a:srgbClr val="B9DBF6"/>
+            </a:solidFill>
+            <a:prstDash val="solid"/>
+          </a:ln>
+          <a:effectLst>
+            <a:outerShdw sx="100000" sy="100000" kx="0" ky="0" algn="bl" rotWithShape="0" blurRad="177800" dist="38100" dir="5400000">
+              <a:srgbClr val="0F3352">
+                <a:alpha val="10000"/>
+              </a:srgbClr>
+            </a:outerShdw>
+          </a:effectLst>
+        </p:spPr>
+      </p:sp>
+      <p:pic>
+        <p:nvPicPr>
+          <p:cNvPr id="49" name="Image 8" descr="preencoded.png">    </p:cNvPr>
+          <p:cNvPicPr>
+            <a:picLocks noChangeAspect="1"/>
+          </p:cNvPicPr>
+          <p:nvPr/>
+        </p:nvPicPr>
+        <p:blipFill>
+          <a:blip r:embed="rId9"/>
+          <a:stretch>
+            <a:fillRect/>
+          </a:stretch>
+        </p:blipFill>
+        <p:spPr>
+          <a:xfrm>
+            <a:off x="694944" y="5614416"/>
+            <a:ext cx="1173054" cy="603504"/>
+          </a:xfrm>
+          <a:prstGeom prst="rect">
+            <a:avLst/>
+          </a:prstGeom>
+        </p:spPr>
+      </p:pic>
+      <p:sp>
+        <p:nvSpPr>
+          <p:cNvPr id="50" name="Text 39"/>
+          <p:cNvSpPr/>
+          <p:nvPr/>
+        </p:nvSpPr>
+        <p:spPr>
+          <a:xfrm>
+            <a:off x="1920240" y="5596128"/>
+            <a:ext cx="9509760" cy="640080"/>
           </a:xfrm>
           <a:prstGeom prst="rect">
             <a:avLst/>
@@ -22102,11 +22209,11 @@
           <a:bodyPr wrap="square" lIns="0" tIns="0" rIns="0" bIns="0" rtlCol="0" anchor="ctr"/>
           <a:lstStyle/>
           <a:p>
-            <a:pPr algn="ctr" indent="0" marL="0">
-              <a:buNone/>
-            </a:pPr>
-            <a:r>
-              <a:rPr lang="en-US" sz="1250" b="1" dirty="0">
+            <a:pPr indent="0" marL="0">
+              <a:buNone/>
+            </a:pPr>
+            <a:r>
+              <a:rPr lang="en-US" sz="1150" dirty="0">
                 <a:solidFill>
                   <a:srgbClr val="173753"/>
                 </a:solidFill>
@@ -22114,15 +22221,15 @@
                 <a:ea typeface="Calibri" pitchFamily="34" charset="-122"/>
                 <a:cs typeface="Calibri" pitchFamily="34" charset="-120"/>
               </a:rPr>
-              <a:t>Prinsipnya: mulai dari yang tersedia. Banyak perbaikan layanan tidak memerlukan anggaran baru, melainkan koordinasi yang lebih baik.</a:t>
-            </a:r>
-            <a:endParaRPr lang="en-US" sz="1250" dirty="0"/>
-          </a:p>
-        </p:txBody>
-      </p:sp>
-      <p:sp>
-        <p:nvSpPr>
-          <p:cNvPr id="49" name="Text 39"/>
+              <a:t>Rujukan praktis: seri Panduan Penyelenggaraan PAUD Berkualitas terbitan Direktorat PAUD. Mulailah dari sumber daya yang tersedia — banyak perbaikan layanan tidak memerlukan anggaran baru, melainkan koordinasi yang lebih baik.</a:t>
+            </a:r>
+            <a:endParaRPr lang="en-US" sz="1150" dirty="0"/>
+          </a:p>
+        </p:txBody>
+      </p:sp>
+      <p:sp>
+        <p:nvSpPr>
+          <p:cNvPr id="51" name="Text 40"/>
           <p:cNvSpPr/>
           <p:nvPr/>
         </p:nvSpPr>
@@ -22161,7 +22268,7 @@
       </p:sp>
       <p:sp>
         <p:nvSpPr>
-          <p:cNvPr id="50" name="Text 40"/>
+          <p:cNvPr id="52" name="Text 41"/>
           <p:cNvSpPr/>
           <p:nvPr/>
         </p:nvSpPr>
@@ -22230,9 +22337,65 @@
           <a:chExt cx="0" cy="0"/>
         </a:xfrm>
       </p:grpSpPr>
+      <p:sp>
+        <p:nvSpPr>
+          <p:cNvPr id="2" name="Shape 0"/>
+          <p:cNvSpPr/>
+          <p:nvPr/>
+        </p:nvSpPr>
+        <p:spPr>
+          <a:xfrm>
+            <a:off x="-1097280" y="-1280160"/>
+            <a:ext cx="3840480" cy="3840480"/>
+          </a:xfrm>
+          <a:prstGeom prst="ellipse">
+            <a:avLst/>
+          </a:prstGeom>
+          <a:solidFill>
+            <a:srgbClr val="FFFFFF">
+              <a:alpha val="12000"/>
+            </a:srgbClr>
+          </a:solidFill>
+          <a:ln/>
+        </p:spPr>
+      </p:sp>
+      <p:sp>
+        <p:nvSpPr>
+          <p:cNvPr id="3" name="Shape 1"/>
+          <p:cNvSpPr/>
+          <p:nvPr/>
+        </p:nvSpPr>
+        <p:spPr>
+          <a:xfrm>
+            <a:off x="3857205" y="3447288"/>
+            <a:ext cx="4477285" cy="3054096"/>
+          </a:xfrm>
+          <a:prstGeom prst="roundRect">
+            <a:avLst>
+              <a:gd name="adj" fmla="val 4192"/>
+            </a:avLst>
+          </a:prstGeom>
+          <a:solidFill>
+            <a:srgbClr val="FFFFFF"/>
+          </a:solidFill>
+          <a:ln w="12700">
+            <a:solidFill>
+              <a:srgbClr val="333333"/>
+            </a:solidFill>
+            <a:prstDash val="solid"/>
+          </a:ln>
+          <a:effectLst>
+            <a:outerShdw sx="100000" sy="100000" kx="0" ky="0" algn="bl" rotWithShape="0" blurRad="177800" dist="38100" dir="5400000">
+              <a:srgbClr val="0F3352">
+                <a:alpha val="10000"/>
+              </a:srgbClr>
+            </a:outerShdw>
+          </a:effectLst>
+        </p:spPr>
+      </p:sp>
       <p:pic>
         <p:nvPicPr>
-          <p:cNvPr id="2" name="Image 0" descr="preencoded.png">    </p:cNvPr>
+          <p:cNvPr id="4" name="Image 0" descr="preencoded.png">    </p:cNvPr>
           <p:cNvPicPr>
             <a:picLocks noChangeAspect="1"/>
           </p:cNvPicPr>
@@ -22246,8 +22409,8 @@
         </p:blipFill>
         <p:spPr>
           <a:xfrm>
-            <a:off x="3969868" y="4023360"/>
-            <a:ext cx="4251960" cy="2834640"/>
+            <a:off x="3939501" y="3529584"/>
+            <a:ext cx="4312693" cy="2889504"/>
           </a:xfrm>
           <a:prstGeom prst="rect">
             <a:avLst/>
@@ -22256,29 +22419,7 @@
       </p:pic>
       <p:sp>
         <p:nvSpPr>
-          <p:cNvPr id="3" name="Shape 0"/>
-          <p:cNvSpPr/>
-          <p:nvPr/>
-        </p:nvSpPr>
-        <p:spPr>
-          <a:xfrm>
-            <a:off x="-1097280" y="-1280160"/>
-            <a:ext cx="3840480" cy="3840480"/>
-          </a:xfrm>
-          <a:prstGeom prst="ellipse">
-            <a:avLst/>
-          </a:prstGeom>
-          <a:solidFill>
-            <a:srgbClr val="FFFFFF">
-              <a:alpha val="12000"/>
-            </a:srgbClr>
-          </a:solidFill>
-          <a:ln/>
-        </p:spPr>
-      </p:sp>
-      <p:sp>
-        <p:nvSpPr>
-          <p:cNvPr id="4" name="Text 1"/>
+          <p:cNvPr id="5" name="Text 2"/>
           <p:cNvSpPr/>
           <p:nvPr/>
         </p:nvSpPr>
@@ -22319,7 +22460,7 @@
       </p:sp>
       <p:sp>
         <p:nvSpPr>
-          <p:cNvPr id="5" name="Text 2"/>
+          <p:cNvPr id="6" name="Text 3"/>
           <p:cNvSpPr/>
           <p:nvPr/>
         </p:nvSpPr>
@@ -22358,14 +22499,14 @@
       </p:sp>
       <p:sp>
         <p:nvSpPr>
-          <p:cNvPr id="6" name="Text 3"/>
+          <p:cNvPr id="7" name="Text 4"/>
           <p:cNvSpPr/>
           <p:nvPr/>
         </p:nvSpPr>
         <p:spPr>
           <a:xfrm>
             <a:off x="566928" y="2706624"/>
-            <a:ext cx="8778240" cy="822960"/>
+            <a:ext cx="8778240" cy="731520"/>
           </a:xfrm>
           <a:prstGeom prst="rect">
             <a:avLst/>
@@ -22399,7 +22540,7 @@
       </p:sp>
       <p:sp>
         <p:nvSpPr>
-          <p:cNvPr id="7" name="Text 4"/>
+          <p:cNvPr id="8" name="Text 5"/>
           <p:cNvSpPr/>
           <p:nvPr/>
         </p:nvSpPr>
@@ -22438,7 +22579,7 @@
       </p:sp>
       <p:sp>
         <p:nvSpPr>
-          <p:cNvPr id="8" name="Text 5"/>
+          <p:cNvPr id="9" name="Text 6"/>
           <p:cNvSpPr/>
           <p:nvPr/>
         </p:nvSpPr>
@@ -22679,8 +22820,8 @@
         </p:blipFill>
         <p:spPr>
           <a:xfrm>
-            <a:off x="1033272" y="1609344"/>
-            <a:ext cx="1664208" cy="1280160"/>
+            <a:off x="1249680" y="1609344"/>
+            <a:ext cx="1231392" cy="1280160"/>
           </a:xfrm>
           <a:prstGeom prst="rect">
             <a:avLst/>
@@ -22695,7 +22836,7 @@
         </p:nvSpPr>
         <p:spPr>
           <a:xfrm>
-            <a:off x="704088" y="2926080"/>
+            <a:off x="704088" y="2962656"/>
             <a:ext cx="566928" cy="256032"/>
           </a:xfrm>
           <a:prstGeom prst="roundRect">
@@ -22717,7 +22858,7 @@
         </p:nvSpPr>
         <p:spPr>
           <a:xfrm>
-            <a:off x="704088" y="2926080"/>
+            <a:off x="704088" y="2962656"/>
             <a:ext cx="566928" cy="256032"/>
           </a:xfrm>
           <a:prstGeom prst="rect">
@@ -22756,7 +22897,7 @@
         </p:nvSpPr>
         <p:spPr>
           <a:xfrm>
-            <a:off x="749808" y="3236976"/>
+            <a:off x="749808" y="3273552"/>
             <a:ext cx="2231136" cy="512064"/>
           </a:xfrm>
           <a:prstGeom prst="rect">
@@ -22795,8 +22936,8 @@
         </p:nvSpPr>
         <p:spPr>
           <a:xfrm>
-            <a:off x="749808" y="3767328"/>
-            <a:ext cx="2231136" cy="969264"/>
+            <a:off x="749808" y="3803904"/>
+            <a:ext cx="2231136" cy="932688"/>
           </a:xfrm>
           <a:prstGeom prst="rect">
             <a:avLst/>
@@ -22876,8 +23017,8 @@
         </p:blipFill>
         <p:spPr>
           <a:xfrm>
-            <a:off x="3785616" y="1609344"/>
-            <a:ext cx="1792224" cy="1280160"/>
+            <a:off x="3520440" y="1798345"/>
+            <a:ext cx="2322576" cy="902158"/>
           </a:xfrm>
           <a:prstGeom prst="rect">
             <a:avLst/>
@@ -22892,7 +23033,7 @@
         </p:nvSpPr>
         <p:spPr>
           <a:xfrm>
-            <a:off x="3520440" y="2926080"/>
+            <a:off x="3520440" y="2962656"/>
             <a:ext cx="566928" cy="256032"/>
           </a:xfrm>
           <a:prstGeom prst="roundRect">
@@ -22914,7 +23055,7 @@
         </p:nvSpPr>
         <p:spPr>
           <a:xfrm>
-            <a:off x="3520440" y="2926080"/>
+            <a:off x="3520440" y="2962656"/>
             <a:ext cx="566928" cy="256032"/>
           </a:xfrm>
           <a:prstGeom prst="rect">
@@ -22953,7 +23094,7 @@
         </p:nvSpPr>
         <p:spPr>
           <a:xfrm>
-            <a:off x="3566160" y="3236976"/>
+            <a:off x="3566160" y="3273552"/>
             <a:ext cx="2231136" cy="512064"/>
           </a:xfrm>
           <a:prstGeom prst="rect">
@@ -22992,8 +23133,8 @@
         </p:nvSpPr>
         <p:spPr>
           <a:xfrm>
-            <a:off x="3566160" y="3767328"/>
-            <a:ext cx="2231136" cy="969264"/>
+            <a:off x="3566160" y="3803904"/>
+            <a:ext cx="2231136" cy="932688"/>
           </a:xfrm>
           <a:prstGeom prst="rect">
             <a:avLst/>
@@ -23073,8 +23214,8 @@
         </p:blipFill>
         <p:spPr>
           <a:xfrm>
-            <a:off x="6537960" y="1609344"/>
-            <a:ext cx="1920240" cy="1280160"/>
+            <a:off x="6954012" y="1609344"/>
+            <a:ext cx="1088136" cy="1280160"/>
           </a:xfrm>
           <a:prstGeom prst="rect">
             <a:avLst/>
@@ -23089,7 +23230,7 @@
         </p:nvSpPr>
         <p:spPr>
           <a:xfrm>
-            <a:off x="6336792" y="2926080"/>
+            <a:off x="6336792" y="2962656"/>
             <a:ext cx="566928" cy="256032"/>
           </a:xfrm>
           <a:prstGeom prst="roundRect">
@@ -23111,7 +23252,7 @@
         </p:nvSpPr>
         <p:spPr>
           <a:xfrm>
-            <a:off x="6336792" y="2926080"/>
+            <a:off x="6336792" y="2962656"/>
             <a:ext cx="566928" cy="256032"/>
           </a:xfrm>
           <a:prstGeom prst="rect">
@@ -23150,7 +23291,7 @@
         </p:nvSpPr>
         <p:spPr>
           <a:xfrm>
-            <a:off x="6382512" y="3236976"/>
+            <a:off x="6382512" y="3273552"/>
             <a:ext cx="2231136" cy="512064"/>
           </a:xfrm>
           <a:prstGeom prst="rect">
@@ -23189,8 +23330,8 @@
         </p:nvSpPr>
         <p:spPr>
           <a:xfrm>
-            <a:off x="6382512" y="3767328"/>
-            <a:ext cx="2231136" cy="969264"/>
+            <a:off x="6382512" y="3803904"/>
+            <a:ext cx="2231136" cy="932688"/>
           </a:xfrm>
           <a:prstGeom prst="rect">
             <a:avLst/>
@@ -23270,8 +23411,8 @@
         </p:blipFill>
         <p:spPr>
           <a:xfrm>
-            <a:off x="9418320" y="1609344"/>
-            <a:ext cx="1792224" cy="1280160"/>
+            <a:off x="9176512" y="1609344"/>
+            <a:ext cx="2275840" cy="1280160"/>
           </a:xfrm>
           <a:prstGeom prst="rect">
             <a:avLst/>
@@ -23286,7 +23427,7 @@
         </p:nvSpPr>
         <p:spPr>
           <a:xfrm>
-            <a:off x="9153144" y="2926080"/>
+            <a:off x="9153144" y="2962656"/>
             <a:ext cx="566928" cy="256032"/>
           </a:xfrm>
           <a:prstGeom prst="roundRect">
@@ -23308,7 +23449,7 @@
         </p:nvSpPr>
         <p:spPr>
           <a:xfrm>
-            <a:off x="9153144" y="2926080"/>
+            <a:off x="9153144" y="2962656"/>
             <a:ext cx="566928" cy="256032"/>
           </a:xfrm>
           <a:prstGeom prst="rect">
@@ -23347,7 +23488,7 @@
         </p:nvSpPr>
         <p:spPr>
           <a:xfrm>
-            <a:off x="9198864" y="3236976"/>
+            <a:off x="9198864" y="3273552"/>
             <a:ext cx="2231136" cy="512064"/>
           </a:xfrm>
           <a:prstGeom prst="rect">
@@ -23386,8 +23527,8 @@
         </p:nvSpPr>
         <p:spPr>
           <a:xfrm>
-            <a:off x="9198864" y="3767328"/>
-            <a:ext cx="2231136" cy="969264"/>
+            <a:off x="9198864" y="3803904"/>
+            <a:ext cx="2231136" cy="932688"/>
           </a:xfrm>
           <a:prstGeom prst="rect">
             <a:avLst/>
@@ -23983,7 +24124,7 @@
         <p:spPr>
           <a:xfrm>
             <a:off x="566928" y="1517904"/>
-            <a:ext cx="3502152" cy="1298448"/>
+            <a:ext cx="3529584" cy="1298448"/>
           </a:xfrm>
           <a:prstGeom prst="roundRect">
             <a:avLst>
@@ -24068,7 +24209,7 @@
         <p:spPr>
           <a:xfrm>
             <a:off x="1499616" y="1719072"/>
-            <a:ext cx="2368296" cy="365760"/>
+            <a:ext cx="2395728" cy="384048"/>
           </a:xfrm>
           <a:prstGeom prst="rect">
             <a:avLst/>
@@ -24106,8 +24247,8 @@
         </p:nvSpPr>
         <p:spPr>
           <a:xfrm>
-            <a:off x="1499616" y="2103120"/>
-            <a:ext cx="2350008" cy="603504"/>
+            <a:off x="1499616" y="2121408"/>
+            <a:ext cx="2377440" cy="585216"/>
           </a:xfrm>
           <a:prstGeom prst="rect">
             <a:avLst/>
@@ -24131,7 +24272,7 @@
                 <a:ea typeface="Calibri" pitchFamily="34" charset="-122"/>
                 <a:cs typeface="Calibri" pitchFamily="34" charset="-120"/>
               </a:rPr>
-              <a:t>Kepala satuan memimpin perencanaan berbasis data dan refleksi berkala bersama pendidik.</a:t>
+              <a:t>Kepala satuan memimpin perencanaan berbasis data dan refleksi berkala.</a:t>
             </a:r>
             <a:endParaRPr lang="en-US" sz="1100" dirty="0"/>
           </a:p>
@@ -24145,7 +24286,7 @@
         </p:nvSpPr>
         <p:spPr>
           <a:xfrm>
-            <a:off x="3410712" y="2359152"/>
+            <a:off x="3438144" y="2359152"/>
             <a:ext cx="457200" cy="329184"/>
           </a:xfrm>
           <a:prstGeom prst="rect">
@@ -24186,8 +24327,8 @@
         </p:nvSpPr>
         <p:spPr>
           <a:xfrm>
-            <a:off x="4343400" y="1517904"/>
-            <a:ext cx="3502152" cy="1298448"/>
+            <a:off x="4352544" y="1517904"/>
+            <a:ext cx="3529584" cy="1298448"/>
           </a:xfrm>
           <a:prstGeom prst="roundRect">
             <a:avLst>
@@ -24220,7 +24361,7 @@
         </p:nvSpPr>
         <p:spPr>
           <a:xfrm>
-            <a:off x="4581144" y="1792224"/>
+            <a:off x="4590288" y="1792224"/>
             <a:ext cx="585216" cy="585216"/>
           </a:xfrm>
           <a:prstGeom prst="ellipse">
@@ -24255,7 +24396,7 @@
         </p:blipFill>
         <p:spPr>
           <a:xfrm>
-            <a:off x="4721596" y="1932676"/>
+            <a:off x="4730740" y="1932676"/>
             <a:ext cx="304312" cy="304312"/>
           </a:xfrm>
           <a:prstGeom prst="rect">
@@ -24271,8 +24412,8 @@
         </p:nvSpPr>
         <p:spPr>
           <a:xfrm>
-            <a:off x="5276088" y="1719072"/>
-            <a:ext cx="2368296" cy="365760"/>
+            <a:off x="5285232" y="1719072"/>
+            <a:ext cx="2395728" cy="384048"/>
           </a:xfrm>
           <a:prstGeom prst="rect">
             <a:avLst/>
@@ -24310,8 +24451,8 @@
         </p:nvSpPr>
         <p:spPr>
           <a:xfrm>
-            <a:off x="5276088" y="2103120"/>
-            <a:ext cx="2350008" cy="603504"/>
+            <a:off x="5285232" y="2121408"/>
+            <a:ext cx="2377440" cy="585216"/>
           </a:xfrm>
           <a:prstGeom prst="rect">
             <a:avLst/>
@@ -24335,7 +24476,7 @@
                 <a:ea typeface="Calibri" pitchFamily="34" charset="-122"/>
                 <a:cs typeface="Calibri" pitchFamily="34" charset="-120"/>
               </a:rPr>
-              <a:t>Gunakan Dapodik dan capaian 8 indikator untuk menentukan prioritas perbaikan.</a:t>
+              <a:t>Gunakan Dapodik dan capaian 8 indikator untuk menentukan prioritas.</a:t>
             </a:r>
             <a:endParaRPr lang="en-US" sz="1100" dirty="0"/>
           </a:p>
@@ -24349,7 +24490,7 @@
         </p:nvSpPr>
         <p:spPr>
           <a:xfrm>
-            <a:off x="7187184" y="2359152"/>
+            <a:off x="7223760" y="2359152"/>
             <a:ext cx="457200" cy="329184"/>
           </a:xfrm>
           <a:prstGeom prst="rect">
@@ -24390,8 +24531,8 @@
         </p:nvSpPr>
         <p:spPr>
           <a:xfrm>
-            <a:off x="8119872" y="1517904"/>
-            <a:ext cx="3502152" cy="1298448"/>
+            <a:off x="566928" y="3054096"/>
+            <a:ext cx="3529584" cy="1298448"/>
           </a:xfrm>
           <a:prstGeom prst="roundRect">
             <a:avLst>
@@ -24424,7 +24565,7 @@
         </p:nvSpPr>
         <p:spPr>
           <a:xfrm>
-            <a:off x="8357616" y="1792224"/>
+            <a:off x="804672" y="3328416"/>
             <a:ext cx="585216" cy="585216"/>
           </a:xfrm>
           <a:prstGeom prst="ellipse">
@@ -24459,7 +24600,7 @@
         </p:blipFill>
         <p:spPr>
           <a:xfrm>
-            <a:off x="8498068" y="1932676"/>
+            <a:off x="945124" y="3468868"/>
             <a:ext cx="304312" cy="304312"/>
           </a:xfrm>
           <a:prstGeom prst="rect">
@@ -24475,8 +24616,8 @@
         </p:nvSpPr>
         <p:spPr>
           <a:xfrm>
-            <a:off x="9052560" y="1719072"/>
-            <a:ext cx="2368296" cy="365760"/>
+            <a:off x="1499616" y="3255264"/>
+            <a:ext cx="2395728" cy="384048"/>
           </a:xfrm>
           <a:prstGeom prst="rect">
             <a:avLst/>
@@ -24514,8 +24655,8 @@
         </p:nvSpPr>
         <p:spPr>
           <a:xfrm>
-            <a:off x="9052560" y="2103120"/>
-            <a:ext cx="2350008" cy="603504"/>
+            <a:off x="1499616" y="3657600"/>
+            <a:ext cx="2377440" cy="585216"/>
           </a:xfrm>
           <a:prstGeom prst="rect">
             <a:avLst/>
@@ -24539,7 +24680,7 @@
                 <a:ea typeface="Calibri" pitchFamily="34" charset="-122"/>
                 <a:cs typeface="Calibri" pitchFamily="34" charset="-120"/>
               </a:rPr>
-              <a:t>Pilih mitra sesuai indikator yang paling tertinggal, bukan sekadar yang mudah dihubungi.</a:t>
+              <a:t>Pilih mitra sesuai indikator yang paling tertinggal.</a:t>
             </a:r>
             <a:endParaRPr lang="en-US" sz="1100" dirty="0"/>
           </a:p>
@@ -24553,7 +24694,7 @@
         </p:nvSpPr>
         <p:spPr>
           <a:xfrm>
-            <a:off x="10963656" y="2359152"/>
+            <a:off x="3438144" y="3895344"/>
             <a:ext cx="457200" cy="329184"/>
           </a:xfrm>
           <a:prstGeom prst="rect">
@@ -24594,8 +24735,8 @@
         </p:nvSpPr>
         <p:spPr>
           <a:xfrm>
-            <a:off x="566928" y="3090672"/>
-            <a:ext cx="3502152" cy="1298448"/>
+            <a:off x="4352544" y="3054096"/>
+            <a:ext cx="3529584" cy="1298448"/>
           </a:xfrm>
           <a:prstGeom prst="roundRect">
             <a:avLst>
@@ -24628,7 +24769,7 @@
         </p:nvSpPr>
         <p:spPr>
           <a:xfrm>
-            <a:off x="804672" y="3364992"/>
+            <a:off x="4590288" y="3328416"/>
             <a:ext cx="585216" cy="585216"/>
           </a:xfrm>
           <a:prstGeom prst="ellipse">
@@ -24663,7 +24804,7 @@
         </p:blipFill>
         <p:spPr>
           <a:xfrm>
-            <a:off x="945124" y="3505444"/>
+            <a:off x="4730740" y="3468868"/>
             <a:ext cx="304312" cy="304312"/>
           </a:xfrm>
           <a:prstGeom prst="rect">
@@ -24679,8 +24820,8 @@
         </p:nvSpPr>
         <p:spPr>
           <a:xfrm>
-            <a:off x="1499616" y="3291840"/>
-            <a:ext cx="2368296" cy="365760"/>
+            <a:off x="5285232" y="3255264"/>
+            <a:ext cx="2395728" cy="384048"/>
           </a:xfrm>
           <a:prstGeom prst="rect">
             <a:avLst/>
@@ -24718,8 +24859,8 @@
         </p:nvSpPr>
         <p:spPr>
           <a:xfrm>
-            <a:off x="1499616" y="3675888"/>
-            <a:ext cx="2350008" cy="603504"/>
+            <a:off x="5285232" y="3657600"/>
+            <a:ext cx="2377440" cy="585216"/>
           </a:xfrm>
           <a:prstGeom prst="rect">
             <a:avLst/>
@@ -24743,7 +24884,7 @@
                 <a:ea typeface="Calibri" pitchFamily="34" charset="-122"/>
                 <a:cs typeface="Calibri" pitchFamily="34" charset="-120"/>
               </a:rPr>
-              <a:t>Pendidik sebagai penghubung PAUD HI perlu pelatihan, pendampingan, dan kesejahteraan.</a:t>
+              <a:t>Pendidik sebagai penghubung PAUD HI perlu pelatihan dan pendampingan.</a:t>
             </a:r>
             <a:endParaRPr lang="en-US" sz="1100" dirty="0"/>
           </a:p>
@@ -24757,7 +24898,7 @@
         </p:nvSpPr>
         <p:spPr>
           <a:xfrm>
-            <a:off x="3410712" y="3931920"/>
+            <a:off x="7223760" y="3895344"/>
             <a:ext cx="457200" cy="329184"/>
           </a:xfrm>
           <a:prstGeom prst="rect">
@@ -24798,8 +24939,8 @@
         </p:nvSpPr>
         <p:spPr>
           <a:xfrm>
-            <a:off x="4343400" y="3090672"/>
-            <a:ext cx="3502152" cy="1298448"/>
+            <a:off x="566928" y="4590288"/>
+            <a:ext cx="3529584" cy="1298448"/>
           </a:xfrm>
           <a:prstGeom prst="roundRect">
             <a:avLst>
@@ -24832,7 +24973,7 @@
         </p:nvSpPr>
         <p:spPr>
           <a:xfrm>
-            <a:off x="4581144" y="3364992"/>
+            <a:off x="804672" y="4864608"/>
             <a:ext cx="585216" cy="585216"/>
           </a:xfrm>
           <a:prstGeom prst="ellipse">
@@ -24867,7 +25008,7 @@
         </p:blipFill>
         <p:spPr>
           <a:xfrm>
-            <a:off x="4721596" y="3505444"/>
+            <a:off x="945124" y="5005060"/>
             <a:ext cx="304312" cy="304312"/>
           </a:xfrm>
           <a:prstGeom prst="rect">
@@ -24883,8 +25024,8 @@
         </p:nvSpPr>
         <p:spPr>
           <a:xfrm>
-            <a:off x="5276088" y="3291840"/>
-            <a:ext cx="2368296" cy="365760"/>
+            <a:off x="1499616" y="4791456"/>
+            <a:ext cx="2395728" cy="384048"/>
           </a:xfrm>
           <a:prstGeom prst="rect">
             <a:avLst/>
@@ -24922,8 +25063,8 @@
         </p:nvSpPr>
         <p:spPr>
           <a:xfrm>
-            <a:off x="5276088" y="3675888"/>
-            <a:ext cx="2350008" cy="603504"/>
+            <a:off x="1499616" y="5193792"/>
+            <a:ext cx="2377440" cy="585216"/>
           </a:xfrm>
           <a:prstGeom prst="rect">
             <a:avLst/>
@@ -24947,7 +25088,7 @@
                 <a:ea typeface="Calibri" pitchFamily="34" charset="-122"/>
                 <a:cs typeface="Calibri" pitchFamily="34" charset="-120"/>
               </a:rPr>
-              <a:t>Prioritaskan sanitasi, air bersih, dan lingkungan bermain yang aman serta inklusif.</a:t>
+              <a:t>Prioritaskan sanitasi, air bersih, dan ruang bermain yang aman.</a:t>
             </a:r>
             <a:endParaRPr lang="en-US" sz="1100" dirty="0"/>
           </a:p>
@@ -24961,7 +25102,7 @@
         </p:nvSpPr>
         <p:spPr>
           <a:xfrm>
-            <a:off x="7187184" y="3931920"/>
+            <a:off x="3438144" y="5431536"/>
             <a:ext cx="457200" cy="329184"/>
           </a:xfrm>
           <a:prstGeom prst="rect">
@@ -25002,8 +25143,8 @@
         </p:nvSpPr>
         <p:spPr>
           <a:xfrm>
-            <a:off x="8119872" y="3090672"/>
-            <a:ext cx="3502152" cy="1298448"/>
+            <a:off x="4352544" y="4590288"/>
+            <a:ext cx="3529584" cy="1298448"/>
           </a:xfrm>
           <a:prstGeom prst="roundRect">
             <a:avLst>
@@ -25036,7 +25177,7 @@
         </p:nvSpPr>
         <p:spPr>
           <a:xfrm>
-            <a:off x="8357616" y="3364992"/>
+            <a:off x="4590288" y="4864608"/>
             <a:ext cx="585216" cy="585216"/>
           </a:xfrm>
           <a:prstGeom prst="ellipse">
@@ -25071,7 +25212,7 @@
         </p:blipFill>
         <p:spPr>
           <a:xfrm>
-            <a:off x="8498068" y="3505444"/>
+            <a:off x="4730740" y="5005060"/>
             <a:ext cx="304312" cy="304312"/>
           </a:xfrm>
           <a:prstGeom prst="rect">
@@ -25087,8 +25228,8 @@
         </p:nvSpPr>
         <p:spPr>
           <a:xfrm>
-            <a:off x="9052560" y="3291840"/>
-            <a:ext cx="2368296" cy="365760"/>
+            <a:off x="5285232" y="4791456"/>
+            <a:ext cx="2395728" cy="384048"/>
           </a:xfrm>
           <a:prstGeom prst="rect">
             <a:avLst/>
@@ -25126,8 +25267,8 @@
         </p:nvSpPr>
         <p:spPr>
           <a:xfrm>
-            <a:off x="9052560" y="3675888"/>
-            <a:ext cx="2350008" cy="603504"/>
+            <a:off x="5285232" y="5193792"/>
+            <a:ext cx="2377440" cy="585216"/>
           </a:xfrm>
           <a:prstGeom prst="rect">
             <a:avLst/>
@@ -25151,7 +25292,7 @@
                 <a:ea typeface="Calibri" pitchFamily="34" charset="-122"/>
                 <a:cs typeface="Calibri" pitchFamily="34" charset="-120"/>
               </a:rPr>
-              <a:t>Kelas orang tua yang konsisten menjaga kesinambungan stimulasi di rumah.</a:t>
+              <a:t>Kelas orang tua yang konsisten menjaga kesinambungan stimulasi.</a:t>
             </a:r>
             <a:endParaRPr lang="en-US" sz="1100" dirty="0"/>
           </a:p>
@@ -25165,7 +25306,7 @@
         </p:nvSpPr>
         <p:spPr>
           <a:xfrm>
-            <a:off x="10963656" y="3931920"/>
+            <a:off x="7223760" y="5431536"/>
             <a:ext cx="457200" cy="329184"/>
           </a:xfrm>
           <a:prstGeom prst="rect">
@@ -25198,9 +25339,43 @@
           </a:p>
         </p:txBody>
       </p:sp>
+      <p:sp>
+        <p:nvSpPr>
+          <p:cNvPr id="42" name="Shape 34"/>
+          <p:cNvSpPr/>
+          <p:nvPr/>
+        </p:nvSpPr>
+        <p:spPr>
+          <a:xfrm>
+            <a:off x="7854696" y="1655064"/>
+            <a:ext cx="3833110" cy="2212848"/>
+          </a:xfrm>
+          <a:prstGeom prst="roundRect">
+            <a:avLst>
+              <a:gd name="adj" fmla="val 5785"/>
+            </a:avLst>
+          </a:prstGeom>
+          <a:solidFill>
+            <a:srgbClr val="FFFFFF"/>
+          </a:solidFill>
+          <a:ln w="12700">
+            <a:solidFill>
+              <a:srgbClr val="333333"/>
+            </a:solidFill>
+            <a:prstDash val="solid"/>
+          </a:ln>
+          <a:effectLst>
+            <a:outerShdw sx="100000" sy="100000" kx="0" ky="0" algn="bl" rotWithShape="0" blurRad="177800" dist="38100" dir="5400000">
+              <a:srgbClr val="0F3352">
+                <a:alpha val="10000"/>
+              </a:srgbClr>
+            </a:outerShdw>
+          </a:effectLst>
+        </p:spPr>
+      </p:sp>
       <p:pic>
         <p:nvPicPr>
-          <p:cNvPr id="42" name="Image 6" descr="preencoded.png">    </p:cNvPr>
+          <p:cNvPr id="43" name="Image 6" descr="preencoded.png">    </p:cNvPr>
           <p:cNvPicPr>
             <a:picLocks noChangeAspect="1"/>
           </p:cNvPicPr>
@@ -25214,8 +25389,8 @@
         </p:blipFill>
         <p:spPr>
           <a:xfrm>
-            <a:off x="1615288" y="4443984"/>
-            <a:ext cx="8961120" cy="1886552"/>
+            <a:off x="7936992" y="1737360"/>
+            <a:ext cx="3668518" cy="2048256"/>
           </a:xfrm>
           <a:prstGeom prst="rect">
             <a:avLst/>
@@ -25224,7 +25399,85 @@
       </p:pic>
       <p:sp>
         <p:nvSpPr>
-          <p:cNvPr id="43" name="Text 34"/>
+          <p:cNvPr id="44" name="Text 35"/>
+          <p:cNvSpPr/>
+          <p:nvPr/>
+        </p:nvSpPr>
+        <p:spPr>
+          <a:xfrm>
+            <a:off x="7936992" y="4005072"/>
+            <a:ext cx="3657600" cy="292608"/>
+          </a:xfrm>
+          <a:prstGeom prst="rect">
+            <a:avLst/>
+          </a:prstGeom>
+          <a:noFill/>
+          <a:ln/>
+        </p:spPr>
+        <p:txBody>
+          <a:bodyPr wrap="square" lIns="0" tIns="0" rIns="0" bIns="0" rtlCol="0" anchor="ctr"/>
+          <a:lstStyle/>
+          <a:p>
+            <a:pPr indent="0" marL="0">
+              <a:buNone/>
+            </a:pPr>
+            <a:r>
+              <a:rPr lang="en-US" sz="1300" b="1" dirty="0">
+                <a:solidFill>
+                  <a:srgbClr val="173753"/>
+                </a:solidFill>
+                <a:latin typeface="Calibri" pitchFamily="34" charset="0"/>
+                <a:ea typeface="Calibri" pitchFamily="34" charset="-122"/>
+                <a:cs typeface="Calibri" pitchFamily="34" charset="-120"/>
+              </a:rPr>
+              <a:t>Strategi Direktorat PAUD</a:t>
+            </a:r>
+            <a:endParaRPr lang="en-US" sz="1300" dirty="0"/>
+          </a:p>
+        </p:txBody>
+      </p:sp>
+      <p:sp>
+        <p:nvSpPr>
+          <p:cNvPr id="45" name="Text 36"/>
+          <p:cNvSpPr/>
+          <p:nvPr/>
+        </p:nvSpPr>
+        <p:spPr>
+          <a:xfrm>
+            <a:off x="7936992" y="4315968"/>
+            <a:ext cx="3657600" cy="1554480"/>
+          </a:xfrm>
+          <a:prstGeom prst="rect">
+            <a:avLst/>
+          </a:prstGeom>
+          <a:noFill/>
+          <a:ln/>
+        </p:spPr>
+        <p:txBody>
+          <a:bodyPr wrap="square" lIns="0" tIns="0" rIns="0" bIns="0" rtlCol="0" anchor="t"/>
+          <a:lstStyle/>
+          <a:p>
+            <a:pPr indent="0" marL="0">
+              <a:buNone/>
+            </a:pPr>
+            <a:r>
+              <a:rPr lang="en-US" sz="1100" dirty="0">
+                <a:solidFill>
+                  <a:srgbClr val="3E5C77"/>
+                </a:solidFill>
+                <a:latin typeface="Calibri" pitchFamily="34" charset="0"/>
+                <a:ea typeface="Calibri" pitchFamily="34" charset="-122"/>
+                <a:cs typeface="Calibri" pitchFamily="34" charset="-120"/>
+              </a:rPr>
+              <a:t>Percepatan pemenuhan 8 indikator PAUD HI dijalankan melalui koordinasi lintas sektor, peningkatan pemahaman, penyaluran bantuan, pengembangan dashboard, serta kajian dampak. Strategi satuan sebaiknya menyambung ke lima jalur ini.</a:t>
+            </a:r>
+            <a:endParaRPr lang="en-US" sz="1100" dirty="0"/>
+          </a:p>
+        </p:txBody>
+      </p:sp>
+      <p:sp>
+        <p:nvSpPr>
+          <p:cNvPr id="46" name="Text 37"/>
           <p:cNvSpPr/>
           <p:nvPr/>
         </p:nvSpPr>
@@ -25263,7 +25516,7 @@
       </p:sp>
       <p:sp>
         <p:nvSpPr>
-          <p:cNvPr id="44" name="Text 35"/>
+          <p:cNvPr id="47" name="Text 38"/>
           <p:cNvSpPr/>
           <p:nvPr/>
         </p:nvSpPr>
@@ -27614,7 +27867,7 @@
         <p:spPr>
           <a:xfrm>
             <a:off x="566928" y="4864608"/>
-            <a:ext cx="7223760" cy="1060704"/>
+            <a:ext cx="8595360" cy="1060704"/>
           </a:xfrm>
           <a:prstGeom prst="roundRect">
             <a:avLst>
@@ -27687,7 +27940,7 @@
         <p:spPr>
           <a:xfrm>
             <a:off x="877824" y="5285232"/>
-            <a:ext cx="6620256" cy="566928"/>
+            <a:ext cx="7991856" cy="566928"/>
           </a:xfrm>
           <a:prstGeom prst="rect">
             <a:avLst/>
@@ -27733,8 +27986,8 @@
         </p:blipFill>
         <p:spPr>
           <a:xfrm>
-            <a:off x="9889236" y="4901184"/>
-            <a:ext cx="1735531" cy="1335024"/>
+            <a:off x="10489931" y="4791456"/>
+            <a:ext cx="860516" cy="1554480"/>
           </a:xfrm>
           <a:prstGeom prst="rect">
             <a:avLst/>
@@ -30691,9 +30944,43 @@
           </a:p>
         </p:txBody>
       </p:sp>
+      <p:sp>
+        <p:nvSpPr>
+          <p:cNvPr id="36" name="Shape 28"/>
+          <p:cNvSpPr/>
+          <p:nvPr/>
+        </p:nvSpPr>
+        <p:spPr>
+          <a:xfrm>
+            <a:off x="7552944" y="2203704"/>
+            <a:ext cx="3705651" cy="3364992"/>
+          </a:xfrm>
+          <a:prstGeom prst="roundRect">
+            <a:avLst>
+              <a:gd name="adj" fmla="val 3804"/>
+            </a:avLst>
+          </a:prstGeom>
+          <a:solidFill>
+            <a:srgbClr val="FFFFFF"/>
+          </a:solidFill>
+          <a:ln w="12700">
+            <a:solidFill>
+              <a:srgbClr val="333333"/>
+            </a:solidFill>
+            <a:prstDash val="solid"/>
+          </a:ln>
+          <a:effectLst>
+            <a:outerShdw sx="100000" sy="100000" kx="0" ky="0" algn="bl" rotWithShape="0" blurRad="177800" dist="38100" dir="5400000">
+              <a:srgbClr val="0F3352">
+                <a:alpha val="10000"/>
+              </a:srgbClr>
+            </a:outerShdw>
+          </a:effectLst>
+        </p:spPr>
+      </p:sp>
       <p:pic>
         <p:nvPicPr>
-          <p:cNvPr id="36" name="Image 6" descr="preencoded.png">    </p:cNvPr>
+          <p:cNvPr id="37" name="Image 6" descr="preencoded.png">    </p:cNvPr>
           <p:cNvPicPr>
             <a:picLocks noChangeAspect="1"/>
           </p:cNvPicPr>
@@ -30707,8 +30994,8 @@
         </p:blipFill>
         <p:spPr>
           <a:xfrm>
-            <a:off x="7498080" y="2926080"/>
-            <a:ext cx="4114800" cy="2606040"/>
+            <a:off x="7635240" y="2286000"/>
+            <a:ext cx="3541059" cy="3200400"/>
           </a:xfrm>
           <a:prstGeom prst="rect">
             <a:avLst/>
@@ -30717,14 +31004,14 @@
       </p:pic>
       <p:sp>
         <p:nvSpPr>
-          <p:cNvPr id="37" name="Text 28"/>
-          <p:cNvSpPr/>
-          <p:nvPr/>
-        </p:nvSpPr>
-        <p:spPr>
-          <a:xfrm>
-            <a:off x="7498080" y="1645920"/>
-            <a:ext cx="4114800" cy="1097280"/>
+          <p:cNvPr id="38" name="Text 29"/>
+          <p:cNvSpPr/>
+          <p:nvPr/>
+        </p:nvSpPr>
+        <p:spPr>
+          <a:xfrm>
+            <a:off x="7635240" y="1517904"/>
+            <a:ext cx="3931920" cy="731520"/>
           </a:xfrm>
           <a:prstGeom prst="rect">
             <a:avLst/>
@@ -30740,7 +31027,7 @@
               <a:buNone/>
             </a:pPr>
             <a:r>
-              <a:rPr lang="en-US" sz="1400" i="1" dirty="0">
+              <a:rPr lang="en-US" sz="1350" i="1" dirty="0">
                 <a:solidFill>
                   <a:srgbClr val="176B44"/>
                 </a:solidFill>
@@ -30750,13 +31037,13 @@
               </a:rPr>
               <a:t>“Anak belajar paling baik ketika seluruh kebutuhannya terpenuhi — bukan hanya kebutuhan belajarnya.”</a:t>
             </a:r>
-            <a:endParaRPr lang="en-US" sz="1400" dirty="0"/>
-          </a:p>
-        </p:txBody>
-      </p:sp>
-      <p:sp>
-        <p:nvSpPr>
-          <p:cNvPr id="38" name="Text 29"/>
+            <a:endParaRPr lang="en-US" sz="1350" dirty="0"/>
+          </a:p>
+        </p:txBody>
+      </p:sp>
+      <p:sp>
+        <p:nvSpPr>
+          <p:cNvPr id="39" name="Text 30"/>
           <p:cNvSpPr/>
           <p:nvPr/>
         </p:nvSpPr>
@@ -30795,7 +31082,7 @@
       </p:sp>
       <p:sp>
         <p:nvSpPr>
-          <p:cNvPr id="39" name="Text 30"/>
+          <p:cNvPr id="40" name="Text 31"/>
           <p:cNvSpPr/>
           <p:nvPr/>
         </p:nvSpPr>
@@ -30864,9 +31151,87 @@
           <a:chExt cx="0" cy="0"/>
         </a:xfrm>
       </p:grpSpPr>
+      <p:sp>
+        <p:nvSpPr>
+          <p:cNvPr id="2" name="Shape 0"/>
+          <p:cNvSpPr/>
+          <p:nvPr/>
+        </p:nvSpPr>
+        <p:spPr>
+          <a:xfrm>
+            <a:off x="7680960" y="-2194560"/>
+            <a:ext cx="6949440" cy="6949440"/>
+          </a:xfrm>
+          <a:prstGeom prst="ellipse">
+            <a:avLst/>
+          </a:prstGeom>
+          <a:solidFill>
+            <a:srgbClr val="2FA36B">
+              <a:alpha val="38000"/>
+            </a:srgbClr>
+          </a:solidFill>
+          <a:ln/>
+        </p:spPr>
+      </p:sp>
+      <p:sp>
+        <p:nvSpPr>
+          <p:cNvPr id="3" name="Shape 1"/>
+          <p:cNvSpPr/>
+          <p:nvPr/>
+        </p:nvSpPr>
+        <p:spPr>
+          <a:xfrm>
+            <a:off x="-2011680" y="3108960"/>
+            <a:ext cx="4023360" cy="4023360"/>
+          </a:xfrm>
+          <a:prstGeom prst="ellipse">
+            <a:avLst/>
+          </a:prstGeom>
+          <a:solidFill>
+            <a:srgbClr val="F5871F">
+              <a:alpha val="32000"/>
+            </a:srgbClr>
+          </a:solidFill>
+          <a:ln/>
+        </p:spPr>
+      </p:sp>
+      <p:sp>
+        <p:nvSpPr>
+          <p:cNvPr id="4" name="Shape 2"/>
+          <p:cNvSpPr/>
+          <p:nvPr/>
+        </p:nvSpPr>
+        <p:spPr>
+          <a:xfrm>
+            <a:off x="6378801" y="1655064"/>
+            <a:ext cx="5328263" cy="3456432"/>
+          </a:xfrm>
+          <a:prstGeom prst="roundRect">
+            <a:avLst>
+              <a:gd name="adj" fmla="val 3704"/>
+            </a:avLst>
+          </a:prstGeom>
+          <a:solidFill>
+            <a:srgbClr val="FFFFFF"/>
+          </a:solidFill>
+          <a:ln w="12700">
+            <a:solidFill>
+              <a:srgbClr val="333333"/>
+            </a:solidFill>
+            <a:prstDash val="solid"/>
+          </a:ln>
+          <a:effectLst>
+            <a:outerShdw sx="100000" sy="100000" kx="0" ky="0" algn="bl" rotWithShape="0" blurRad="177800" dist="38100" dir="5400000">
+              <a:srgbClr val="0F3352">
+                <a:alpha val="10000"/>
+              </a:srgbClr>
+            </a:outerShdw>
+          </a:effectLst>
+        </p:spPr>
+      </p:sp>
       <p:pic>
         <p:nvPicPr>
-          <p:cNvPr id="2" name="Image 0" descr="preencoded.png">    </p:cNvPr>
+          <p:cNvPr id="5" name="Image 0" descr="preencoded.png">    </p:cNvPr>
           <p:cNvPicPr>
             <a:picLocks noChangeAspect="1"/>
           </p:cNvPicPr>
@@ -30880,8 +31245,8 @@
         </p:blipFill>
         <p:spPr>
           <a:xfrm>
-            <a:off x="0" y="3957217"/>
-            <a:ext cx="12191695" cy="2900783"/>
+            <a:off x="6461097" y="1737360"/>
+            <a:ext cx="5163671" cy="3291840"/>
           </a:xfrm>
           <a:prstGeom prst="rect">
             <a:avLst/>
@@ -30890,58 +31255,14 @@
       </p:pic>
       <p:sp>
         <p:nvSpPr>
-          <p:cNvPr id="3" name="Shape 0"/>
-          <p:cNvSpPr/>
-          <p:nvPr/>
-        </p:nvSpPr>
-        <p:spPr>
-          <a:xfrm>
-            <a:off x="8229600" y="-1645920"/>
-            <a:ext cx="5486400" cy="5486400"/>
-          </a:xfrm>
-          <a:prstGeom prst="ellipse">
-            <a:avLst/>
-          </a:prstGeom>
-          <a:solidFill>
-            <a:srgbClr val="2FA36B">
-              <a:alpha val="38000"/>
-            </a:srgbClr>
-          </a:solidFill>
-          <a:ln/>
-        </p:spPr>
-      </p:sp>
-      <p:sp>
-        <p:nvSpPr>
-          <p:cNvPr id="4" name="Shape 1"/>
-          <p:cNvSpPr/>
-          <p:nvPr/>
-        </p:nvSpPr>
-        <p:spPr>
-          <a:xfrm>
-            <a:off x="-1645920" y="1463040"/>
-            <a:ext cx="3291840" cy="3291840"/>
-          </a:xfrm>
-          <a:prstGeom prst="ellipse">
-            <a:avLst/>
-          </a:prstGeom>
-          <a:solidFill>
-            <a:srgbClr val="F5871F">
-              <a:alpha val="32000"/>
-            </a:srgbClr>
-          </a:solidFill>
-          <a:ln/>
-        </p:spPr>
-      </p:sp>
-      <p:sp>
-        <p:nvSpPr>
-          <p:cNvPr id="5" name="Text 2"/>
-          <p:cNvSpPr/>
-          <p:nvPr/>
-        </p:nvSpPr>
-        <p:spPr>
-          <a:xfrm>
-            <a:off x="566928" y="548640"/>
-            <a:ext cx="8229600" cy="384048"/>
+          <p:cNvPr id="6" name="Text 3"/>
+          <p:cNvSpPr/>
+          <p:nvPr/>
+        </p:nvSpPr>
+        <p:spPr>
+          <a:xfrm>
+            <a:off x="566928" y="1005840"/>
+            <a:ext cx="6400800" cy="384048"/>
           </a:xfrm>
           <a:prstGeom prst="rect">
             <a:avLst/>
@@ -30973,14 +31294,14 @@
       </p:sp>
       <p:sp>
         <p:nvSpPr>
-          <p:cNvPr id="6" name="Text 3"/>
-          <p:cNvSpPr/>
-          <p:nvPr/>
-        </p:nvSpPr>
-        <p:spPr>
-          <a:xfrm>
-            <a:off x="566928" y="932688"/>
-            <a:ext cx="8778240" cy="1316736"/>
+          <p:cNvPr id="7" name="Text 4"/>
+          <p:cNvSpPr/>
+          <p:nvPr/>
+        </p:nvSpPr>
+        <p:spPr>
+          <a:xfrm>
+            <a:off x="566928" y="1426464"/>
+            <a:ext cx="5806440" cy="1554480"/>
           </a:xfrm>
           <a:prstGeom prst="rect">
             <a:avLst/>
@@ -30994,12 +31315,12 @@
           <a:p>
             <a:pPr indent="0" marL="0">
               <a:lnSpc>
-                <a:spcPts val="4000"/>
+                <a:spcPts val="3100"/>
               </a:lnSpc>
               <a:buNone/>
             </a:pPr>
             <a:r>
-              <a:rPr lang="en-US" sz="3400" b="1" dirty="0">
+              <a:rPr lang="en-US" sz="2700" b="1" dirty="0">
                 <a:solidFill>
                   <a:srgbClr val="FFFFFF"/>
                 </a:solidFill>
@@ -31009,17 +31330,17 @@
               </a:rPr>
               <a:t>Anak Indonesia Tumbuh Utuh,</a:t>
             </a:r>
-            <a:endParaRPr lang="en-US" sz="3400" dirty="0"/>
+            <a:endParaRPr lang="en-US" sz="2700" dirty="0"/>
           </a:p>
           <a:p>
             <a:pPr indent="0" marL="0">
               <a:lnSpc>
-                <a:spcPts val="4000"/>
+                <a:spcPts val="3100"/>
               </a:lnSpc>
               <a:buNone/>
             </a:pPr>
             <a:r>
-              <a:rPr lang="en-US" sz="3400" b="1" dirty="0">
+              <a:rPr lang="en-US" sz="2700" b="1" dirty="0">
                 <a:solidFill>
                   <a:srgbClr val="FFFFFF"/>
                 </a:solidFill>
@@ -31029,20 +31350,20 @@
               </a:rPr>
               <a:t>Layanan PAUD Bermutu</a:t>
             </a:r>
-            <a:endParaRPr lang="en-US" sz="3400" dirty="0"/>
-          </a:p>
-        </p:txBody>
-      </p:sp>
-      <p:sp>
-        <p:nvSpPr>
-          <p:cNvPr id="7" name="Text 4"/>
-          <p:cNvSpPr/>
-          <p:nvPr/>
-        </p:nvSpPr>
-        <p:spPr>
-          <a:xfrm>
-            <a:off x="566928" y="2286000"/>
-            <a:ext cx="7680960" cy="658368"/>
+            <a:endParaRPr lang="en-US" sz="2700" dirty="0"/>
+          </a:p>
+        </p:txBody>
+      </p:sp>
+      <p:sp>
+        <p:nvSpPr>
+          <p:cNvPr id="8" name="Text 5"/>
+          <p:cNvSpPr/>
+          <p:nvPr/>
+        </p:nvSpPr>
+        <p:spPr>
+          <a:xfrm>
+            <a:off x="566928" y="3127248"/>
+            <a:ext cx="5577840" cy="914400"/>
           </a:xfrm>
           <a:prstGeom prst="rect">
             <a:avLst/>
@@ -31058,7 +31379,7 @@
               <a:buNone/>
             </a:pPr>
             <a:r>
-              <a:rPr lang="en-US" sz="1350" dirty="0">
+              <a:rPr lang="en-US" sz="1300" dirty="0">
                 <a:solidFill>
                   <a:srgbClr val="B9DBF6"/>
                 </a:solidFill>
@@ -31068,19 +31389,19 @@
               </a:rPr>
               <a:t>Kemitraan strategis bukan menambah pekerjaan satuan PAUD — ia membagi beban, memperluas dukungan, dan memastikan tidak ada satu pun kebutuhan anak yang terlewat.</a:t>
             </a:r>
-            <a:endParaRPr lang="en-US" sz="1350" dirty="0"/>
-          </a:p>
-        </p:txBody>
-      </p:sp>
-      <p:sp>
-        <p:nvSpPr>
-          <p:cNvPr id="8" name="Shape 5"/>
-          <p:cNvSpPr/>
-          <p:nvPr/>
-        </p:nvSpPr>
-        <p:spPr>
-          <a:xfrm>
-            <a:off x="566928" y="2999232"/>
+            <a:endParaRPr lang="en-US" sz="1300" dirty="0"/>
+          </a:p>
+        </p:txBody>
+      </p:sp>
+      <p:sp>
+        <p:nvSpPr>
+          <p:cNvPr id="9" name="Shape 6"/>
+          <p:cNvSpPr/>
+          <p:nvPr/>
+        </p:nvSpPr>
+        <p:spPr>
+          <a:xfrm>
+            <a:off x="566928" y="4059936"/>
             <a:ext cx="2461565" cy="402336"/>
           </a:xfrm>
           <a:prstGeom prst="roundRect">
@@ -31096,13 +31417,13 @@
       </p:sp>
       <p:sp>
         <p:nvSpPr>
-          <p:cNvPr id="9" name="Text 6"/>
-          <p:cNvSpPr/>
-          <p:nvPr/>
-        </p:nvSpPr>
-        <p:spPr>
-          <a:xfrm>
-            <a:off x="566928" y="2999232"/>
+          <p:cNvPr id="10" name="Text 7"/>
+          <p:cNvSpPr/>
+          <p:nvPr/>
+        </p:nvSpPr>
+        <p:spPr>
+          <a:xfrm>
+            <a:off x="566928" y="4059936"/>
             <a:ext cx="2461565" cy="402336"/>
           </a:xfrm>
           <a:prstGeom prst="rect">
@@ -31135,13 +31456,13 @@
       </p:sp>
       <p:sp>
         <p:nvSpPr>
-          <p:cNvPr id="10" name="Shape 7"/>
-          <p:cNvSpPr/>
-          <p:nvPr/>
-        </p:nvSpPr>
-        <p:spPr>
-          <a:xfrm>
-            <a:off x="3193085" y="2999232"/>
+          <p:cNvPr id="11" name="Shape 8"/>
+          <p:cNvSpPr/>
+          <p:nvPr/>
+        </p:nvSpPr>
+        <p:spPr>
+          <a:xfrm>
+            <a:off x="3193085" y="4059936"/>
             <a:ext cx="2551176" cy="402336"/>
           </a:xfrm>
           <a:prstGeom prst="roundRect">
@@ -31157,13 +31478,13 @@
       </p:sp>
       <p:sp>
         <p:nvSpPr>
-          <p:cNvPr id="11" name="Text 8"/>
-          <p:cNvSpPr/>
-          <p:nvPr/>
-        </p:nvSpPr>
-        <p:spPr>
-          <a:xfrm>
-            <a:off x="3193085" y="2999232"/>
+          <p:cNvPr id="12" name="Text 9"/>
+          <p:cNvSpPr/>
+          <p:nvPr/>
+        </p:nvSpPr>
+        <p:spPr>
+          <a:xfrm>
+            <a:off x="3193085" y="4059936"/>
             <a:ext cx="2551176" cy="402336"/>
           </a:xfrm>
           <a:prstGeom prst="rect">
@@ -31196,13 +31517,13 @@
       </p:sp>
       <p:sp>
         <p:nvSpPr>
-          <p:cNvPr id="12" name="Shape 9"/>
-          <p:cNvSpPr/>
-          <p:nvPr/>
-        </p:nvSpPr>
-        <p:spPr>
-          <a:xfrm>
-            <a:off x="5908853" y="2999232"/>
+          <p:cNvPr id="13" name="Shape 10"/>
+          <p:cNvSpPr/>
+          <p:nvPr/>
+        </p:nvSpPr>
+        <p:spPr>
+          <a:xfrm>
+            <a:off x="566928" y="4572000"/>
             <a:ext cx="2640787" cy="402336"/>
           </a:xfrm>
           <a:prstGeom prst="roundRect">
@@ -31218,13 +31539,13 @@
       </p:sp>
       <p:sp>
         <p:nvSpPr>
-          <p:cNvPr id="13" name="Text 10"/>
-          <p:cNvSpPr/>
-          <p:nvPr/>
-        </p:nvSpPr>
-        <p:spPr>
-          <a:xfrm>
-            <a:off x="5908853" y="2999232"/>
+          <p:cNvPr id="14" name="Text 11"/>
+          <p:cNvSpPr/>
+          <p:nvPr/>
+        </p:nvSpPr>
+        <p:spPr>
+          <a:xfrm>
+            <a:off x="566928" y="4572000"/>
             <a:ext cx="2640787" cy="402336"/>
           </a:xfrm>
           <a:prstGeom prst="rect">
@@ -31257,13 +31578,13 @@
       </p:sp>
       <p:sp>
         <p:nvSpPr>
-          <p:cNvPr id="14" name="Text 11"/>
-          <p:cNvSpPr/>
-          <p:nvPr/>
-        </p:nvSpPr>
-        <p:spPr>
-          <a:xfrm>
-            <a:off x="566928" y="3474720"/>
+          <p:cNvPr id="15" name="Text 12"/>
+          <p:cNvSpPr/>
+          <p:nvPr/>
+        </p:nvSpPr>
+        <p:spPr>
+          <a:xfrm>
+            <a:off x="566928" y="5212080"/>
             <a:ext cx="5486400" cy="457200"/>
           </a:xfrm>
           <a:prstGeom prst="rect">
@@ -31280,7 +31601,7 @@
               <a:buNone/>
             </a:pPr>
             <a:r>
-              <a:rPr lang="en-US" sz="2400" b="1" dirty="0">
+              <a:rPr lang="en-US" sz="2600" b="1" dirty="0">
                 <a:solidFill>
                   <a:srgbClr val="FFFFFF"/>
                 </a:solidFill>
@@ -31290,7 +31611,46 @@
               </a:rPr>
               <a:t>Terima kasih</a:t>
             </a:r>
-            <a:endParaRPr lang="en-US" sz="2400" dirty="0"/>
+            <a:endParaRPr lang="en-US" sz="2600" dirty="0"/>
+          </a:p>
+        </p:txBody>
+      </p:sp>
+      <p:sp>
+        <p:nvSpPr>
+          <p:cNvPr id="16" name="Text 13"/>
+          <p:cNvSpPr/>
+          <p:nvPr/>
+        </p:nvSpPr>
+        <p:spPr>
+          <a:xfrm>
+            <a:off x="566928" y="5669280"/>
+            <a:ext cx="5486400" cy="292608"/>
+          </a:xfrm>
+          <a:prstGeom prst="rect">
+            <a:avLst/>
+          </a:prstGeom>
+          <a:noFill/>
+          <a:ln/>
+        </p:spPr>
+        <p:txBody>
+          <a:bodyPr wrap="square" lIns="0" tIns="0" rIns="0" bIns="0" rtlCol="0" anchor="ctr"/>
+          <a:lstStyle/>
+          <a:p>
+            <a:pPr indent="0" marL="0">
+              <a:buNone/>
+            </a:pPr>
+            <a:r>
+              <a:rPr lang="en-US" sz="1200" dirty="0">
+                <a:solidFill>
+                  <a:srgbClr val="B9DBF6"/>
+                </a:solidFill>
+                <a:latin typeface="Calibri" pitchFamily="34" charset="0"/>
+                <a:ea typeface="Calibri" pitchFamily="34" charset="-122"/>
+                <a:cs typeface="Calibri" pitchFamily="34" charset="-120"/>
+              </a:rPr>
+              <a:t>Direktorat Pendidikan Anak Usia Dini</a:t>
+            </a:r>
+            <a:endParaRPr lang="en-US" sz="1200" dirty="0"/>
           </a:p>
         </p:txBody>
       </p:sp>
@@ -31464,8 +31824,8 @@
         </p:blipFill>
         <p:spPr>
           <a:xfrm>
-            <a:off x="566928" y="1600200"/>
-            <a:ext cx="3931920" cy="3931920"/>
+            <a:off x="566928" y="1572768"/>
+            <a:ext cx="4774977" cy="1810512"/>
           </a:xfrm>
           <a:prstGeom prst="rect">
             <a:avLst/>
@@ -31474,14 +31834,111 @@
       </p:pic>
       <p:sp>
         <p:nvSpPr>
-          <p:cNvPr id="7" name="Shape 4"/>
-          <p:cNvSpPr/>
-          <p:nvPr/>
-        </p:nvSpPr>
-        <p:spPr>
-          <a:xfrm>
-            <a:off x="5029200" y="1645920"/>
-            <a:ext cx="6595567" cy="1207008"/>
+          <p:cNvPr id="7" name="Text 4"/>
+          <p:cNvSpPr/>
+          <p:nvPr/>
+        </p:nvSpPr>
+        <p:spPr>
+          <a:xfrm>
+            <a:off x="1024128" y="1984248"/>
+            <a:ext cx="3677697" cy="914400"/>
+          </a:xfrm>
+          <a:prstGeom prst="rect">
+            <a:avLst/>
+          </a:prstGeom>
+          <a:noFill/>
+          <a:ln/>
+        </p:spPr>
+        <p:txBody>
+          <a:bodyPr wrap="square" lIns="0" tIns="0" rIns="0" bIns="0" rtlCol="0" anchor="ctr"/>
+          <a:lstStyle/>
+          <a:p>
+            <a:pPr algn="ctr" indent="0" marL="0">
+              <a:buNone/>
+            </a:pPr>
+            <a:r>
+              <a:rPr lang="en-US" sz="1300" dirty="0">
+                <a:solidFill>
+                  <a:srgbClr val="173753"/>
+                </a:solidFill>
+                <a:latin typeface="Calibri" pitchFamily="34" charset="0"/>
+                <a:ea typeface="Calibri" pitchFamily="34" charset="-122"/>
+                <a:cs typeface="Calibri" pitchFamily="34" charset="-120"/>
+              </a:rPr>
+              <a:t>Sebelum membahas kebijakan dan strategi, mari kita mulai dari kondisi nyata di satuan masing-masing.</a:t>
+            </a:r>
+            <a:endParaRPr lang="en-US" sz="1300" dirty="0"/>
+          </a:p>
+        </p:txBody>
+      </p:sp>
+      <p:sp>
+        <p:nvSpPr>
+          <p:cNvPr id="8" name="Shape 5"/>
+          <p:cNvSpPr/>
+          <p:nvPr/>
+        </p:nvSpPr>
+        <p:spPr>
+          <a:xfrm>
+            <a:off x="941832" y="3575304"/>
+            <a:ext cx="3172487" cy="2450592"/>
+          </a:xfrm>
+          <a:prstGeom prst="roundRect">
+            <a:avLst>
+              <a:gd name="adj" fmla="val 5224"/>
+            </a:avLst>
+          </a:prstGeom>
+          <a:solidFill>
+            <a:srgbClr val="FFFFFF"/>
+          </a:solidFill>
+          <a:ln w="12700">
+            <a:solidFill>
+              <a:srgbClr val="333333"/>
+            </a:solidFill>
+            <a:prstDash val="solid"/>
+          </a:ln>
+          <a:effectLst>
+            <a:outerShdw sx="100000" sy="100000" kx="0" ky="0" algn="bl" rotWithShape="0" blurRad="177800" dist="38100" dir="5400000">
+              <a:srgbClr val="0F3352">
+                <a:alpha val="10000"/>
+              </a:srgbClr>
+            </a:outerShdw>
+          </a:effectLst>
+        </p:spPr>
+      </p:sp>
+      <p:pic>
+        <p:nvPicPr>
+          <p:cNvPr id="9" name="Image 1" descr="preencoded.png">    </p:cNvPr>
+          <p:cNvPicPr>
+            <a:picLocks noChangeAspect="1"/>
+          </p:cNvPicPr>
+          <p:nvPr/>
+        </p:nvPicPr>
+        <p:blipFill>
+          <a:blip r:embed="rId2"/>
+          <a:stretch>
+            <a:fillRect/>
+          </a:stretch>
+        </p:blipFill>
+        <p:spPr>
+          <a:xfrm>
+            <a:off x="1024128" y="3657600"/>
+            <a:ext cx="3007895" cy="2286000"/>
+          </a:xfrm>
+          <a:prstGeom prst="rect">
+            <a:avLst/>
+          </a:prstGeom>
+        </p:spPr>
+      </p:pic>
+      <p:sp>
+        <p:nvSpPr>
+          <p:cNvPr id="10" name="Shape 6"/>
+          <p:cNvSpPr/>
+          <p:nvPr/>
+        </p:nvSpPr>
+        <p:spPr>
+          <a:xfrm>
+            <a:off x="5943600" y="1645920"/>
+            <a:ext cx="5681167" cy="1207008"/>
           </a:xfrm>
           <a:prstGeom prst="roundRect">
             <a:avLst>
@@ -31508,13 +31965,13 @@
       </p:sp>
       <p:sp>
         <p:nvSpPr>
-          <p:cNvPr id="8" name="Shape 5"/>
-          <p:cNvSpPr/>
-          <p:nvPr/>
-        </p:nvSpPr>
-        <p:spPr>
-          <a:xfrm>
-            <a:off x="5285232" y="1956816"/>
+          <p:cNvPr id="11" name="Shape 7"/>
+          <p:cNvSpPr/>
+          <p:nvPr/>
+        </p:nvSpPr>
+        <p:spPr>
+          <a:xfrm>
+            <a:off x="6199632" y="1956816"/>
             <a:ext cx="566928" cy="566928"/>
           </a:xfrm>
           <a:prstGeom prst="ellipse">
@@ -31528,13 +31985,13 @@
       </p:sp>
       <p:sp>
         <p:nvSpPr>
-          <p:cNvPr id="9" name="Text 6"/>
-          <p:cNvSpPr/>
-          <p:nvPr/>
-        </p:nvSpPr>
-        <p:spPr>
-          <a:xfrm>
-            <a:off x="5285232" y="1956816"/>
+          <p:cNvPr id="12" name="Text 8"/>
+          <p:cNvSpPr/>
+          <p:nvPr/>
+        </p:nvSpPr>
+        <p:spPr>
+          <a:xfrm>
+            <a:off x="6199632" y="1956816"/>
             <a:ext cx="566928" cy="566928"/>
           </a:xfrm>
           <a:prstGeom prst="rect">
@@ -31567,14 +32024,14 @@
       </p:sp>
       <p:sp>
         <p:nvSpPr>
-          <p:cNvPr id="10" name="Text 7"/>
-          <p:cNvSpPr/>
-          <p:nvPr/>
-        </p:nvSpPr>
-        <p:spPr>
-          <a:xfrm>
-            <a:off x="6035040" y="1828800"/>
-            <a:ext cx="5120640" cy="292608"/>
+          <p:cNvPr id="13" name="Text 9"/>
+          <p:cNvSpPr/>
+          <p:nvPr/>
+        </p:nvSpPr>
+        <p:spPr>
+          <a:xfrm>
+            <a:off x="6949440" y="1828800"/>
+            <a:ext cx="4206240" cy="292608"/>
           </a:xfrm>
           <a:prstGeom prst="rect">
             <a:avLst/>
@@ -31606,14 +32063,14 @@
       </p:sp>
       <p:sp>
         <p:nvSpPr>
-          <p:cNvPr id="11" name="Text 8"/>
-          <p:cNvSpPr/>
-          <p:nvPr/>
-        </p:nvSpPr>
-        <p:spPr>
-          <a:xfrm>
-            <a:off x="6035040" y="2139696"/>
-            <a:ext cx="5166360" cy="621792"/>
+          <p:cNvPr id="14" name="Text 10"/>
+          <p:cNvSpPr/>
+          <p:nvPr/>
+        </p:nvSpPr>
+        <p:spPr>
+          <a:xfrm>
+            <a:off x="6949440" y="2139696"/>
+            <a:ext cx="4251960" cy="621792"/>
           </a:xfrm>
           <a:prstGeom prst="rect">
             <a:avLst/>
@@ -31629,7 +32086,7 @@
               <a:buNone/>
             </a:pPr>
             <a:r>
-              <a:rPr lang="en-US" sz="1250" dirty="0">
+              <a:rPr lang="en-US" sz="1200" dirty="0">
                 <a:solidFill>
                   <a:srgbClr val="3E5C77"/>
                 </a:solidFill>
@@ -31639,20 +32096,20 @@
               </a:rPr>
               <a:t>Sudahkah anak di satuan kita terpenuhi kebutuhan pendidikan, kesehatan, gizi, pengasuhan, dan perlindungannya?</a:t>
             </a:r>
-            <a:endParaRPr lang="en-US" sz="1250" dirty="0"/>
-          </a:p>
-        </p:txBody>
-      </p:sp>
-      <p:sp>
-        <p:nvSpPr>
-          <p:cNvPr id="12" name="Shape 9"/>
-          <p:cNvSpPr/>
-          <p:nvPr/>
-        </p:nvSpPr>
-        <p:spPr>
-          <a:xfrm>
-            <a:off x="5029200" y="3035808"/>
-            <a:ext cx="6595567" cy="1207008"/>
+            <a:endParaRPr lang="en-US" sz="1200" dirty="0"/>
+          </a:p>
+        </p:txBody>
+      </p:sp>
+      <p:sp>
+        <p:nvSpPr>
+          <p:cNvPr id="15" name="Shape 11"/>
+          <p:cNvSpPr/>
+          <p:nvPr/>
+        </p:nvSpPr>
+        <p:spPr>
+          <a:xfrm>
+            <a:off x="5943600" y="3035808"/>
+            <a:ext cx="5681167" cy="1207008"/>
           </a:xfrm>
           <a:prstGeom prst="roundRect">
             <a:avLst>
@@ -31679,13 +32136,13 @@
       </p:sp>
       <p:sp>
         <p:nvSpPr>
-          <p:cNvPr id="13" name="Shape 10"/>
-          <p:cNvSpPr/>
-          <p:nvPr/>
-        </p:nvSpPr>
-        <p:spPr>
-          <a:xfrm>
-            <a:off x="5285232" y="3346704"/>
+          <p:cNvPr id="16" name="Shape 12"/>
+          <p:cNvSpPr/>
+          <p:nvPr/>
+        </p:nvSpPr>
+        <p:spPr>
+          <a:xfrm>
+            <a:off x="6199632" y="3346704"/>
             <a:ext cx="566928" cy="566928"/>
           </a:xfrm>
           <a:prstGeom prst="ellipse">
@@ -31699,13 +32156,13 @@
       </p:sp>
       <p:sp>
         <p:nvSpPr>
-          <p:cNvPr id="14" name="Text 11"/>
-          <p:cNvSpPr/>
-          <p:nvPr/>
-        </p:nvSpPr>
-        <p:spPr>
-          <a:xfrm>
-            <a:off x="5285232" y="3346704"/>
+          <p:cNvPr id="17" name="Text 13"/>
+          <p:cNvSpPr/>
+          <p:nvPr/>
+        </p:nvSpPr>
+        <p:spPr>
+          <a:xfrm>
+            <a:off x="6199632" y="3346704"/>
             <a:ext cx="566928" cy="566928"/>
           </a:xfrm>
           <a:prstGeom prst="rect">
@@ -31738,14 +32195,14 @@
       </p:sp>
       <p:sp>
         <p:nvSpPr>
-          <p:cNvPr id="15" name="Text 12"/>
-          <p:cNvSpPr/>
-          <p:nvPr/>
-        </p:nvSpPr>
-        <p:spPr>
-          <a:xfrm>
-            <a:off x="6035040" y="3218688"/>
-            <a:ext cx="5120640" cy="292608"/>
+          <p:cNvPr id="18" name="Text 14"/>
+          <p:cNvSpPr/>
+          <p:nvPr/>
+        </p:nvSpPr>
+        <p:spPr>
+          <a:xfrm>
+            <a:off x="6949440" y="3218688"/>
+            <a:ext cx="4206240" cy="292608"/>
           </a:xfrm>
           <a:prstGeom prst="rect">
             <a:avLst/>
@@ -31777,14 +32234,14 @@
       </p:sp>
       <p:sp>
         <p:nvSpPr>
-          <p:cNvPr id="16" name="Text 13"/>
-          <p:cNvSpPr/>
-          <p:nvPr/>
-        </p:nvSpPr>
-        <p:spPr>
-          <a:xfrm>
-            <a:off x="6035040" y="3529584"/>
-            <a:ext cx="5166360" cy="621792"/>
+          <p:cNvPr id="19" name="Text 15"/>
+          <p:cNvSpPr/>
+          <p:nvPr/>
+        </p:nvSpPr>
+        <p:spPr>
+          <a:xfrm>
+            <a:off x="6949440" y="3529584"/>
+            <a:ext cx="4251960" cy="621792"/>
           </a:xfrm>
           <a:prstGeom prst="rect">
             <a:avLst/>
@@ -31800,7 +32257,7 @@
               <a:buNone/>
             </a:pPr>
             <a:r>
-              <a:rPr lang="en-US" sz="1250" dirty="0">
+              <a:rPr lang="en-US" sz="1200" dirty="0">
                 <a:solidFill>
                   <a:srgbClr val="3E5C77"/>
                 </a:solidFill>
@@ -31810,20 +32267,20 @@
               </a:rPr>
               <a:t>Siapa mitra yang sudah bekerja bersama kita hari ini — dan siapa yang belum tersentuh sama sekali?</a:t>
             </a:r>
-            <a:endParaRPr lang="en-US" sz="1250" dirty="0"/>
-          </a:p>
-        </p:txBody>
-      </p:sp>
-      <p:sp>
-        <p:nvSpPr>
-          <p:cNvPr id="17" name="Shape 14"/>
-          <p:cNvSpPr/>
-          <p:nvPr/>
-        </p:nvSpPr>
-        <p:spPr>
-          <a:xfrm>
-            <a:off x="5029200" y="4425696"/>
-            <a:ext cx="6595567" cy="1207008"/>
+            <a:endParaRPr lang="en-US" sz="1200" dirty="0"/>
+          </a:p>
+        </p:txBody>
+      </p:sp>
+      <p:sp>
+        <p:nvSpPr>
+          <p:cNvPr id="20" name="Shape 16"/>
+          <p:cNvSpPr/>
+          <p:nvPr/>
+        </p:nvSpPr>
+        <p:spPr>
+          <a:xfrm>
+            <a:off x="5943600" y="4425696"/>
+            <a:ext cx="5681167" cy="1207008"/>
           </a:xfrm>
           <a:prstGeom prst="roundRect">
             <a:avLst>
@@ -31850,13 +32307,13 @@
       </p:sp>
       <p:sp>
         <p:nvSpPr>
-          <p:cNvPr id="18" name="Shape 15"/>
-          <p:cNvSpPr/>
-          <p:nvPr/>
-        </p:nvSpPr>
-        <p:spPr>
-          <a:xfrm>
-            <a:off x="5285232" y="4736592"/>
+          <p:cNvPr id="21" name="Shape 17"/>
+          <p:cNvSpPr/>
+          <p:nvPr/>
+        </p:nvSpPr>
+        <p:spPr>
+          <a:xfrm>
+            <a:off x="6199632" y="4736592"/>
             <a:ext cx="566928" cy="566928"/>
           </a:xfrm>
           <a:prstGeom prst="ellipse">
@@ -31870,13 +32327,13 @@
       </p:sp>
       <p:sp>
         <p:nvSpPr>
-          <p:cNvPr id="19" name="Text 16"/>
-          <p:cNvSpPr/>
-          <p:nvPr/>
-        </p:nvSpPr>
-        <p:spPr>
-          <a:xfrm>
-            <a:off x="5285232" y="4736592"/>
+          <p:cNvPr id="22" name="Text 18"/>
+          <p:cNvSpPr/>
+          <p:nvPr/>
+        </p:nvSpPr>
+        <p:spPr>
+          <a:xfrm>
+            <a:off x="6199632" y="4736592"/>
             <a:ext cx="566928" cy="566928"/>
           </a:xfrm>
           <a:prstGeom prst="rect">
@@ -31909,14 +32366,14 @@
       </p:sp>
       <p:sp>
         <p:nvSpPr>
-          <p:cNvPr id="20" name="Text 17"/>
-          <p:cNvSpPr/>
-          <p:nvPr/>
-        </p:nvSpPr>
-        <p:spPr>
-          <a:xfrm>
-            <a:off x="6035040" y="4608576"/>
-            <a:ext cx="5120640" cy="292608"/>
+          <p:cNvPr id="23" name="Text 19"/>
+          <p:cNvSpPr/>
+          <p:nvPr/>
+        </p:nvSpPr>
+        <p:spPr>
+          <a:xfrm>
+            <a:off x="6949440" y="4608576"/>
+            <a:ext cx="4206240" cy="292608"/>
           </a:xfrm>
           <a:prstGeom prst="rect">
             <a:avLst/>
@@ -31948,14 +32405,14 @@
       </p:sp>
       <p:sp>
         <p:nvSpPr>
-          <p:cNvPr id="21" name="Text 18"/>
-          <p:cNvSpPr/>
-          <p:nvPr/>
-        </p:nvSpPr>
-        <p:spPr>
-          <a:xfrm>
-            <a:off x="6035040" y="4919472"/>
-            <a:ext cx="5166360" cy="621792"/>
+          <p:cNvPr id="24" name="Text 20"/>
+          <p:cNvSpPr/>
+          <p:nvPr/>
+        </p:nvSpPr>
+        <p:spPr>
+          <a:xfrm>
+            <a:off x="6949440" y="4919472"/>
+            <a:ext cx="4251960" cy="621792"/>
           </a:xfrm>
           <a:prstGeom prst="rect">
             <a:avLst/>
@@ -31971,7 +32428,7 @@
               <a:buNone/>
             </a:pPr>
             <a:r>
-              <a:rPr lang="en-US" sz="1250" dirty="0">
+              <a:rPr lang="en-US" sz="1200" dirty="0">
                 <a:solidFill>
                   <a:srgbClr val="3E5C77"/>
                 </a:solidFill>
@@ -31981,13 +32438,13 @@
               </a:rPr>
               <a:t>Apa satu hal yang bisa kita perbaiki bulan depan tanpa menunggu anggaran baru?</a:t>
             </a:r>
-            <a:endParaRPr lang="en-US" sz="1250" dirty="0"/>
-          </a:p>
-        </p:txBody>
-      </p:sp>
-      <p:sp>
-        <p:nvSpPr>
-          <p:cNvPr id="22" name="Text 19"/>
+            <a:endParaRPr lang="en-US" sz="1200" dirty="0"/>
+          </a:p>
+        </p:txBody>
+      </p:sp>
+      <p:sp>
+        <p:nvSpPr>
+          <p:cNvPr id="25" name="Text 21"/>
           <p:cNvSpPr/>
           <p:nvPr/>
         </p:nvSpPr>
@@ -32026,7 +32483,7 @@
       </p:sp>
       <p:sp>
         <p:nvSpPr>
-          <p:cNvPr id="23" name="Text 20"/>
+          <p:cNvPr id="26" name="Text 22"/>
           <p:cNvSpPr/>
           <p:nvPr/>
         </p:nvSpPr>
@@ -32095,9 +32552,65 @@
           <a:chExt cx="0" cy="0"/>
         </a:xfrm>
       </p:grpSpPr>
+      <p:sp>
+        <p:nvSpPr>
+          <p:cNvPr id="2" name="Shape 0"/>
+          <p:cNvSpPr/>
+          <p:nvPr/>
+        </p:nvSpPr>
+        <p:spPr>
+          <a:xfrm>
+            <a:off x="-1097280" y="-1280160"/>
+            <a:ext cx="3840480" cy="3840480"/>
+          </a:xfrm>
+          <a:prstGeom prst="ellipse">
+            <a:avLst/>
+          </a:prstGeom>
+          <a:solidFill>
+            <a:srgbClr val="FFFFFF">
+              <a:alpha val="12000"/>
+            </a:srgbClr>
+          </a:solidFill>
+          <a:ln/>
+        </p:spPr>
+      </p:sp>
+      <p:sp>
+        <p:nvSpPr>
+          <p:cNvPr id="3" name="Shape 1"/>
+          <p:cNvSpPr/>
+          <p:nvPr/>
+        </p:nvSpPr>
+        <p:spPr>
+          <a:xfrm>
+            <a:off x="3445104" y="3447288"/>
+            <a:ext cx="5301488" cy="3054096"/>
+          </a:xfrm>
+          <a:prstGeom prst="roundRect">
+            <a:avLst>
+              <a:gd name="adj" fmla="val 4192"/>
+            </a:avLst>
+          </a:prstGeom>
+          <a:solidFill>
+            <a:srgbClr val="FFFFFF"/>
+          </a:solidFill>
+          <a:ln w="12700">
+            <a:solidFill>
+              <a:srgbClr val="333333"/>
+            </a:solidFill>
+            <a:prstDash val="solid"/>
+          </a:ln>
+          <a:effectLst>
+            <a:outerShdw sx="100000" sy="100000" kx="0" ky="0" algn="bl" rotWithShape="0" blurRad="177800" dist="38100" dir="5400000">
+              <a:srgbClr val="0F3352">
+                <a:alpha val="10000"/>
+              </a:srgbClr>
+            </a:outerShdw>
+          </a:effectLst>
+        </p:spPr>
+      </p:sp>
       <p:pic>
         <p:nvPicPr>
-          <p:cNvPr id="2" name="Image 0" descr="preencoded.png">    </p:cNvPr>
+          <p:cNvPr id="4" name="Image 0" descr="preencoded.png">    </p:cNvPr>
           <p:cNvPicPr>
             <a:picLocks noChangeAspect="1"/>
           </p:cNvPicPr>
@@ -32111,8 +32624,8 @@
         </p:blipFill>
         <p:spPr>
           <a:xfrm>
-            <a:off x="3094464" y="4023360"/>
-            <a:ext cx="6002767" cy="2834640"/>
+            <a:off x="3527400" y="3529584"/>
+            <a:ext cx="5136896" cy="2889504"/>
           </a:xfrm>
           <a:prstGeom prst="rect">
             <a:avLst/>
@@ -32121,29 +32634,7 @@
       </p:pic>
       <p:sp>
         <p:nvSpPr>
-          <p:cNvPr id="3" name="Shape 0"/>
-          <p:cNvSpPr/>
-          <p:nvPr/>
-        </p:nvSpPr>
-        <p:spPr>
-          <a:xfrm>
-            <a:off x="-1097280" y="-1280160"/>
-            <a:ext cx="3840480" cy="3840480"/>
-          </a:xfrm>
-          <a:prstGeom prst="ellipse">
-            <a:avLst/>
-          </a:prstGeom>
-          <a:solidFill>
-            <a:srgbClr val="FFFFFF">
-              <a:alpha val="12000"/>
-            </a:srgbClr>
-          </a:solidFill>
-          <a:ln/>
-        </p:spPr>
-      </p:sp>
-      <p:sp>
-        <p:nvSpPr>
-          <p:cNvPr id="4" name="Text 1"/>
+          <p:cNvPr id="5" name="Text 2"/>
           <p:cNvSpPr/>
           <p:nvPr/>
         </p:nvSpPr>
@@ -32184,7 +32675,7 @@
       </p:sp>
       <p:sp>
         <p:nvSpPr>
-          <p:cNvPr id="5" name="Text 2"/>
+          <p:cNvPr id="6" name="Text 3"/>
           <p:cNvSpPr/>
           <p:nvPr/>
         </p:nvSpPr>
@@ -32223,14 +32714,14 @@
       </p:sp>
       <p:sp>
         <p:nvSpPr>
-          <p:cNvPr id="6" name="Text 3"/>
+          <p:cNvPr id="7" name="Text 4"/>
           <p:cNvSpPr/>
           <p:nvPr/>
         </p:nvSpPr>
         <p:spPr>
           <a:xfrm>
             <a:off x="566928" y="2706624"/>
-            <a:ext cx="8778240" cy="822960"/>
+            <a:ext cx="8778240" cy="731520"/>
           </a:xfrm>
           <a:prstGeom prst="rect">
             <a:avLst/>
@@ -32264,7 +32755,7 @@
       </p:sp>
       <p:sp>
         <p:nvSpPr>
-          <p:cNvPr id="7" name="Text 4"/>
+          <p:cNvPr id="8" name="Text 5"/>
           <p:cNvSpPr/>
           <p:nvPr/>
         </p:nvSpPr>
@@ -32303,7 +32794,7 @@
       </p:sp>
       <p:sp>
         <p:nvSpPr>
-          <p:cNvPr id="8" name="Text 5"/>
+          <p:cNvPr id="9" name="Text 6"/>
           <p:cNvSpPr/>
           <p:nvPr/>
         </p:nvSpPr>
@@ -32503,11 +32994,11 @@
         <p:spPr>
           <a:xfrm>
             <a:off x="566928" y="1481328"/>
-            <a:ext cx="2615184" cy="2139696"/>
+            <a:ext cx="2615184" cy="2084832"/>
           </a:xfrm>
           <a:prstGeom prst="roundRect">
             <a:avLst>
-              <a:gd name="adj" fmla="val 5983"/>
+              <a:gd name="adj" fmla="val 6140"/>
             </a:avLst>
           </a:prstGeom>
           <a:solidFill>
@@ -32536,8 +33027,8 @@
         </p:nvSpPr>
         <p:spPr>
           <a:xfrm>
-            <a:off x="786384" y="1645920"/>
-            <a:ext cx="2176272" cy="658368"/>
+            <a:off x="786384" y="1627632"/>
+            <a:ext cx="2176272" cy="640080"/>
           </a:xfrm>
           <a:prstGeom prst="rect">
             <a:avLst/>
@@ -32575,7 +33066,7 @@
         </p:nvSpPr>
         <p:spPr>
           <a:xfrm>
-            <a:off x="786384" y="2304288"/>
+            <a:off x="786384" y="2267712"/>
             <a:ext cx="2176272" cy="310896"/>
           </a:xfrm>
           <a:prstGeom prst="rect">
@@ -32614,7 +33105,7 @@
         </p:nvSpPr>
         <p:spPr>
           <a:xfrm>
-            <a:off x="786384" y="2633472"/>
+            <a:off x="786384" y="2578608"/>
             <a:ext cx="2176272" cy="822960"/>
           </a:xfrm>
           <a:prstGeom prst="rect">
@@ -32654,11 +33145,11 @@
         <p:spPr>
           <a:xfrm>
             <a:off x="3383280" y="1481328"/>
-            <a:ext cx="2615184" cy="2139696"/>
+            <a:ext cx="2615184" cy="2084832"/>
           </a:xfrm>
           <a:prstGeom prst="roundRect">
             <a:avLst>
-              <a:gd name="adj" fmla="val 5983"/>
+              <a:gd name="adj" fmla="val 6140"/>
             </a:avLst>
           </a:prstGeom>
           <a:solidFill>
@@ -32687,8 +33178,8 @@
         </p:nvSpPr>
         <p:spPr>
           <a:xfrm>
-            <a:off x="3602736" y="1645920"/>
-            <a:ext cx="2176272" cy="658368"/>
+            <a:off x="3602736" y="1627632"/>
+            <a:ext cx="2176272" cy="640080"/>
           </a:xfrm>
           <a:prstGeom prst="rect">
             <a:avLst/>
@@ -32726,7 +33217,7 @@
         </p:nvSpPr>
         <p:spPr>
           <a:xfrm>
-            <a:off x="3602736" y="2304288"/>
+            <a:off x="3602736" y="2267712"/>
             <a:ext cx="2176272" cy="310896"/>
           </a:xfrm>
           <a:prstGeom prst="rect">
@@ -32765,7 +33256,7 @@
         </p:nvSpPr>
         <p:spPr>
           <a:xfrm>
-            <a:off x="3602736" y="2633472"/>
+            <a:off x="3602736" y="2578608"/>
             <a:ext cx="2176272" cy="822960"/>
           </a:xfrm>
           <a:prstGeom prst="rect">
@@ -32805,11 +33296,11 @@
         <p:spPr>
           <a:xfrm>
             <a:off x="6199632" y="1481328"/>
-            <a:ext cx="2615184" cy="2139696"/>
+            <a:ext cx="2615184" cy="2084832"/>
           </a:xfrm>
           <a:prstGeom prst="roundRect">
             <a:avLst>
-              <a:gd name="adj" fmla="val 5983"/>
+              <a:gd name="adj" fmla="val 6140"/>
             </a:avLst>
           </a:prstGeom>
           <a:solidFill>
@@ -32838,8 +33329,8 @@
         </p:nvSpPr>
         <p:spPr>
           <a:xfrm>
-            <a:off x="6419088" y="1645920"/>
-            <a:ext cx="2176272" cy="658368"/>
+            <a:off x="6419088" y="1627632"/>
+            <a:ext cx="2176272" cy="640080"/>
           </a:xfrm>
           <a:prstGeom prst="rect">
             <a:avLst/>
@@ -32877,7 +33368,7 @@
         </p:nvSpPr>
         <p:spPr>
           <a:xfrm>
-            <a:off x="6419088" y="2304288"/>
+            <a:off x="6419088" y="2267712"/>
             <a:ext cx="2176272" cy="310896"/>
           </a:xfrm>
           <a:prstGeom prst="rect">
@@ -32916,7 +33407,7 @@
         </p:nvSpPr>
         <p:spPr>
           <a:xfrm>
-            <a:off x="6419088" y="2633472"/>
+            <a:off x="6419088" y="2578608"/>
             <a:ext cx="2176272" cy="822960"/>
           </a:xfrm>
           <a:prstGeom prst="rect">
@@ -32956,11 +33447,11 @@
         <p:spPr>
           <a:xfrm>
             <a:off x="9015984" y="1481328"/>
-            <a:ext cx="2615184" cy="2139696"/>
+            <a:ext cx="2615184" cy="2084832"/>
           </a:xfrm>
           <a:prstGeom prst="roundRect">
             <a:avLst>
-              <a:gd name="adj" fmla="val 5983"/>
+              <a:gd name="adj" fmla="val 6140"/>
             </a:avLst>
           </a:prstGeom>
           <a:solidFill>
@@ -32989,8 +33480,8 @@
         </p:nvSpPr>
         <p:spPr>
           <a:xfrm>
-            <a:off x="9235440" y="1645920"/>
-            <a:ext cx="2176272" cy="658368"/>
+            <a:off x="9235440" y="1627632"/>
+            <a:ext cx="2176272" cy="640080"/>
           </a:xfrm>
           <a:prstGeom prst="rect">
             <a:avLst/>
@@ -33028,7 +33519,7 @@
         </p:nvSpPr>
         <p:spPr>
           <a:xfrm>
-            <a:off x="9235440" y="2304288"/>
+            <a:off x="9235440" y="2267712"/>
             <a:ext cx="2176272" cy="310896"/>
           </a:xfrm>
           <a:prstGeom prst="rect">
@@ -33067,7 +33558,7 @@
         </p:nvSpPr>
         <p:spPr>
           <a:xfrm>
-            <a:off x="9235440" y="2633472"/>
+            <a:off x="9235440" y="2578608"/>
             <a:ext cx="2176272" cy="822960"/>
           </a:xfrm>
           <a:prstGeom prst="rect">
@@ -33097,10 +33588,44 @@
             <a:endParaRPr lang="en-US" sz="1100" dirty="0"/>
           </a:p>
         </p:txBody>
+      </p:sp>
+      <p:sp>
+        <p:nvSpPr>
+          <p:cNvPr id="22" name="Shape 20"/>
+          <p:cNvSpPr/>
+          <p:nvPr/>
+        </p:nvSpPr>
+        <p:spPr>
+          <a:xfrm>
+            <a:off x="484632" y="3593592"/>
+            <a:ext cx="4469710" cy="2414016"/>
+          </a:xfrm>
+          <a:prstGeom prst="roundRect">
+            <a:avLst>
+              <a:gd name="adj" fmla="val 5303"/>
+            </a:avLst>
+          </a:prstGeom>
+          <a:solidFill>
+            <a:srgbClr val="FFFFFF"/>
+          </a:solidFill>
+          <a:ln w="12700">
+            <a:solidFill>
+              <a:srgbClr val="333333"/>
+            </a:solidFill>
+            <a:prstDash val="solid"/>
+          </a:ln>
+          <a:effectLst>
+            <a:outerShdw sx="100000" sy="100000" kx="0" ky="0" algn="bl" rotWithShape="0" blurRad="177800" dist="38100" dir="5400000">
+              <a:srgbClr val="0F3352">
+                <a:alpha val="10000"/>
+              </a:srgbClr>
+            </a:outerShdw>
+          </a:effectLst>
+        </p:spPr>
       </p:sp>
       <p:pic>
         <p:nvPicPr>
-          <p:cNvPr id="22" name="Image 0" descr="preencoded.png">    </p:cNvPr>
+          <p:cNvPr id="23" name="Image 0" descr="preencoded.png">    </p:cNvPr>
           <p:cNvPicPr>
             <a:picLocks noChangeAspect="1"/>
           </p:cNvPicPr>
@@ -33114,8 +33639,8 @@
         </p:blipFill>
         <p:spPr>
           <a:xfrm>
-            <a:off x="8737876" y="3794760"/>
-            <a:ext cx="2978331" cy="2606040"/>
+            <a:off x="566928" y="3675888"/>
+            <a:ext cx="4305118" cy="2249424"/>
           </a:xfrm>
           <a:prstGeom prst="rect">
             <a:avLst/>
@@ -33124,18 +33649,18 @@
       </p:pic>
       <p:sp>
         <p:nvSpPr>
-          <p:cNvPr id="23" name="Shape 20"/>
-          <p:cNvSpPr/>
-          <p:nvPr/>
-        </p:nvSpPr>
-        <p:spPr>
-          <a:xfrm>
-            <a:off x="566928" y="3886200"/>
-            <a:ext cx="7772400" cy="2011680"/>
+          <p:cNvPr id="24" name="Shape 21"/>
+          <p:cNvSpPr/>
+          <p:nvPr/>
+        </p:nvSpPr>
+        <p:spPr>
+          <a:xfrm>
+            <a:off x="5449824" y="3675888"/>
+            <a:ext cx="6174943" cy="2487168"/>
           </a:xfrm>
           <a:prstGeom prst="roundRect">
             <a:avLst>
-              <a:gd name="adj" fmla="val 6364"/>
+              <a:gd name="adj" fmla="val 5147"/>
             </a:avLst>
           </a:prstGeom>
           <a:solidFill>
@@ -33158,14 +33683,14 @@
       </p:sp>
       <p:sp>
         <p:nvSpPr>
-          <p:cNvPr id="24" name="Text 21"/>
-          <p:cNvSpPr/>
-          <p:nvPr/>
-        </p:nvSpPr>
-        <p:spPr>
-          <a:xfrm>
-            <a:off x="896112" y="4078224"/>
-            <a:ext cx="7132320" cy="310896"/>
+          <p:cNvPr id="25" name="Text 22"/>
+          <p:cNvSpPr/>
+          <p:nvPr/>
+        </p:nvSpPr>
+        <p:spPr>
+          <a:xfrm>
+            <a:off x="5760720" y="3858768"/>
+            <a:ext cx="5486400" cy="310896"/>
           </a:xfrm>
           <a:prstGeom prst="rect">
             <a:avLst/>
@@ -33197,14 +33722,14 @@
       </p:sp>
       <p:sp>
         <p:nvSpPr>
-          <p:cNvPr id="25" name="Text 22"/>
-          <p:cNvSpPr/>
-          <p:nvPr/>
-        </p:nvSpPr>
-        <p:spPr>
-          <a:xfrm>
-            <a:off x="896112" y="4443984"/>
-            <a:ext cx="7040880" cy="1188720"/>
+          <p:cNvPr id="26" name="Text 23"/>
+          <p:cNvSpPr/>
+          <p:nvPr/>
+        </p:nvSpPr>
+        <p:spPr>
+          <a:xfrm>
+            <a:off x="5760720" y="4224528"/>
+            <a:ext cx="5486400" cy="1828800"/>
           </a:xfrm>
           <a:prstGeom prst="rect">
             <a:avLst/>
@@ -33253,7 +33778,7 @@
                 <a:ea typeface="Calibri" pitchFamily="34" charset="-122"/>
                 <a:cs typeface="Calibri" pitchFamily="34" charset="-120"/>
               </a:rPr>
-              <a:t>Ketimpangan antarindikator sangat lebar: layanan “lunak” tinggi, sarana fisik tertinggal jauh.</a:t>
+              <a:t>Ketimpangan antarindikator sangat lebar: layanan berbasis kegiatan tinggi, sarana fisik tertinggal jauh.</a:t>
             </a:r>
             <a:endParaRPr lang="en-US" sz="1200" dirty="0"/>
           </a:p>
@@ -33282,14 +33807,14 @@
       </p:sp>
       <p:sp>
         <p:nvSpPr>
-          <p:cNvPr id="26" name="Text 23"/>
-          <p:cNvSpPr/>
-          <p:nvPr/>
-        </p:nvSpPr>
-        <p:spPr>
-          <a:xfrm>
-            <a:off x="566928" y="6144768"/>
-            <a:ext cx="7772400" cy="237744"/>
+          <p:cNvPr id="27" name="Text 24"/>
+          <p:cNvSpPr/>
+          <p:nvPr/>
+        </p:nvSpPr>
+        <p:spPr>
+          <a:xfrm>
+            <a:off x="566928" y="6035040"/>
+            <a:ext cx="5486400" cy="237744"/>
           </a:xfrm>
           <a:prstGeom prst="rect">
             <a:avLst/>
@@ -33305,7 +33830,7 @@
               <a:buNone/>
             </a:pPr>
             <a:r>
-              <a:rPr lang="en-US" sz="900" i="1" dirty="0">
+              <a:rPr lang="en-US" sz="850" i="1" dirty="0">
                 <a:solidFill>
                   <a:srgbClr val="7A93A8"/>
                 </a:solidFill>
@@ -33315,13 +33840,13 @@
               </a:rPr>
               <a:t>Sumber: Dapodik, cut off 31 Desember 2025 — Direktorat Pendidikan Anak Usia Dini.</a:t>
             </a:r>
-            <a:endParaRPr lang="en-US" sz="900" dirty="0"/>
-          </a:p>
-        </p:txBody>
-      </p:sp>
-      <p:sp>
-        <p:nvSpPr>
-          <p:cNvPr id="27" name="Text 24"/>
+            <a:endParaRPr lang="en-US" sz="850" dirty="0"/>
+          </a:p>
+        </p:txBody>
+      </p:sp>
+      <p:sp>
+        <p:nvSpPr>
+          <p:cNvPr id="28" name="Text 25"/>
           <p:cNvSpPr/>
           <p:nvPr/>
         </p:nvSpPr>
@@ -33360,7 +33885,7 @@
       </p:sp>
       <p:sp>
         <p:nvSpPr>
-          <p:cNvPr id="28" name="Text 25"/>
+          <p:cNvPr id="29" name="Text 26"/>
           <p:cNvSpPr/>
           <p:nvPr/>
         </p:nvSpPr>
@@ -33551,9 +34076,43 @@
           </a:p>
         </p:txBody>
       </p:sp>
+      <p:sp>
+        <p:nvSpPr>
+          <p:cNvPr id="6" name="Shape 4"/>
+          <p:cNvSpPr/>
+          <p:nvPr/>
+        </p:nvSpPr>
+        <p:spPr>
+          <a:xfrm>
+            <a:off x="484632" y="1435608"/>
+            <a:ext cx="4135013" cy="3182112"/>
+          </a:xfrm>
+          <a:prstGeom prst="roundRect">
+            <a:avLst>
+              <a:gd name="adj" fmla="val 4023"/>
+            </a:avLst>
+          </a:prstGeom>
+          <a:solidFill>
+            <a:srgbClr val="FFFFFF"/>
+          </a:solidFill>
+          <a:ln w="12700">
+            <a:solidFill>
+              <a:srgbClr val="333333"/>
+            </a:solidFill>
+            <a:prstDash val="solid"/>
+          </a:ln>
+          <a:effectLst>
+            <a:outerShdw sx="100000" sy="100000" kx="0" ky="0" algn="bl" rotWithShape="0" blurRad="177800" dist="38100" dir="5400000">
+              <a:srgbClr val="0F3352">
+                <a:alpha val="10000"/>
+              </a:srgbClr>
+            </a:outerShdw>
+          </a:effectLst>
+        </p:spPr>
+      </p:sp>
       <p:pic>
         <p:nvPicPr>
-          <p:cNvPr id="6" name="Image 0" descr="preencoded.png">    </p:cNvPr>
+          <p:cNvPr id="7" name="Image 0" descr="preencoded.png">    </p:cNvPr>
           <p:cNvPicPr>
             <a:picLocks noChangeAspect="1"/>
           </p:cNvPicPr>
@@ -33568,7 +34127,7 @@
         <p:spPr>
           <a:xfrm>
             <a:off x="566928" y="1517904"/>
-            <a:ext cx="3840480" cy="3200400"/>
+            <a:ext cx="3970421" cy="3017520"/>
           </a:xfrm>
           <a:prstGeom prst="rect">
             <a:avLst/>
@@ -33577,14 +34136,14 @@
       </p:pic>
       <p:sp>
         <p:nvSpPr>
-          <p:cNvPr id="7" name="Shape 4"/>
-          <p:cNvSpPr/>
-          <p:nvPr/>
-        </p:nvSpPr>
-        <p:spPr>
-          <a:xfrm>
-            <a:off x="5394960" y="1554480"/>
-            <a:ext cx="6229807" cy="1024128"/>
+          <p:cNvPr id="8" name="Shape 5"/>
+          <p:cNvSpPr/>
+          <p:nvPr/>
+        </p:nvSpPr>
+        <p:spPr>
+          <a:xfrm>
+            <a:off x="4937760" y="1554480"/>
+            <a:ext cx="6687007" cy="1024128"/>
           </a:xfrm>
           <a:prstGeom prst="roundRect">
             <a:avLst>
@@ -33611,13 +34170,13 @@
       </p:sp>
       <p:sp>
         <p:nvSpPr>
-          <p:cNvPr id="8" name="Shape 5"/>
-          <p:cNvSpPr/>
-          <p:nvPr/>
-        </p:nvSpPr>
-        <p:spPr>
-          <a:xfrm>
-            <a:off x="5632704" y="1792224"/>
+          <p:cNvPr id="9" name="Shape 6"/>
+          <p:cNvSpPr/>
+          <p:nvPr/>
+        </p:nvSpPr>
+        <p:spPr>
+          <a:xfrm>
+            <a:off x="5175504" y="1792224"/>
             <a:ext cx="548640" cy="548640"/>
           </a:xfrm>
           <a:prstGeom prst="ellipse">
@@ -33638,7 +34197,7 @@
       </p:sp>
       <p:pic>
         <p:nvPicPr>
-          <p:cNvPr id="9" name="Image 1" descr="preencoded.png">    </p:cNvPr>
+          <p:cNvPr id="10" name="Image 1" descr="preencoded.png">    </p:cNvPr>
           <p:cNvPicPr>
             <a:picLocks noChangeAspect="1"/>
           </p:cNvPicPr>
@@ -33652,7 +34211,7 @@
         </p:blipFill>
         <p:spPr>
           <a:xfrm>
-            <a:off x="5764378" y="1923898"/>
+            <a:off x="5307178" y="1923898"/>
             <a:ext cx="285293" cy="285293"/>
           </a:xfrm>
           <a:prstGeom prst="rect">
@@ -33662,14 +34221,14 @@
       </p:pic>
       <p:sp>
         <p:nvSpPr>
-          <p:cNvPr id="10" name="Text 6"/>
-          <p:cNvSpPr/>
-          <p:nvPr/>
-        </p:nvSpPr>
-        <p:spPr>
-          <a:xfrm>
-            <a:off x="6345936" y="1719072"/>
-            <a:ext cx="4754880" cy="292608"/>
+          <p:cNvPr id="11" name="Text 7"/>
+          <p:cNvSpPr/>
+          <p:nvPr/>
+        </p:nvSpPr>
+        <p:spPr>
+          <a:xfrm>
+            <a:off x="5888736" y="1719072"/>
+            <a:ext cx="5212080" cy="292608"/>
           </a:xfrm>
           <a:prstGeom prst="rect">
             <a:avLst/>
@@ -33701,14 +34260,14 @@
       </p:sp>
       <p:sp>
         <p:nvSpPr>
-          <p:cNvPr id="11" name="Text 7"/>
-          <p:cNvSpPr/>
-          <p:nvPr/>
-        </p:nvSpPr>
-        <p:spPr>
-          <a:xfrm>
-            <a:off x="6345936" y="2029968"/>
-            <a:ext cx="4800600" cy="475488"/>
+          <p:cNvPr id="12" name="Text 8"/>
+          <p:cNvSpPr/>
+          <p:nvPr/>
+        </p:nvSpPr>
+        <p:spPr>
+          <a:xfrm>
+            <a:off x="5888736" y="2029968"/>
+            <a:ext cx="5257800" cy="475488"/>
           </a:xfrm>
           <a:prstGeom prst="rect">
             <a:avLst/>
@@ -33740,14 +34299,14 @@
       </p:sp>
       <p:sp>
         <p:nvSpPr>
-          <p:cNvPr id="12" name="Shape 8"/>
-          <p:cNvSpPr/>
-          <p:nvPr/>
-        </p:nvSpPr>
-        <p:spPr>
-          <a:xfrm>
-            <a:off x="5394960" y="2724912"/>
-            <a:ext cx="6229807" cy="1024128"/>
+          <p:cNvPr id="13" name="Shape 9"/>
+          <p:cNvSpPr/>
+          <p:nvPr/>
+        </p:nvSpPr>
+        <p:spPr>
+          <a:xfrm>
+            <a:off x="4937760" y="2724912"/>
+            <a:ext cx="6687007" cy="1024128"/>
           </a:xfrm>
           <a:prstGeom prst="roundRect">
             <a:avLst>
@@ -33774,13 +34333,13 @@
       </p:sp>
       <p:sp>
         <p:nvSpPr>
-          <p:cNvPr id="13" name="Shape 9"/>
-          <p:cNvSpPr/>
-          <p:nvPr/>
-        </p:nvSpPr>
-        <p:spPr>
-          <a:xfrm>
-            <a:off x="5632704" y="2962656"/>
+          <p:cNvPr id="14" name="Shape 10"/>
+          <p:cNvSpPr/>
+          <p:nvPr/>
+        </p:nvSpPr>
+        <p:spPr>
+          <a:xfrm>
+            <a:off x="5175504" y="2962656"/>
             <a:ext cx="548640" cy="548640"/>
           </a:xfrm>
           <a:prstGeom prst="ellipse">
@@ -33801,7 +34360,7 @@
       </p:sp>
       <p:pic>
         <p:nvPicPr>
-          <p:cNvPr id="14" name="Image 2" descr="preencoded.png">    </p:cNvPr>
+          <p:cNvPr id="15" name="Image 2" descr="preencoded.png">    </p:cNvPr>
           <p:cNvPicPr>
             <a:picLocks noChangeAspect="1"/>
           </p:cNvPicPr>
@@ -33815,7 +34374,7 @@
         </p:blipFill>
         <p:spPr>
           <a:xfrm>
-            <a:off x="5764378" y="3094330"/>
+            <a:off x="5307178" y="3094330"/>
             <a:ext cx="285293" cy="285293"/>
           </a:xfrm>
           <a:prstGeom prst="rect">
@@ -33825,14 +34384,14 @@
       </p:pic>
       <p:sp>
         <p:nvSpPr>
-          <p:cNvPr id="15" name="Text 10"/>
-          <p:cNvSpPr/>
-          <p:nvPr/>
-        </p:nvSpPr>
-        <p:spPr>
-          <a:xfrm>
-            <a:off x="6345936" y="2889504"/>
-            <a:ext cx="4754880" cy="292608"/>
+          <p:cNvPr id="16" name="Text 11"/>
+          <p:cNvSpPr/>
+          <p:nvPr/>
+        </p:nvSpPr>
+        <p:spPr>
+          <a:xfrm>
+            <a:off x="5888736" y="2889504"/>
+            <a:ext cx="5212080" cy="292608"/>
           </a:xfrm>
           <a:prstGeom prst="rect">
             <a:avLst/>
@@ -33864,14 +34423,14 @@
       </p:sp>
       <p:sp>
         <p:nvSpPr>
-          <p:cNvPr id="16" name="Text 11"/>
-          <p:cNvSpPr/>
-          <p:nvPr/>
-        </p:nvSpPr>
-        <p:spPr>
-          <a:xfrm>
-            <a:off x="6345936" y="3200400"/>
-            <a:ext cx="4800600" cy="475488"/>
+          <p:cNvPr id="17" name="Text 12"/>
+          <p:cNvSpPr/>
+          <p:nvPr/>
+        </p:nvSpPr>
+        <p:spPr>
+          <a:xfrm>
+            <a:off x="5888736" y="3200400"/>
+            <a:ext cx="5257800" cy="475488"/>
           </a:xfrm>
           <a:prstGeom prst="rect">
             <a:avLst/>
@@ -33903,14 +34462,14 @@
       </p:sp>
       <p:sp>
         <p:nvSpPr>
-          <p:cNvPr id="17" name="Shape 12"/>
-          <p:cNvSpPr/>
-          <p:nvPr/>
-        </p:nvSpPr>
-        <p:spPr>
-          <a:xfrm>
-            <a:off x="5394960" y="3895344"/>
-            <a:ext cx="6229807" cy="1024128"/>
+          <p:cNvPr id="18" name="Shape 13"/>
+          <p:cNvSpPr/>
+          <p:nvPr/>
+        </p:nvSpPr>
+        <p:spPr>
+          <a:xfrm>
+            <a:off x="4937760" y="3895344"/>
+            <a:ext cx="6687007" cy="1024128"/>
           </a:xfrm>
           <a:prstGeom prst="roundRect">
             <a:avLst>
@@ -33937,13 +34496,13 @@
       </p:sp>
       <p:sp>
         <p:nvSpPr>
-          <p:cNvPr id="18" name="Shape 13"/>
-          <p:cNvSpPr/>
-          <p:nvPr/>
-        </p:nvSpPr>
-        <p:spPr>
-          <a:xfrm>
-            <a:off x="5632704" y="4133088"/>
+          <p:cNvPr id="19" name="Shape 14"/>
+          <p:cNvSpPr/>
+          <p:nvPr/>
+        </p:nvSpPr>
+        <p:spPr>
+          <a:xfrm>
+            <a:off x="5175504" y="4133088"/>
             <a:ext cx="548640" cy="548640"/>
           </a:xfrm>
           <a:prstGeom prst="ellipse">
@@ -33964,7 +34523,7 @@
       </p:sp>
       <p:pic>
         <p:nvPicPr>
-          <p:cNvPr id="19" name="Image 3" descr="preencoded.png">    </p:cNvPr>
+          <p:cNvPr id="20" name="Image 3" descr="preencoded.png">    </p:cNvPr>
           <p:cNvPicPr>
             <a:picLocks noChangeAspect="1"/>
           </p:cNvPicPr>
@@ -33978,7 +34537,7 @@
         </p:blipFill>
         <p:spPr>
           <a:xfrm>
-            <a:off x="5764378" y="4264762"/>
+            <a:off x="5307178" y="4264762"/>
             <a:ext cx="285293" cy="285293"/>
           </a:xfrm>
           <a:prstGeom prst="rect">
@@ -33988,14 +34547,14 @@
       </p:pic>
       <p:sp>
         <p:nvSpPr>
-          <p:cNvPr id="20" name="Text 14"/>
-          <p:cNvSpPr/>
-          <p:nvPr/>
-        </p:nvSpPr>
-        <p:spPr>
-          <a:xfrm>
-            <a:off x="6345936" y="4059936"/>
-            <a:ext cx="4754880" cy="292608"/>
+          <p:cNvPr id="21" name="Text 15"/>
+          <p:cNvSpPr/>
+          <p:nvPr/>
+        </p:nvSpPr>
+        <p:spPr>
+          <a:xfrm>
+            <a:off x="5888736" y="4059936"/>
+            <a:ext cx="5212080" cy="292608"/>
           </a:xfrm>
           <a:prstGeom prst="rect">
             <a:avLst/>
@@ -34027,14 +34586,14 @@
       </p:sp>
       <p:sp>
         <p:nvSpPr>
-          <p:cNvPr id="21" name="Text 15"/>
-          <p:cNvSpPr/>
-          <p:nvPr/>
-        </p:nvSpPr>
-        <p:spPr>
-          <a:xfrm>
-            <a:off x="6345936" y="4370832"/>
-            <a:ext cx="4800600" cy="475488"/>
+          <p:cNvPr id="22" name="Text 16"/>
+          <p:cNvSpPr/>
+          <p:nvPr/>
+        </p:nvSpPr>
+        <p:spPr>
+          <a:xfrm>
+            <a:off x="5888736" y="4370832"/>
+            <a:ext cx="5257800" cy="475488"/>
           </a:xfrm>
           <a:prstGeom prst="rect">
             <a:avLst/>
@@ -34066,7 +34625,7 @@
       </p:sp>
       <p:sp>
         <p:nvSpPr>
-          <p:cNvPr id="22" name="Shape 16"/>
+          <p:cNvPr id="23" name="Shape 17"/>
           <p:cNvSpPr/>
           <p:nvPr/>
         </p:nvSpPr>
@@ -34100,7 +34659,7 @@
       </p:sp>
       <p:sp>
         <p:nvSpPr>
-          <p:cNvPr id="23" name="Text 17"/>
+          <p:cNvPr id="24" name="Text 18"/>
           <p:cNvSpPr/>
           <p:nvPr/>
         </p:nvSpPr>
@@ -34139,7 +34698,7 @@
       </p:sp>
       <p:sp>
         <p:nvSpPr>
-          <p:cNvPr id="24" name="Text 18"/>
+          <p:cNvPr id="25" name="Text 19"/>
           <p:cNvSpPr/>
           <p:nvPr/>
         </p:nvSpPr>
@@ -34178,7 +34737,7 @@
       </p:sp>
       <p:sp>
         <p:nvSpPr>
-          <p:cNvPr id="25" name="Shape 19"/>
+          <p:cNvPr id="26" name="Shape 20"/>
           <p:cNvSpPr/>
           <p:nvPr/>
         </p:nvSpPr>
@@ -34212,7 +34771,7 @@
       </p:sp>
       <p:sp>
         <p:nvSpPr>
-          <p:cNvPr id="26" name="Text 20"/>
+          <p:cNvPr id="27" name="Text 21"/>
           <p:cNvSpPr/>
           <p:nvPr/>
         </p:nvSpPr>
@@ -34251,7 +34810,7 @@
       </p:sp>
       <p:sp>
         <p:nvSpPr>
-          <p:cNvPr id="27" name="Text 21"/>
+          <p:cNvPr id="28" name="Text 22"/>
           <p:cNvSpPr/>
           <p:nvPr/>
         </p:nvSpPr>
@@ -34290,7 +34849,7 @@
       </p:sp>
       <p:sp>
         <p:nvSpPr>
-          <p:cNvPr id="28" name="Shape 22"/>
+          <p:cNvPr id="29" name="Shape 23"/>
           <p:cNvSpPr/>
           <p:nvPr/>
         </p:nvSpPr>
@@ -34324,7 +34883,7 @@
       </p:sp>
       <p:sp>
         <p:nvSpPr>
-          <p:cNvPr id="29" name="Text 23"/>
+          <p:cNvPr id="30" name="Text 24"/>
           <p:cNvSpPr/>
           <p:nvPr/>
         </p:nvSpPr>
@@ -34363,7 +34922,7 @@
       </p:sp>
       <p:sp>
         <p:nvSpPr>
-          <p:cNvPr id="30" name="Text 24"/>
+          <p:cNvPr id="31" name="Text 25"/>
           <p:cNvSpPr/>
           <p:nvPr/>
         </p:nvSpPr>
@@ -34402,7 +34961,7 @@
       </p:sp>
       <p:sp>
         <p:nvSpPr>
-          <p:cNvPr id="31" name="Text 25"/>
+          <p:cNvPr id="32" name="Text 26"/>
           <p:cNvSpPr/>
           <p:nvPr/>
         </p:nvSpPr>
@@ -34441,7 +35000,7 @@
       </p:sp>
       <p:sp>
         <p:nvSpPr>
-          <p:cNvPr id="32" name="Text 26"/>
+          <p:cNvPr id="33" name="Text 27"/>
           <p:cNvSpPr/>
           <p:nvPr/>
         </p:nvSpPr>
@@ -34480,7 +35039,7 @@
       </p:sp>
       <p:sp>
         <p:nvSpPr>
-          <p:cNvPr id="33" name="Text 27"/>
+          <p:cNvPr id="34" name="Text 28"/>
           <p:cNvSpPr/>
           <p:nvPr/>
         </p:nvSpPr>
@@ -34680,7 +35239,7 @@
         <p:spPr>
           <a:xfrm>
             <a:off x="566928" y="1517904"/>
-            <a:ext cx="3529584" cy="1408176"/>
+            <a:ext cx="4023360" cy="1408176"/>
           </a:xfrm>
           <a:prstGeom prst="roundRect">
             <a:avLst>
@@ -34765,7 +35324,7 @@
         <p:spPr>
           <a:xfrm>
             <a:off x="1499616" y="1700784"/>
-            <a:ext cx="2377440" cy="457200"/>
+            <a:ext cx="2871216" cy="457200"/>
           </a:xfrm>
           <a:prstGeom prst="rect">
             <a:avLst/>
@@ -34804,7 +35363,7 @@
         <p:spPr>
           <a:xfrm>
             <a:off x="1499616" y="2176272"/>
-            <a:ext cx="2359152" cy="676656"/>
+            <a:ext cx="2852928" cy="676656"/>
           </a:xfrm>
           <a:prstGeom prst="rect">
             <a:avLst/>
@@ -34842,8 +35401,8 @@
         </p:nvSpPr>
         <p:spPr>
           <a:xfrm>
-            <a:off x="4352544" y="1517904"/>
-            <a:ext cx="3529584" cy="1408176"/>
+            <a:off x="4846320" y="1517904"/>
+            <a:ext cx="4023360" cy="1408176"/>
           </a:xfrm>
           <a:prstGeom prst="roundRect">
             <a:avLst>
@@ -34876,7 +35435,7 @@
         </p:nvSpPr>
         <p:spPr>
           <a:xfrm>
-            <a:off x="4590288" y="1828800"/>
+            <a:off x="5084064" y="1828800"/>
             <a:ext cx="603504" cy="603504"/>
           </a:xfrm>
           <a:prstGeom prst="ellipse">
@@ -34911,7 +35470,7 @@
         </p:blipFill>
         <p:spPr>
           <a:xfrm>
-            <a:off x="4735129" y="1973641"/>
+            <a:off x="5228905" y="1973641"/>
             <a:ext cx="313822" cy="313822"/>
           </a:xfrm>
           <a:prstGeom prst="rect">
@@ -34927,8 +35486,8 @@
         </p:nvSpPr>
         <p:spPr>
           <a:xfrm>
-            <a:off x="5285232" y="1700784"/>
-            <a:ext cx="2377440" cy="457200"/>
+            <a:off x="5779008" y="1700784"/>
+            <a:ext cx="2871216" cy="457200"/>
           </a:xfrm>
           <a:prstGeom prst="rect">
             <a:avLst/>
@@ -34966,8 +35525,8 @@
         </p:nvSpPr>
         <p:spPr>
           <a:xfrm>
-            <a:off x="5285232" y="2176272"/>
-            <a:ext cx="2359152" cy="676656"/>
+            <a:off x="5779008" y="2176272"/>
+            <a:ext cx="2852928" cy="676656"/>
           </a:xfrm>
           <a:prstGeom prst="rect">
             <a:avLst/>
@@ -35006,7 +35565,7 @@
         <p:spPr>
           <a:xfrm>
             <a:off x="566928" y="3163824"/>
-            <a:ext cx="3529584" cy="1408176"/>
+            <a:ext cx="4023360" cy="1408176"/>
           </a:xfrm>
           <a:prstGeom prst="roundRect">
             <a:avLst>
@@ -35091,7 +35650,7 @@
         <p:spPr>
           <a:xfrm>
             <a:off x="1499616" y="3346704"/>
-            <a:ext cx="2377440" cy="457200"/>
+            <a:ext cx="2871216" cy="457200"/>
           </a:xfrm>
           <a:prstGeom prst="rect">
             <a:avLst/>
@@ -35130,7 +35689,7 @@
         <p:spPr>
           <a:xfrm>
             <a:off x="1499616" y="3822192"/>
-            <a:ext cx="2359152" cy="676656"/>
+            <a:ext cx="2852928" cy="676656"/>
           </a:xfrm>
           <a:prstGeom prst="rect">
             <a:avLst/>
@@ -35168,8 +35727,8 @@
         </p:nvSpPr>
         <p:spPr>
           <a:xfrm>
-            <a:off x="4352544" y="3163824"/>
-            <a:ext cx="3529584" cy="1408176"/>
+            <a:off x="4846320" y="3163824"/>
+            <a:ext cx="4023360" cy="1408176"/>
           </a:xfrm>
           <a:prstGeom prst="roundRect">
             <a:avLst>
@@ -35202,7 +35761,7 @@
         </p:nvSpPr>
         <p:spPr>
           <a:xfrm>
-            <a:off x="4590288" y="3474720"/>
+            <a:off x="5084064" y="3474720"/>
             <a:ext cx="603504" cy="603504"/>
           </a:xfrm>
           <a:prstGeom prst="ellipse">
@@ -35237,7 +35796,7 @@
         </p:blipFill>
         <p:spPr>
           <a:xfrm>
-            <a:off x="4735129" y="3619561"/>
+            <a:off x="5228905" y="3619561"/>
             <a:ext cx="313822" cy="313822"/>
           </a:xfrm>
           <a:prstGeom prst="rect">
@@ -35253,8 +35812,8 @@
         </p:nvSpPr>
         <p:spPr>
           <a:xfrm>
-            <a:off x="5285232" y="3346704"/>
-            <a:ext cx="2377440" cy="457200"/>
+            <a:off x="5779008" y="3346704"/>
+            <a:ext cx="2871216" cy="457200"/>
           </a:xfrm>
           <a:prstGeom prst="rect">
             <a:avLst/>
@@ -35292,8 +35851,8 @@
         </p:nvSpPr>
         <p:spPr>
           <a:xfrm>
-            <a:off x="5285232" y="3822192"/>
-            <a:ext cx="2359152" cy="676656"/>
+            <a:off x="5779008" y="3822192"/>
+            <a:ext cx="2852928" cy="676656"/>
           </a:xfrm>
           <a:prstGeom prst="rect">
             <a:avLst/>
@@ -35322,10 +35881,44 @@
             <a:endParaRPr lang="en-US" sz="1100" dirty="0"/>
           </a:p>
         </p:txBody>
+      </p:sp>
+      <p:sp>
+        <p:nvSpPr>
+          <p:cNvPr id="26" name="Shape 20"/>
+          <p:cNvSpPr/>
+          <p:nvPr/>
+        </p:nvSpPr>
+        <p:spPr>
+          <a:xfrm>
+            <a:off x="9257386" y="1490472"/>
+            <a:ext cx="2449678" cy="2852928"/>
+          </a:xfrm>
+          <a:prstGeom prst="roundRect">
+            <a:avLst>
+              <a:gd name="adj" fmla="val 5226"/>
+            </a:avLst>
+          </a:prstGeom>
+          <a:solidFill>
+            <a:srgbClr val="FFFFFF"/>
+          </a:solidFill>
+          <a:ln w="12700">
+            <a:solidFill>
+              <a:srgbClr val="333333"/>
+            </a:solidFill>
+            <a:prstDash val="solid"/>
+          </a:ln>
+          <a:effectLst>
+            <a:outerShdw sx="100000" sy="100000" kx="0" ky="0" algn="bl" rotWithShape="0" blurRad="177800" dist="38100" dir="5400000">
+              <a:srgbClr val="0F3352">
+                <a:alpha val="10000"/>
+              </a:srgbClr>
+            </a:outerShdw>
+          </a:effectLst>
+        </p:spPr>
       </p:sp>
       <p:pic>
         <p:nvPicPr>
-          <p:cNvPr id="26" name="Image 4" descr="preencoded.png">    </p:cNvPr>
+          <p:cNvPr id="27" name="Image 4" descr="preencoded.png">    </p:cNvPr>
           <p:cNvPicPr>
             <a:picLocks noChangeAspect="1"/>
           </p:cNvPicPr>
@@ -35339,8 +35932,8 @@
         </p:blipFill>
         <p:spPr>
           <a:xfrm>
-            <a:off x="8177479" y="1572768"/>
-            <a:ext cx="3447288" cy="2651760"/>
+            <a:off x="9339682" y="1572768"/>
+            <a:ext cx="2285086" cy="2688336"/>
           </a:xfrm>
           <a:prstGeom prst="rect">
             <a:avLst/>
@@ -35349,7 +35942,7 @@
       </p:pic>
       <p:sp>
         <p:nvSpPr>
-          <p:cNvPr id="27" name="Shape 20"/>
+          <p:cNvPr id="28" name="Shape 21"/>
           <p:cNvSpPr/>
           <p:nvPr/>
         </p:nvSpPr>
@@ -35383,7 +35976,7 @@
       </p:sp>
       <p:sp>
         <p:nvSpPr>
-          <p:cNvPr id="28" name="Text 21"/>
+          <p:cNvPr id="29" name="Text 22"/>
           <p:cNvSpPr/>
           <p:nvPr/>
         </p:nvSpPr>
@@ -35422,7 +36015,7 @@
       </p:sp>
       <p:sp>
         <p:nvSpPr>
-          <p:cNvPr id="29" name="Text 22"/>
+          <p:cNvPr id="30" name="Text 23"/>
           <p:cNvSpPr/>
           <p:nvPr/>
         </p:nvSpPr>
@@ -35461,7 +36054,7 @@
       </p:sp>
       <p:sp>
         <p:nvSpPr>
-          <p:cNvPr id="30" name="Text 23"/>
+          <p:cNvPr id="31" name="Text 24"/>
           <p:cNvSpPr/>
           <p:nvPr/>
         </p:nvSpPr>
@@ -35500,7 +36093,7 @@
       </p:sp>
       <p:sp>
         <p:nvSpPr>
-          <p:cNvPr id="31" name="Text 24"/>
+          <p:cNvPr id="32" name="Text 25"/>
           <p:cNvSpPr/>
           <p:nvPr/>
         </p:nvSpPr>
@@ -35569,9 +36162,65 @@
           <a:chExt cx="0" cy="0"/>
         </a:xfrm>
       </p:grpSpPr>
+      <p:sp>
+        <p:nvSpPr>
+          <p:cNvPr id="2" name="Shape 0"/>
+          <p:cNvSpPr/>
+          <p:nvPr/>
+        </p:nvSpPr>
+        <p:spPr>
+          <a:xfrm>
+            <a:off x="-1097280" y="-1280160"/>
+            <a:ext cx="3840480" cy="3840480"/>
+          </a:xfrm>
+          <a:prstGeom prst="ellipse">
+            <a:avLst/>
+          </a:prstGeom>
+          <a:solidFill>
+            <a:srgbClr val="FFFFFF">
+              <a:alpha val="12000"/>
+            </a:srgbClr>
+          </a:solidFill>
+          <a:ln/>
+        </p:spPr>
+      </p:sp>
+      <p:sp>
+        <p:nvSpPr>
+          <p:cNvPr id="3" name="Shape 1"/>
+          <p:cNvSpPr/>
+          <p:nvPr/>
+        </p:nvSpPr>
+        <p:spPr>
+          <a:xfrm>
+            <a:off x="2294084" y="3447288"/>
+            <a:ext cx="7603528" cy="3054096"/>
+          </a:xfrm>
+          <a:prstGeom prst="roundRect">
+            <a:avLst>
+              <a:gd name="adj" fmla="val 4192"/>
+            </a:avLst>
+          </a:prstGeom>
+          <a:solidFill>
+            <a:srgbClr val="FFFFFF"/>
+          </a:solidFill>
+          <a:ln w="12700">
+            <a:solidFill>
+              <a:srgbClr val="333333"/>
+            </a:solidFill>
+            <a:prstDash val="solid"/>
+          </a:ln>
+          <a:effectLst>
+            <a:outerShdw sx="100000" sy="100000" kx="0" ky="0" algn="bl" rotWithShape="0" blurRad="177800" dist="38100" dir="5400000">
+              <a:srgbClr val="0F3352">
+                <a:alpha val="10000"/>
+              </a:srgbClr>
+            </a:outerShdw>
+          </a:effectLst>
+        </p:spPr>
+      </p:sp>
       <p:pic>
         <p:nvPicPr>
-          <p:cNvPr id="2" name="Image 0" descr="preencoded.png">    </p:cNvPr>
+          <p:cNvPr id="4" name="Image 0" descr="preencoded.png">    </p:cNvPr>
           <p:cNvPicPr>
             <a:picLocks noChangeAspect="1"/>
           </p:cNvPicPr>
@@ -35585,8 +36234,8 @@
         </p:blipFill>
         <p:spPr>
           <a:xfrm>
-            <a:off x="4111600" y="4023360"/>
-            <a:ext cx="3968496" cy="2834640"/>
+            <a:off x="2376380" y="3529584"/>
+            <a:ext cx="7438936" cy="2889504"/>
           </a:xfrm>
           <a:prstGeom prst="rect">
             <a:avLst/>
@@ -35595,29 +36244,7 @@
       </p:pic>
       <p:sp>
         <p:nvSpPr>
-          <p:cNvPr id="3" name="Shape 0"/>
-          <p:cNvSpPr/>
-          <p:nvPr/>
-        </p:nvSpPr>
-        <p:spPr>
-          <a:xfrm>
-            <a:off x="-1097280" y="-1280160"/>
-            <a:ext cx="3840480" cy="3840480"/>
-          </a:xfrm>
-          <a:prstGeom prst="ellipse">
-            <a:avLst/>
-          </a:prstGeom>
-          <a:solidFill>
-            <a:srgbClr val="FFFFFF">
-              <a:alpha val="12000"/>
-            </a:srgbClr>
-          </a:solidFill>
-          <a:ln/>
-        </p:spPr>
-      </p:sp>
-      <p:sp>
-        <p:nvSpPr>
-          <p:cNvPr id="4" name="Text 1"/>
+          <p:cNvPr id="5" name="Text 2"/>
           <p:cNvSpPr/>
           <p:nvPr/>
         </p:nvSpPr>
@@ -35658,7 +36285,7 @@
       </p:sp>
       <p:sp>
         <p:nvSpPr>
-          <p:cNvPr id="5" name="Text 2"/>
+          <p:cNvPr id="6" name="Text 3"/>
           <p:cNvSpPr/>
           <p:nvPr/>
         </p:nvSpPr>
@@ -35697,14 +36324,14 @@
       </p:sp>
       <p:sp>
         <p:nvSpPr>
-          <p:cNvPr id="6" name="Text 3"/>
+          <p:cNvPr id="7" name="Text 4"/>
           <p:cNvSpPr/>
           <p:nvPr/>
         </p:nvSpPr>
         <p:spPr>
           <a:xfrm>
             <a:off x="566928" y="2706624"/>
-            <a:ext cx="8778240" cy="822960"/>
+            <a:ext cx="8778240" cy="731520"/>
           </a:xfrm>
           <a:prstGeom prst="rect">
             <a:avLst/>
@@ -35738,7 +36365,7 @@
       </p:sp>
       <p:sp>
         <p:nvSpPr>
-          <p:cNvPr id="7" name="Text 4"/>
+          <p:cNvPr id="8" name="Text 5"/>
           <p:cNvSpPr/>
           <p:nvPr/>
         </p:nvSpPr>
@@ -35777,7 +36404,7 @@
       </p:sp>
       <p:sp>
         <p:nvSpPr>
-          <p:cNvPr id="8" name="Text 5"/>
+          <p:cNvPr id="9" name="Text 6"/>
           <p:cNvSpPr/>
           <p:nvPr/>
         </p:nvSpPr>
